--- a/presentacion-procesos-hilos-sincronizacion-unificada.pptx
+++ b/presentacion-procesos-hilos-sincronizacion-unificada.pptx
@@ -5,13 +5,14 @@
     <p:sldMasterId id="2147483648" r:id="rId1"/>
   </p:sldMasterIdLst>
   <p:notesMasterIdLst>
-    <p:notesMasterId r:id="rId6"/>
+    <p:notesMasterId r:id="rId7"/>
   </p:notesMasterIdLst>
   <p:sldIdLst>
     <p:sldId id="259" r:id="rId2"/>
-    <p:sldId id="258" r:id="rId3"/>
-    <p:sldId id="256" r:id="rId4"/>
-    <p:sldId id="257" r:id="rId5"/>
+    <p:sldId id="270" r:id="rId3"/>
+    <p:sldId id="258" r:id="rId4"/>
+    <p:sldId id="256" r:id="rId5"/>
+    <p:sldId id="257" r:id="rId6"/>
   </p:sldIdLst>
   <p:sldSz cx="12192000" cy="6858000"/>
   <p:notesSz cx="6858000" cy="9144000"/>
@@ -110,6 +111,11 @@
       </a:defRPr>
     </a:lvl9pPr>
   </p:defaultTextStyle>
+  <p:extLst>
+    <p:ext uri="{EFAFB233-063F-42B5-8137-9DF3F51BA10A}">
+      <p15:sldGuideLst xmlns:p15="http://schemas.microsoft.com/office/powerpoint/2012/main"/>
+    </p:ext>
+  </p:extLst>
 </p:presentation>
 </file>
 
@@ -1361,13 +1367,7 @@
       </p:grpSpPr>
       <p:sp>
         <p:nvSpPr>
-          <p:cNvPr id="201" name="txt201">
-            <a:extLst>
-              <a:ext uri="{FF2B5EF4-FFF2-40B4-BE49-F238E27FC236}">
-                <a16:creationId xmlns:a16="http://schemas.microsoft.com/office/drawing/2014/main" id="{9BF22391-0507-47F5-A562-E2A448E1A11F}"/>
-              </a:ext>
-            </a:extLst>
-          </p:cNvPr>
+          <p:cNvPr id="301" name="txt301"/>
           <p:cNvSpPr>
             <a:spLocks noGrp="1"/>
           </p:cNvSpPr>
@@ -1392,11 +1392,9 @@
           </a:bodyPr>
           <a:lstStyle/>
           <a:p>
-            <a:pPr algn="l">
-              <a:buNone/>
-            </a:pPr>
-            <a:r>
-              <a:rPr sz="1050" b="1" i="0" dirty="0">
+            <a:pPr algn="l"/>
+            <a:r>
+              <a:rPr lang="es-ES" sz="1050" b="1" i="0">
                 <a:solidFill>
                   <a:srgbClr val="3D8DFF"/>
                 </a:solidFill>
@@ -1411,13 +1409,7 @@
       </p:sp>
       <p:sp>
         <p:nvSpPr>
-          <p:cNvPr id="202" name="txt202">
-            <a:extLst>
-              <a:ext uri="{FF2B5EF4-FFF2-40B4-BE49-F238E27FC236}">
-                <a16:creationId xmlns:a16="http://schemas.microsoft.com/office/drawing/2014/main" id="{BFF159CA-2AA5-420F-B4FB-C26CCB248C12}"/>
-              </a:ext>
-            </a:extLst>
-          </p:cNvPr>
+          <p:cNvPr id="302" name="txt302"/>
           <p:cNvSpPr>
             <a:spLocks noGrp="1"/>
           </p:cNvSpPr>
@@ -1442,11 +1434,9 @@
           </a:bodyPr>
           <a:lstStyle/>
           <a:p>
-            <a:pPr algn="l">
-              <a:buNone/>
-            </a:pPr>
-            <a:r>
-              <a:rPr sz="3450" b="1" i="0">
+            <a:pPr algn="l"/>
+            <a:r>
+              <a:rPr lang="es-ES" sz="3450" b="1" i="0">
                 <a:solidFill>
                   <a:srgbClr val="101820"/>
                 </a:solidFill>
@@ -1454,23 +1444,206 @@
                 <a:ea typeface="Arial"/>
                 <a:cs typeface="Arial"/>
               </a:rPr>
-              <a:t>Técnicas de sincronización de hilos</a:t>
-            </a:r>
-          </a:p>
-        </p:txBody>
-      </p:sp>
-      <p:sp>
-        <p:nvSpPr>
-          <p:cNvPr id="208" name="box208">
-            <a:extLst>
-              <a:ext uri="{FF2B5EF4-FFF2-40B4-BE49-F238E27FC236}">
-                <a16:creationId xmlns:a16="http://schemas.microsoft.com/office/drawing/2014/main" id="{C8C7A1D2-11A2-481E-97F9-BBC32535BC6F}"/>
-              </a:ext>
-            </a:extLst>
-          </p:cNvPr>
-          <p:cNvSpPr>
-            <a:spLocks noGrp="1"/>
-          </p:cNvSpPr>
+              <a:t>Sincronización distribuida</a:t>
+            </a:r>
+          </a:p>
+        </p:txBody>
+      </p:sp>
+      <p:sp>
+        <p:nvSpPr>
+          <p:cNvPr id="303" name="box303"/>
+          <p:cNvSpPr/>
+          <p:nvPr/>
+        </p:nvSpPr>
+        <p:spPr>
+          <a:xfrm>
+            <a:off x="8631936" y="548640"/>
+            <a:ext cx="3172968" cy="365760"/>
+          </a:xfrm>
+          <a:prstGeom prst="roundRect">
+            <a:avLst>
+              <a:gd name="adj" fmla="val 28000"/>
+            </a:avLst>
+          </a:prstGeom>
+          <a:solidFill>
+            <a:srgbClr val="DDEEFF"/>
+          </a:solidFill>
+          <a:ln w="9525">
+            <a:solidFill>
+              <a:srgbClr val="D7E2EF"/>
+            </a:solidFill>
+            <a:prstDash val="solid"/>
+          </a:ln>
+        </p:spPr>
+        <p:txBody>
+          <a:bodyPr/>
+          <a:lstStyle/>
+          <a:p>
+            <a:endParaRPr/>
+          </a:p>
+        </p:txBody>
+      </p:sp>
+      <p:sp>
+        <p:nvSpPr>
+          <p:cNvPr id="304" name="txt304"/>
+          <p:cNvSpPr>
+            <a:spLocks noGrp="1"/>
+          </p:cNvSpPr>
+          <p:nvPr/>
+        </p:nvSpPr>
+        <p:spPr>
+          <a:xfrm>
+            <a:off x="8631936" y="649224"/>
+            <a:ext cx="3172968" cy="219456"/>
+          </a:xfrm>
+          <a:prstGeom prst="rect">
+            <a:avLst/>
+          </a:prstGeom>
+          <a:noFill/>
+          <a:ln w="0">
+            <a:noFill/>
+          </a:ln>
+        </p:spPr>
+        <p:txBody>
+          <a:bodyPr lIns="0" tIns="0" rIns="0" bIns="0" anchor="t">
+            <a:normAutofit/>
+          </a:bodyPr>
+          <a:lstStyle/>
+          <a:p>
+            <a:pPr algn="ctr"/>
+            <a:r>
+              <a:rPr lang="es-ES" sz="1050" b="1" i="0">
+                <a:solidFill>
+                  <a:srgbClr val="16324F"/>
+                </a:solidFill>
+                <a:latin typeface="Arial"/>
+                <a:ea typeface="Arial"/>
+                <a:cs typeface="Arial"/>
+              </a:rPr>
+              <a:t>Nivel A · entre nodos</a:t>
+            </a:r>
+          </a:p>
+        </p:txBody>
+      </p:sp>
+      <p:sp>
+        <p:nvSpPr>
+          <p:cNvPr id="305" name="box305"/>
+          <p:cNvSpPr/>
+          <p:nvPr/>
+        </p:nvSpPr>
+        <p:spPr>
+          <a:xfrm>
+            <a:off x="393192" y="1316736"/>
+            <a:ext cx="2313432" cy="292608"/>
+          </a:xfrm>
+          <a:prstGeom prst="roundRect">
+            <a:avLst>
+              <a:gd name="adj" fmla="val 32000"/>
+            </a:avLst>
+          </a:prstGeom>
+          <a:solidFill>
+            <a:srgbClr val="16324F"/>
+          </a:solidFill>
+          <a:ln w="0">
+            <a:noFill/>
+          </a:ln>
+        </p:spPr>
+        <p:txBody>
+          <a:bodyPr/>
+          <a:lstStyle/>
+          <a:p>
+            <a:endParaRPr/>
+          </a:p>
+        </p:txBody>
+      </p:sp>
+      <p:sp>
+        <p:nvSpPr>
+          <p:cNvPr id="306" name="txt306"/>
+          <p:cNvSpPr>
+            <a:spLocks noGrp="1"/>
+          </p:cNvSpPr>
+          <p:nvPr/>
+        </p:nvSpPr>
+        <p:spPr>
+          <a:xfrm>
+            <a:off x="393192" y="1380744"/>
+            <a:ext cx="2313432" cy="182880"/>
+          </a:xfrm>
+          <a:prstGeom prst="rect">
+            <a:avLst/>
+          </a:prstGeom>
+          <a:noFill/>
+          <a:ln w="0">
+            <a:noFill/>
+          </a:ln>
+        </p:spPr>
+        <p:txBody>
+          <a:bodyPr lIns="0" tIns="0" rIns="0" bIns="0" anchor="t">
+            <a:normAutofit/>
+          </a:bodyPr>
+          <a:lstStyle/>
+          <a:p>
+            <a:pPr algn="ctr"/>
+            <a:r>
+              <a:rPr lang="es-ES" sz="900" b="1" i="0">
+                <a:solidFill>
+                  <a:srgbClr val="FFFFFF"/>
+                </a:solidFill>
+                <a:latin typeface="Arial"/>
+                <a:ea typeface="Arial"/>
+                <a:cs typeface="Arial"/>
+              </a:rPr>
+              <a:t>TIPOLOGÍAS</a:t>
+            </a:r>
+          </a:p>
+        </p:txBody>
+      </p:sp>
+      <p:sp>
+        <p:nvSpPr>
+          <p:cNvPr id="307" name="txt307"/>
+          <p:cNvSpPr>
+            <a:spLocks noGrp="1"/>
+          </p:cNvSpPr>
+          <p:nvPr/>
+        </p:nvSpPr>
+        <p:spPr>
+          <a:xfrm>
+            <a:off x="2862072" y="1371600"/>
+            <a:ext cx="8503920" cy="210312"/>
+          </a:xfrm>
+          <a:prstGeom prst="rect">
+            <a:avLst/>
+          </a:prstGeom>
+          <a:noFill/>
+          <a:ln w="0">
+            <a:noFill/>
+          </a:ln>
+        </p:spPr>
+        <p:txBody>
+          <a:bodyPr lIns="0" tIns="0" rIns="0" bIns="0" anchor="t">
+            <a:normAutofit/>
+          </a:bodyPr>
+          <a:lstStyle/>
+          <a:p>
+            <a:pPr algn="l"/>
+            <a:r>
+              <a:rPr lang="es-ES" sz="1125" b="0" i="0">
+                <a:solidFill>
+                  <a:srgbClr val="59636E"/>
+                </a:solidFill>
+                <a:latin typeface="Arial"/>
+                <a:ea typeface="Arial"/>
+                <a:cs typeface="Arial"/>
+              </a:rPr>
+              <a:t>Sin memoria compartida ni reloj común: toda coordinación ocurre por mensajes.</a:t>
+            </a:r>
+          </a:p>
+        </p:txBody>
+      </p:sp>
+      <p:sp>
+        <p:nvSpPr>
+          <p:cNvPr id="308" name="box308"/>
+          <p:cNvSpPr/>
           <p:nvPr/>
         </p:nvSpPr>
         <p:spPr>
@@ -1503,13 +1676,7 @@
       </p:sp>
       <p:sp>
         <p:nvSpPr>
-          <p:cNvPr id="209" name="txt209">
-            <a:extLst>
-              <a:ext uri="{FF2B5EF4-FFF2-40B4-BE49-F238E27FC236}">
-                <a16:creationId xmlns:a16="http://schemas.microsoft.com/office/drawing/2014/main" id="{2EEF117B-F4DE-45AE-BF49-C78E2450312B}"/>
-              </a:ext>
-            </a:extLst>
-          </p:cNvPr>
+          <p:cNvPr id="309" name="txt309"/>
           <p:cNvSpPr>
             <a:spLocks noGrp="1"/>
           </p:cNvSpPr>
@@ -1518,27 +1685,25 @@
         <p:spPr>
           <a:xfrm>
             <a:off x="539496" y="1901952"/>
-            <a:ext cx="1764792" cy="201168"/>
-          </a:xfrm>
-          <a:prstGeom prst="rect">
-            <a:avLst/>
-          </a:prstGeom>
-          <a:noFill/>
-          <a:ln w="0">
-            <a:noFill/>
-          </a:ln>
-        </p:spPr>
-        <p:txBody>
-          <a:bodyPr lIns="0" tIns="0" rIns="0" bIns="0" anchor="t">
-            <a:normAutofit/>
-          </a:bodyPr>
-          <a:lstStyle/>
-          <a:p>
-            <a:pPr algn="l">
-              <a:buNone/>
-            </a:pPr>
-            <a:r>
-              <a:rPr sz="875" b="1" i="0">
+            <a:ext cx="1719072" cy="201168"/>
+          </a:xfrm>
+          <a:prstGeom prst="rect">
+            <a:avLst/>
+          </a:prstGeom>
+          <a:noFill/>
+          <a:ln w="0">
+            <a:noFill/>
+          </a:ln>
+        </p:spPr>
+        <p:txBody>
+          <a:bodyPr lIns="0" tIns="0" rIns="0" bIns="0" anchor="t">
+            <a:normAutofit/>
+          </a:bodyPr>
+          <a:lstStyle/>
+          <a:p>
+            <a:pPr algn="l"/>
+            <a:r>
+              <a:rPr lang="es-ES" sz="875" b="1" i="0">
                 <a:solidFill>
                   <a:srgbClr val="3D8DFF"/>
                 </a:solidFill>
@@ -1546,49 +1711,41 @@
                 <a:ea typeface="Arial"/>
                 <a:cs typeface="Arial"/>
               </a:rPr>
-              <a:t>TÉCNICA</a:t>
-            </a:r>
-          </a:p>
-        </p:txBody>
-      </p:sp>
-      <p:sp>
-        <p:nvSpPr>
-          <p:cNvPr id="210" name="txt210">
-            <a:extLst>
-              <a:ext uri="{FF2B5EF4-FFF2-40B4-BE49-F238E27FC236}">
-                <a16:creationId xmlns:a16="http://schemas.microsoft.com/office/drawing/2014/main" id="{69522252-860E-4883-8C56-3DA23A2142E8}"/>
-              </a:ext>
-            </a:extLst>
-          </p:cNvPr>
-          <p:cNvSpPr>
-            <a:spLocks noGrp="1"/>
-          </p:cNvSpPr>
-          <p:nvPr/>
-        </p:nvSpPr>
-        <p:spPr>
-          <a:xfrm>
-            <a:off x="2414016" y="1901952"/>
-            <a:ext cx="1920240" cy="201168"/>
-          </a:xfrm>
-          <a:prstGeom prst="rect">
-            <a:avLst/>
-          </a:prstGeom>
-          <a:noFill/>
-          <a:ln w="0">
-            <a:noFill/>
-          </a:ln>
-        </p:spPr>
-        <p:txBody>
-          <a:bodyPr lIns="0" tIns="0" rIns="0" bIns="0" anchor="t">
-            <a:normAutofit/>
-          </a:bodyPr>
-          <a:lstStyle/>
-          <a:p>
-            <a:pPr algn="l">
-              <a:buNone/>
-            </a:pPr>
-            <a:r>
-              <a:rPr sz="875" b="1" i="0">
+              <a:t>CATEGORÍA</a:t>
+            </a:r>
+          </a:p>
+        </p:txBody>
+      </p:sp>
+      <p:sp>
+        <p:nvSpPr>
+          <p:cNvPr id="310" name="txt310"/>
+          <p:cNvSpPr>
+            <a:spLocks noGrp="1"/>
+          </p:cNvSpPr>
+          <p:nvPr/>
+        </p:nvSpPr>
+        <p:spPr>
+          <a:xfrm>
+            <a:off x="2368296" y="1901952"/>
+            <a:ext cx="1810512" cy="201168"/>
+          </a:xfrm>
+          <a:prstGeom prst="rect">
+            <a:avLst/>
+          </a:prstGeom>
+          <a:noFill/>
+          <a:ln w="0">
+            <a:noFill/>
+          </a:ln>
+        </p:spPr>
+        <p:txBody>
+          <a:bodyPr lIns="0" tIns="0" rIns="0" bIns="0" anchor="t">
+            <a:normAutofit/>
+          </a:bodyPr>
+          <a:lstStyle/>
+          <a:p>
+            <a:pPr algn="l"/>
+            <a:r>
+              <a:rPr lang="es-ES" sz="875" b="1" i="0">
                 <a:solidFill>
                   <a:srgbClr val="3D8DFF"/>
                 </a:solidFill>
@@ -1596,49 +1753,41 @@
                 <a:ea typeface="Arial"/>
                 <a:cs typeface="Arial"/>
               </a:rPr>
-              <a:t>QUÉ GARANTIZA</a:t>
-            </a:r>
-          </a:p>
-        </p:txBody>
-      </p:sp>
-      <p:sp>
-        <p:nvSpPr>
-          <p:cNvPr id="211" name="txt211">
-            <a:extLst>
-              <a:ext uri="{FF2B5EF4-FFF2-40B4-BE49-F238E27FC236}">
-                <a16:creationId xmlns:a16="http://schemas.microsoft.com/office/drawing/2014/main" id="{C598CA4B-B8E9-4A82-A53F-33DD727678CF}"/>
-              </a:ext>
-            </a:extLst>
-          </p:cNvPr>
-          <p:cNvSpPr>
-            <a:spLocks noGrp="1"/>
-          </p:cNvSpPr>
-          <p:nvPr/>
-        </p:nvSpPr>
-        <p:spPr>
-          <a:xfrm>
-            <a:off x="4443984" y="1901952"/>
-            <a:ext cx="969264" cy="201168"/>
-          </a:xfrm>
-          <a:prstGeom prst="rect">
-            <a:avLst/>
-          </a:prstGeom>
-          <a:noFill/>
-          <a:ln w="0">
-            <a:noFill/>
-          </a:ln>
-        </p:spPr>
-        <p:txBody>
-          <a:bodyPr lIns="0" tIns="0" rIns="0" bIns="0" anchor="t">
-            <a:normAutofit/>
-          </a:bodyPr>
-          <a:lstStyle/>
-          <a:p>
-            <a:pPr algn="l">
-              <a:buNone/>
-            </a:pPr>
-            <a:r>
-              <a:rPr sz="875" b="1" i="0">
+              <a:t>TÉCNICAS REPRESENTATIVAS</a:t>
+            </a:r>
+          </a:p>
+        </p:txBody>
+      </p:sp>
+      <p:sp>
+        <p:nvSpPr>
+          <p:cNvPr id="311" name="txt311"/>
+          <p:cNvSpPr>
+            <a:spLocks noGrp="1"/>
+          </p:cNvSpPr>
+          <p:nvPr/>
+        </p:nvSpPr>
+        <p:spPr>
+          <a:xfrm>
+            <a:off x="4288536" y="1901952"/>
+            <a:ext cx="1673352" cy="201168"/>
+          </a:xfrm>
+          <a:prstGeom prst="rect">
+            <a:avLst/>
+          </a:prstGeom>
+          <a:noFill/>
+          <a:ln w="0">
+            <a:noFill/>
+          </a:ln>
+        </p:spPr>
+        <p:txBody>
+          <a:bodyPr lIns="0" tIns="0" rIns="0" bIns="0" anchor="t">
+            <a:normAutofit/>
+          </a:bodyPr>
+          <a:lstStyle/>
+          <a:p>
+            <a:pPr algn="l"/>
+            <a:r>
+              <a:rPr lang="es-ES" sz="875" b="1" i="0">
                 <a:solidFill>
                   <a:srgbClr val="3D8DFF"/>
                 </a:solidFill>
@@ -1646,49 +1795,41 @@
                 <a:ea typeface="Arial"/>
                 <a:cs typeface="Arial"/>
               </a:rPr>
-              <a:t>CÓMO ESPERA</a:t>
-            </a:r>
-          </a:p>
-        </p:txBody>
-      </p:sp>
-      <p:sp>
-        <p:nvSpPr>
-          <p:cNvPr id="212" name="txt212">
-            <a:extLst>
-              <a:ext uri="{FF2B5EF4-FFF2-40B4-BE49-F238E27FC236}">
-                <a16:creationId xmlns:a16="http://schemas.microsoft.com/office/drawing/2014/main" id="{81C4A169-02CD-4DD2-8F1E-2F780A889B97}"/>
-              </a:ext>
-            </a:extLst>
-          </p:cNvPr>
-          <p:cNvSpPr>
-            <a:spLocks noGrp="1"/>
-          </p:cNvSpPr>
-          <p:nvPr/>
-        </p:nvSpPr>
-        <p:spPr>
-          <a:xfrm>
-            <a:off x="5522976" y="1901952"/>
-            <a:ext cx="1152144" cy="201168"/>
-          </a:xfrm>
-          <a:prstGeom prst="rect">
-            <a:avLst/>
-          </a:prstGeom>
-          <a:noFill/>
-          <a:ln w="0">
-            <a:noFill/>
-          </a:ln>
-        </p:spPr>
-        <p:txBody>
-          <a:bodyPr lIns="0" tIns="0" rIns="0" bIns="0" anchor="t">
-            <a:normAutofit/>
-          </a:bodyPr>
-          <a:lstStyle/>
-          <a:p>
-            <a:pPr algn="l">
-              <a:buNone/>
-            </a:pPr>
-            <a:r>
-              <a:rPr sz="875" b="1" i="0">
+              <a:t>QUÉ RESUELVE</a:t>
+            </a:r>
+          </a:p>
+        </p:txBody>
+      </p:sp>
+      <p:sp>
+        <p:nvSpPr>
+          <p:cNvPr id="312" name="txt312"/>
+          <p:cNvSpPr>
+            <a:spLocks noGrp="1"/>
+          </p:cNvSpPr>
+          <p:nvPr/>
+        </p:nvSpPr>
+        <p:spPr>
+          <a:xfrm>
+            <a:off x="6071616" y="1901952"/>
+            <a:ext cx="1216152" cy="201168"/>
+          </a:xfrm>
+          <a:prstGeom prst="rect">
+            <a:avLst/>
+          </a:prstGeom>
+          <a:noFill/>
+          <a:ln w="0">
+            <a:noFill/>
+          </a:ln>
+        </p:spPr>
+        <p:txBody>
+          <a:bodyPr lIns="0" tIns="0" rIns="0" bIns="0" anchor="t">
+            <a:normAutofit/>
+          </a:bodyPr>
+          <a:lstStyle/>
+          <a:p>
+            <a:pPr algn="l"/>
+            <a:r>
+              <a:rPr lang="es-ES" sz="875" b="1" i="0">
                 <a:solidFill>
                   <a:srgbClr val="3D8DFF"/>
                 </a:solidFill>
@@ -1696,49 +1837,41 @@
                 <a:ea typeface="Arial"/>
                 <a:cs typeface="Arial"/>
               </a:rPr>
-              <a:t>COSTO</a:t>
-            </a:r>
-          </a:p>
-        </p:txBody>
-      </p:sp>
-      <p:sp>
-        <p:nvSpPr>
-          <p:cNvPr id="213" name="txt213">
-            <a:extLst>
-              <a:ext uri="{FF2B5EF4-FFF2-40B4-BE49-F238E27FC236}">
-                <a16:creationId xmlns:a16="http://schemas.microsoft.com/office/drawing/2014/main" id="{A38D8545-1082-432C-B483-F321504E9325}"/>
-              </a:ext>
-            </a:extLst>
-          </p:cNvPr>
-          <p:cNvSpPr>
-            <a:spLocks noGrp="1"/>
-          </p:cNvSpPr>
-          <p:nvPr/>
-        </p:nvSpPr>
-        <p:spPr>
-          <a:xfrm>
-            <a:off x="6784848" y="1901952"/>
-            <a:ext cx="2377440" cy="201168"/>
-          </a:xfrm>
-          <a:prstGeom prst="rect">
-            <a:avLst/>
-          </a:prstGeom>
-          <a:noFill/>
-          <a:ln w="0">
-            <a:noFill/>
-          </a:ln>
-        </p:spPr>
-        <p:txBody>
-          <a:bodyPr lIns="0" tIns="0" rIns="0" bIns="0" anchor="t">
-            <a:normAutofit/>
-          </a:bodyPr>
-          <a:lstStyle/>
-          <a:p>
-            <a:pPr algn="l">
-              <a:buNone/>
-            </a:pPr>
-            <a:r>
-              <a:rPr sz="875" b="1" i="0">
+              <a:t>CÓMO COORDINA</a:t>
+            </a:r>
+          </a:p>
+        </p:txBody>
+      </p:sp>
+      <p:sp>
+        <p:nvSpPr>
+          <p:cNvPr id="313" name="txt313"/>
+          <p:cNvSpPr>
+            <a:spLocks noGrp="1"/>
+          </p:cNvSpPr>
+          <p:nvPr/>
+        </p:nvSpPr>
+        <p:spPr>
+          <a:xfrm>
+            <a:off x="7397496" y="1901952"/>
+            <a:ext cx="1993392" cy="201168"/>
+          </a:xfrm>
+          <a:prstGeom prst="rect">
+            <a:avLst/>
+          </a:prstGeom>
+          <a:noFill/>
+          <a:ln w="0">
+            <a:noFill/>
+          </a:ln>
+        </p:spPr>
+        <p:txBody>
+          <a:bodyPr lIns="0" tIns="0" rIns="0" bIns="0" anchor="t">
+            <a:normAutofit/>
+          </a:bodyPr>
+          <a:lstStyle/>
+          <a:p>
+            <a:pPr algn="l"/>
+            <a:r>
+              <a:rPr lang="es-ES" sz="875" b="1" i="0">
                 <a:solidFill>
                   <a:srgbClr val="3D8DFF"/>
                 </a:solidFill>
@@ -1753,42 +1886,34 @@
       </p:sp>
       <p:sp>
         <p:nvSpPr>
-          <p:cNvPr id="214" name="txt214">
-            <a:extLst>
-              <a:ext uri="{FF2B5EF4-FFF2-40B4-BE49-F238E27FC236}">
-                <a16:creationId xmlns:a16="http://schemas.microsoft.com/office/drawing/2014/main" id="{F0C9849E-3ABA-4997-A752-867E4882B13E}"/>
-              </a:ext>
-            </a:extLst>
-          </p:cNvPr>
-          <p:cNvSpPr>
-            <a:spLocks noGrp="1"/>
-          </p:cNvSpPr>
-          <p:nvPr/>
-        </p:nvSpPr>
-        <p:spPr>
-          <a:xfrm>
-            <a:off x="9272016" y="1901952"/>
-            <a:ext cx="2569464" cy="201168"/>
-          </a:xfrm>
-          <a:prstGeom prst="rect">
-            <a:avLst/>
-          </a:prstGeom>
-          <a:noFill/>
-          <a:ln w="0">
-            <a:noFill/>
-          </a:ln>
-        </p:spPr>
-        <p:txBody>
-          <a:bodyPr lIns="0" tIns="0" rIns="0" bIns="0" anchor="t">
-            <a:normAutofit/>
-          </a:bodyPr>
-          <a:lstStyle/>
-          <a:p>
-            <a:pPr algn="l">
-              <a:buNone/>
-            </a:pPr>
-            <a:r>
-              <a:rPr sz="875" b="1" i="0">
+          <p:cNvPr id="314" name="txt314"/>
+          <p:cNvSpPr>
+            <a:spLocks noGrp="1"/>
+          </p:cNvSpPr>
+          <p:nvPr/>
+        </p:nvSpPr>
+        <p:spPr>
+          <a:xfrm>
+            <a:off x="9500616" y="1901952"/>
+            <a:ext cx="2340864" cy="201168"/>
+          </a:xfrm>
+          <a:prstGeom prst="rect">
+            <a:avLst/>
+          </a:prstGeom>
+          <a:noFill/>
+          <a:ln w="0">
+            <a:noFill/>
+          </a:ln>
+        </p:spPr>
+        <p:txBody>
+          <a:bodyPr lIns="0" tIns="0" rIns="0" bIns="0" anchor="t">
+            <a:normAutofit/>
+          </a:bodyPr>
+          <a:lstStyle/>
+          <a:p>
+            <a:pPr algn="l"/>
+            <a:r>
+              <a:rPr lang="es-ES" sz="875" b="1" i="0">
                 <a:solidFill>
                   <a:srgbClr val="3D8DFF"/>
                 </a:solidFill>
@@ -1796,23 +1921,15 @@
                 <a:ea typeface="Arial"/>
                 <a:cs typeface="Arial"/>
               </a:rPr>
-              <a:t>CUÁNDO CONVIENE</a:t>
-            </a:r>
-          </a:p>
-        </p:txBody>
-      </p:sp>
-      <p:sp>
-        <p:nvSpPr>
-          <p:cNvPr id="215" name="box215">
-            <a:extLst>
-              <a:ext uri="{FF2B5EF4-FFF2-40B4-BE49-F238E27FC236}">
-                <a16:creationId xmlns:a16="http://schemas.microsoft.com/office/drawing/2014/main" id="{E51B3FAE-5353-47F3-A6A0-5F3243A847C3}"/>
-              </a:ext>
-            </a:extLst>
-          </p:cNvPr>
-          <p:cNvSpPr>
-            <a:spLocks noGrp="1"/>
-          </p:cNvSpPr>
+              <a:t>EN ESTE LABORATORIO</a:t>
+            </a:r>
+          </a:p>
+        </p:txBody>
+      </p:sp>
+      <p:sp>
+        <p:nvSpPr>
+          <p:cNvPr id="315" name="box315"/>
+          <p:cNvSpPr/>
           <p:nvPr/>
         </p:nvSpPr>
         <p:spPr>
@@ -1840,148 +1957,16 @@
       </p:sp>
       <p:sp>
         <p:nvSpPr>
-          <p:cNvPr id="216" name="box216">
-            <a:extLst>
-              <a:ext uri="{FF2B5EF4-FFF2-40B4-BE49-F238E27FC236}">
-                <a16:creationId xmlns:a16="http://schemas.microsoft.com/office/drawing/2014/main" id="{722DF90C-57EE-4E7E-A5D1-F125D09C5BA1}"/>
-              </a:ext>
-            </a:extLst>
-          </p:cNvPr>
-          <p:cNvSpPr>
-            <a:spLocks noGrp="1"/>
-          </p:cNvSpPr>
-          <p:nvPr/>
-        </p:nvSpPr>
-        <p:spPr>
-          <a:xfrm>
-            <a:off x="475488" y="3438144"/>
-            <a:ext cx="11247120" cy="1060704"/>
-          </a:xfrm>
-          <a:prstGeom prst="roundRect">
-            <a:avLst>
-              <a:gd name="adj" fmla="val 9000"/>
-            </a:avLst>
-          </a:prstGeom>
-          <a:solidFill>
-            <a:srgbClr val="DDEEFF"/>
-          </a:solidFill>
-          <a:ln w="0">
-            <a:noFill/>
-          </a:ln>
-        </p:spPr>
-        <p:txBody>
-          <a:bodyPr/>
-          <a:lstStyle/>
-          <a:p>
-            <a:endParaRPr/>
-          </a:p>
-        </p:txBody>
-      </p:sp>
-      <p:sp>
-        <p:nvSpPr>
-          <p:cNvPr id="217" name="box217">
-            <a:extLst>
-              <a:ext uri="{FF2B5EF4-FFF2-40B4-BE49-F238E27FC236}">
-                <a16:creationId xmlns:a16="http://schemas.microsoft.com/office/drawing/2014/main" id="{CE306B71-74E5-42F1-8623-D3E3C94474A1}"/>
-              </a:ext>
-            </a:extLst>
-          </p:cNvPr>
-          <p:cNvSpPr>
-            <a:spLocks noGrp="1"/>
-          </p:cNvSpPr>
-          <p:nvPr/>
-        </p:nvSpPr>
-        <p:spPr>
-          <a:xfrm>
-            <a:off x="475488" y="3438144"/>
-            <a:ext cx="45720" cy="1060704"/>
-          </a:xfrm>
-          <a:prstGeom prst="rect">
-            <a:avLst/>
-          </a:prstGeom>
-          <a:solidFill>
-            <a:srgbClr val="3D8DFF"/>
-          </a:solidFill>
-          <a:ln w="0">
-            <a:noFill/>
-          </a:ln>
-        </p:spPr>
-        <p:txBody>
-          <a:bodyPr/>
-          <a:lstStyle/>
-          <a:p>
-            <a:endParaRPr/>
-          </a:p>
-        </p:txBody>
-      </p:sp>
-      <p:sp>
-        <p:nvSpPr>
-          <p:cNvPr id="218" name="txt218">
-            <a:extLst>
-              <a:ext uri="{FF2B5EF4-FFF2-40B4-BE49-F238E27FC236}">
-                <a16:creationId xmlns:a16="http://schemas.microsoft.com/office/drawing/2014/main" id="{385C3EFB-3D82-40BA-B031-D4496C29E795}"/>
-              </a:ext>
-            </a:extLst>
-          </p:cNvPr>
-          <p:cNvSpPr>
-            <a:spLocks noGrp="1"/>
-          </p:cNvSpPr>
-          <p:nvPr/>
-        </p:nvSpPr>
-        <p:spPr>
-          <a:xfrm>
-            <a:off x="539496" y="2249424"/>
-            <a:ext cx="1764792" cy="365760"/>
-          </a:xfrm>
-          <a:prstGeom prst="rect">
-            <a:avLst/>
-          </a:prstGeom>
-          <a:noFill/>
-          <a:ln w="0">
-            <a:noFill/>
-          </a:ln>
-        </p:spPr>
-        <p:txBody>
-          <a:bodyPr lIns="0" tIns="0" rIns="0" bIns="0" anchor="t">
-            <a:normAutofit/>
-          </a:bodyPr>
-          <a:lstStyle/>
-          <a:p>
-            <a:pPr algn="l">
-              <a:buNone/>
-            </a:pPr>
-            <a:r>
-              <a:rPr sz="975" b="1" i="0">
-                <a:solidFill>
-                  <a:srgbClr val="16324F"/>
-                </a:solidFill>
-                <a:latin typeface="Arial"/>
-                <a:ea typeface="Arial"/>
-                <a:cs typeface="Arial"/>
-              </a:rPr>
-              <a:t>Mutex / synchronized</a:t>
-            </a:r>
-          </a:p>
-        </p:txBody>
-      </p:sp>
-      <p:sp>
-        <p:nvSpPr>
-          <p:cNvPr id="219" name="txt219">
-            <a:extLst>
-              <a:ext uri="{FF2B5EF4-FFF2-40B4-BE49-F238E27FC236}">
-                <a16:creationId xmlns:a16="http://schemas.microsoft.com/office/drawing/2014/main" id="{F2ACC454-A71A-42D4-AB19-EF2BDFAFC6A8}"/>
-              </a:ext>
-            </a:extLst>
-          </p:cNvPr>
-          <p:cNvSpPr>
-            <a:spLocks noGrp="1"/>
-          </p:cNvSpPr>
-          <p:nvPr/>
-        </p:nvSpPr>
-        <p:spPr>
-          <a:xfrm>
-            <a:off x="2414016" y="2267712"/>
-            <a:ext cx="1920240" cy="365760"/>
+          <p:cNvPr id="316" name="txt316"/>
+          <p:cNvSpPr>
+            <a:spLocks noGrp="1"/>
+          </p:cNvSpPr>
+          <p:nvPr/>
+        </p:nvSpPr>
+        <p:spPr>
+          <a:xfrm>
+            <a:off x="539496" y="2304288"/>
+            <a:ext cx="1719072" cy="457200"/>
           </a:xfrm>
           <a:prstGeom prst="rect">
             <a:avLst/>
@@ -2001,40 +1986,33 @@
               <a:lnSpc>
                 <a:spcPct val="90000"/>
               </a:lnSpc>
-              <a:buNone/>
-            </a:pPr>
-            <a:r>
-              <a:rPr sz="875" b="0" i="0">
-                <a:solidFill>
-                  <a:srgbClr val="59636E"/>
-                </a:solidFill>
-                <a:latin typeface="Arial"/>
-                <a:ea typeface="Arial"/>
-                <a:cs typeface="Arial"/>
-              </a:rPr>
-              <a:t>Un hilo a la vez en la región crítica</a:t>
-            </a:r>
-          </a:p>
-        </p:txBody>
-      </p:sp>
-      <p:sp>
-        <p:nvSpPr>
-          <p:cNvPr id="220" name="txt220">
-            <a:extLst>
-              <a:ext uri="{FF2B5EF4-FFF2-40B4-BE49-F238E27FC236}">
-                <a16:creationId xmlns:a16="http://schemas.microsoft.com/office/drawing/2014/main" id="{B2CF14E3-774A-4901-ACDD-AA2BF8330B58}"/>
-              </a:ext>
-            </a:extLst>
-          </p:cNvPr>
-          <p:cNvSpPr>
-            <a:spLocks noGrp="1"/>
-          </p:cNvSpPr>
-          <p:nvPr/>
-        </p:nvSpPr>
-        <p:spPr>
-          <a:xfrm>
-            <a:off x="4443984" y="2267712"/>
-            <a:ext cx="969264" cy="365760"/>
+            </a:pPr>
+            <a:r>
+              <a:rPr lang="es-ES" sz="975" b="1" i="0">
+                <a:solidFill>
+                  <a:srgbClr val="16324F"/>
+                </a:solidFill>
+                <a:latin typeface="Arial"/>
+                <a:ea typeface="Arial"/>
+                <a:cs typeface="Arial"/>
+              </a:rPr>
+              <a:t>Relojes físicos</a:t>
+            </a:r>
+          </a:p>
+        </p:txBody>
+      </p:sp>
+      <p:sp>
+        <p:nvSpPr>
+          <p:cNvPr id="317" name="txt317"/>
+          <p:cNvSpPr>
+            <a:spLocks noGrp="1"/>
+          </p:cNvSpPr>
+          <p:nvPr/>
+        </p:nvSpPr>
+        <p:spPr>
+          <a:xfrm>
+            <a:off x="2368296" y="2322576"/>
+            <a:ext cx="1810512" cy="457200"/>
           </a:xfrm>
           <a:prstGeom prst="rect">
             <a:avLst/>
@@ -2054,10 +2032,9 @@
               <a:lnSpc>
                 <a:spcPct val="90000"/>
               </a:lnSpc>
-              <a:buNone/>
-            </a:pPr>
-            <a:r>
-              <a:rPr sz="875" b="0" i="0">
+            </a:pPr>
+            <a:r>
+              <a:rPr lang="es-ES" sz="875" b="0" i="0">
                 <a:solidFill>
                   <a:srgbClr val="59636E"/>
                 </a:solidFill>
@@ -2065,29 +2042,23 @@
                 <a:ea typeface="Arial"/>
                 <a:cs typeface="Arial"/>
               </a:rPr>
-              <a:t>Bloqueante</a:t>
-            </a:r>
-          </a:p>
-        </p:txBody>
-      </p:sp>
-      <p:sp>
-        <p:nvSpPr>
-          <p:cNvPr id="221" name="txt221">
-            <a:extLst>
-              <a:ext uri="{FF2B5EF4-FFF2-40B4-BE49-F238E27FC236}">
-                <a16:creationId xmlns:a16="http://schemas.microsoft.com/office/drawing/2014/main" id="{D4FE0F26-BBBD-46F7-9D2F-71A1ECAD96A1}"/>
-              </a:ext>
-            </a:extLst>
-          </p:cNvPr>
-          <p:cNvSpPr>
-            <a:spLocks noGrp="1"/>
-          </p:cNvSpPr>
-          <p:nvPr/>
-        </p:nvSpPr>
-        <p:spPr>
-          <a:xfrm>
-            <a:off x="5522976" y="2267712"/>
-            <a:ext cx="1152144" cy="365760"/>
+              <a:t>NTP · Cristian · Berkeley</a:t>
+            </a:r>
+          </a:p>
+        </p:txBody>
+      </p:sp>
+      <p:sp>
+        <p:nvSpPr>
+          <p:cNvPr id="318" name="txt318"/>
+          <p:cNvSpPr>
+            <a:spLocks noGrp="1"/>
+          </p:cNvSpPr>
+          <p:nvPr/>
+        </p:nvSpPr>
+        <p:spPr>
+          <a:xfrm>
+            <a:off x="4288536" y="2322576"/>
+            <a:ext cx="1673352" cy="457200"/>
           </a:xfrm>
           <a:prstGeom prst="rect">
             <a:avLst/>
@@ -2107,10 +2078,9 @@
               <a:lnSpc>
                 <a:spcPct val="90000"/>
               </a:lnSpc>
-              <a:buNone/>
-            </a:pPr>
-            <a:r>
-              <a:rPr sz="875" b="0" i="0">
+            </a:pPr>
+            <a:r>
+              <a:rPr lang="es-ES" sz="875" b="0" i="0">
                 <a:solidFill>
                   <a:srgbClr val="59636E"/>
                 </a:solidFill>
@@ -2118,29 +2088,23 @@
                 <a:ea typeface="Arial"/>
                 <a:cs typeface="Arial"/>
               </a:rPr>
-              <a:t>Bajo sin contención</a:t>
-            </a:r>
-          </a:p>
-        </p:txBody>
-      </p:sp>
-      <p:sp>
-        <p:nvSpPr>
-          <p:cNvPr id="222" name="txt222">
-            <a:extLst>
-              <a:ext uri="{FF2B5EF4-FFF2-40B4-BE49-F238E27FC236}">
-                <a16:creationId xmlns:a16="http://schemas.microsoft.com/office/drawing/2014/main" id="{AE599FD8-578B-495B-89CF-BA44221E3B9C}"/>
-              </a:ext>
-            </a:extLst>
-          </p:cNvPr>
-          <p:cNvSpPr>
-            <a:spLocks noGrp="1"/>
-          </p:cNvSpPr>
-          <p:nvPr/>
-        </p:nvSpPr>
-        <p:spPr>
-          <a:xfrm>
-            <a:off x="6784848" y="2267712"/>
-            <a:ext cx="2377440" cy="365760"/>
+              <a:t>Aproximar una hora común</a:t>
+            </a:r>
+          </a:p>
+        </p:txBody>
+      </p:sp>
+      <p:sp>
+        <p:nvSpPr>
+          <p:cNvPr id="319" name="txt319"/>
+          <p:cNvSpPr>
+            <a:spLocks noGrp="1"/>
+          </p:cNvSpPr>
+          <p:nvPr/>
+        </p:nvSpPr>
+        <p:spPr>
+          <a:xfrm>
+            <a:off x="6071616" y="2322576"/>
+            <a:ext cx="1216152" cy="457200"/>
           </a:xfrm>
           <a:prstGeom prst="rect">
             <a:avLst/>
@@ -2160,10 +2124,9 @@
               <a:lnSpc>
                 <a:spcPct val="90000"/>
               </a:lnSpc>
-              <a:buNone/>
-            </a:pPr>
-            <a:r>
-              <a:rPr sz="875" b="0" i="0">
+            </a:pPr>
+            <a:r>
+              <a:rPr lang="es-ES" sz="875" b="0" i="0">
                 <a:solidFill>
                   <a:srgbClr val="59636E"/>
                 </a:solidFill>
@@ -2171,29 +2134,23 @@
                 <a:ea typeface="Arial"/>
                 <a:cs typeface="Arial"/>
               </a:rPr>
-              <a:t>Deadlock si se anidan mal</a:t>
-            </a:r>
-          </a:p>
-        </p:txBody>
-      </p:sp>
-      <p:sp>
-        <p:nvSpPr>
-          <p:cNvPr id="223" name="txt223">
-            <a:extLst>
-              <a:ext uri="{FF2B5EF4-FFF2-40B4-BE49-F238E27FC236}">
-                <a16:creationId xmlns:a16="http://schemas.microsoft.com/office/drawing/2014/main" id="{764632A7-84A2-41AF-8FCB-BF287D437BB9}"/>
-              </a:ext>
-            </a:extLst>
-          </p:cNvPr>
-          <p:cNvSpPr>
-            <a:spLocks noGrp="1"/>
-          </p:cNvSpPr>
-          <p:nvPr/>
-        </p:nvSpPr>
-        <p:spPr>
-          <a:xfrm>
-            <a:off x="9272016" y="2267712"/>
-            <a:ext cx="2569464" cy="365760"/>
+              <a:t>Marcas de tiempo</a:t>
+            </a:r>
+          </a:p>
+        </p:txBody>
+      </p:sp>
+      <p:sp>
+        <p:nvSpPr>
+          <p:cNvPr id="320" name="txt320"/>
+          <p:cNvSpPr>
+            <a:spLocks noGrp="1"/>
+          </p:cNvSpPr>
+          <p:nvPr/>
+        </p:nvSpPr>
+        <p:spPr>
+          <a:xfrm>
+            <a:off x="7397496" y="2322576"/>
+            <a:ext cx="1993392" cy="457200"/>
           </a:xfrm>
           <a:prstGeom prst="rect">
             <a:avLst/>
@@ -2213,10 +2170,9 @@
               <a:lnSpc>
                 <a:spcPct val="90000"/>
               </a:lnSpc>
-              <a:buNone/>
-            </a:pPr>
-            <a:r>
-              <a:rPr sz="875" b="0" i="0">
+            </a:pPr>
+            <a:r>
+              <a:rPr lang="es-ES" sz="875" b="0" i="0">
                 <a:solidFill>
                   <a:srgbClr val="59636E"/>
                 </a:solidFill>
@@ -2224,79 +2180,23 @@
                 <a:ea typeface="Arial"/>
                 <a:cs typeface="Arial"/>
               </a:rPr>
-              <a:t>Proteger estado compartido pequeño</a:t>
-            </a:r>
-          </a:p>
-        </p:txBody>
-      </p:sp>
-      <p:sp>
-        <p:nvSpPr>
-          <p:cNvPr id="224" name="txt224">
-            <a:extLst>
-              <a:ext uri="{FF2B5EF4-FFF2-40B4-BE49-F238E27FC236}">
-                <a16:creationId xmlns:a16="http://schemas.microsoft.com/office/drawing/2014/main" id="{FE8056FF-CEC6-4F24-AC80-AF6F2EBE6A87}"/>
-              </a:ext>
-            </a:extLst>
-          </p:cNvPr>
-          <p:cNvSpPr>
-            <a:spLocks noGrp="1"/>
-          </p:cNvSpPr>
-          <p:nvPr/>
-        </p:nvSpPr>
-        <p:spPr>
-          <a:xfrm>
-            <a:off x="539496" y="2670048"/>
-            <a:ext cx="1764792" cy="365760"/>
-          </a:xfrm>
-          <a:prstGeom prst="rect">
-            <a:avLst/>
-          </a:prstGeom>
-          <a:noFill/>
-          <a:ln w="0">
-            <a:noFill/>
-          </a:ln>
-        </p:spPr>
-        <p:txBody>
-          <a:bodyPr lIns="0" tIns="0" rIns="0" bIns="0" anchor="t">
-            <a:normAutofit/>
-          </a:bodyPr>
-          <a:lstStyle/>
-          <a:p>
-            <a:pPr algn="l">
-              <a:buNone/>
-            </a:pPr>
-            <a:r>
-              <a:rPr sz="975" b="1" i="0">
-                <a:solidFill>
-                  <a:srgbClr val="16324F"/>
-                </a:solidFill>
-                <a:latin typeface="Arial"/>
-                <a:ea typeface="Arial"/>
-                <a:cs typeface="Arial"/>
-              </a:rPr>
-              <a:t>Semáforo</a:t>
-            </a:r>
-          </a:p>
-        </p:txBody>
-      </p:sp>
-      <p:sp>
-        <p:nvSpPr>
-          <p:cNvPr id="225" name="txt225">
-            <a:extLst>
-              <a:ext uri="{FF2B5EF4-FFF2-40B4-BE49-F238E27FC236}">
-                <a16:creationId xmlns:a16="http://schemas.microsoft.com/office/drawing/2014/main" id="{F0E602B3-48D7-41E9-A34B-D81A9C8046CA}"/>
-              </a:ext>
-            </a:extLst>
-          </p:cNvPr>
-          <p:cNvSpPr>
-            <a:spLocks noGrp="1"/>
-          </p:cNvSpPr>
-          <p:nvPr/>
-        </p:nvSpPr>
-        <p:spPr>
-          <a:xfrm>
-            <a:off x="2414016" y="2688336"/>
-            <a:ext cx="1920240" cy="365760"/>
+              <a:t>Deriva del reloj y latencia asimétrica</a:t>
+            </a:r>
+          </a:p>
+        </p:txBody>
+      </p:sp>
+      <p:sp>
+        <p:nvSpPr>
+          <p:cNvPr id="321" name="txt321"/>
+          <p:cNvSpPr>
+            <a:spLocks noGrp="1"/>
+          </p:cNvSpPr>
+          <p:nvPr/>
+        </p:nvSpPr>
+        <p:spPr>
+          <a:xfrm>
+            <a:off x="9500616" y="2322576"/>
+            <a:ext cx="2340864" cy="457200"/>
           </a:xfrm>
           <a:prstGeom prst="rect">
             <a:avLst/>
@@ -2316,10 +2216,9 @@
               <a:lnSpc>
                 <a:spcPct val="90000"/>
               </a:lnSpc>
-              <a:buNone/>
-            </a:pPr>
-            <a:r>
-              <a:rPr sz="875" b="0" i="0">
+            </a:pPr>
+            <a:r>
+              <a:rPr lang="es-ES" sz="875" b="0" i="0">
                 <a:solidFill>
                   <a:srgbClr val="59636E"/>
                 </a:solidFill>
@@ -2327,29 +2226,23 @@
                 <a:ea typeface="Arial"/>
                 <a:cs typeface="Arial"/>
               </a:rPr>
-              <a:t>Máximo N accesos simultáneos</a:t>
-            </a:r>
-          </a:p>
-        </p:txBody>
-      </p:sp>
-      <p:sp>
-        <p:nvSpPr>
-          <p:cNvPr id="226" name="txt226">
-            <a:extLst>
-              <a:ext uri="{FF2B5EF4-FFF2-40B4-BE49-F238E27FC236}">
-                <a16:creationId xmlns:a16="http://schemas.microsoft.com/office/drawing/2014/main" id="{29A5C0B1-B1A0-4194-A85F-57446FBBEC7F}"/>
-              </a:ext>
-            </a:extLst>
-          </p:cNvPr>
-          <p:cNvSpPr>
-            <a:spLocks noGrp="1"/>
-          </p:cNvSpPr>
-          <p:nvPr/>
-        </p:nvSpPr>
-        <p:spPr>
-          <a:xfrm>
-            <a:off x="4443984" y="2688336"/>
-            <a:ext cx="969264" cy="365760"/>
+              <a:t>No aplica: nada depende de la hora</a:t>
+            </a:r>
+          </a:p>
+        </p:txBody>
+      </p:sp>
+      <p:sp>
+        <p:nvSpPr>
+          <p:cNvPr id="322" name="txt322"/>
+          <p:cNvSpPr>
+            <a:spLocks noGrp="1"/>
+          </p:cNvSpPr>
+          <p:nvPr/>
+        </p:nvSpPr>
+        <p:spPr>
+          <a:xfrm>
+            <a:off x="539496" y="2889504"/>
+            <a:ext cx="1719072" cy="457200"/>
           </a:xfrm>
           <a:prstGeom prst="rect">
             <a:avLst/>
@@ -2369,40 +2262,33 @@
               <a:lnSpc>
                 <a:spcPct val="90000"/>
               </a:lnSpc>
-              <a:buNone/>
-            </a:pPr>
-            <a:r>
-              <a:rPr sz="875" b="0" i="0">
-                <a:solidFill>
-                  <a:srgbClr val="59636E"/>
-                </a:solidFill>
-                <a:latin typeface="Arial"/>
-                <a:ea typeface="Arial"/>
-                <a:cs typeface="Arial"/>
-              </a:rPr>
-              <a:t>Bloqueante</a:t>
-            </a:r>
-          </a:p>
-        </p:txBody>
-      </p:sp>
-      <p:sp>
-        <p:nvSpPr>
-          <p:cNvPr id="227" name="txt227">
-            <a:extLst>
-              <a:ext uri="{FF2B5EF4-FFF2-40B4-BE49-F238E27FC236}">
-                <a16:creationId xmlns:a16="http://schemas.microsoft.com/office/drawing/2014/main" id="{183CAB0A-60AD-45CD-B689-357659304AC3}"/>
-              </a:ext>
-            </a:extLst>
-          </p:cNvPr>
-          <p:cNvSpPr>
-            <a:spLocks noGrp="1"/>
-          </p:cNvSpPr>
-          <p:nvPr/>
-        </p:nvSpPr>
-        <p:spPr>
-          <a:xfrm>
-            <a:off x="5522976" y="2688336"/>
-            <a:ext cx="1152144" cy="365760"/>
+            </a:pPr>
+            <a:r>
+              <a:rPr lang="es-ES" sz="975" b="1" i="0">
+                <a:solidFill>
+                  <a:srgbClr val="16324F"/>
+                </a:solidFill>
+                <a:latin typeface="Arial"/>
+                <a:ea typeface="Arial"/>
+                <a:cs typeface="Arial"/>
+              </a:rPr>
+              <a:t>Relojes lógicos</a:t>
+            </a:r>
+          </a:p>
+        </p:txBody>
+      </p:sp>
+      <p:sp>
+        <p:nvSpPr>
+          <p:cNvPr id="323" name="txt323"/>
+          <p:cNvSpPr>
+            <a:spLocks noGrp="1"/>
+          </p:cNvSpPr>
+          <p:nvPr/>
+        </p:nvSpPr>
+        <p:spPr>
+          <a:xfrm>
+            <a:off x="2368296" y="2907792"/>
+            <a:ext cx="1810512" cy="457200"/>
           </a:xfrm>
           <a:prstGeom prst="rect">
             <a:avLst/>
@@ -2422,10 +2308,9 @@
               <a:lnSpc>
                 <a:spcPct val="90000"/>
               </a:lnSpc>
-              <a:buNone/>
-            </a:pPr>
-            <a:r>
-              <a:rPr sz="875" b="0" i="0">
+            </a:pPr>
+            <a:r>
+              <a:rPr lang="es-ES" sz="875" b="0" i="0">
                 <a:solidFill>
                   <a:srgbClr val="59636E"/>
                 </a:solidFill>
@@ -2433,29 +2318,23 @@
                 <a:ea typeface="Arial"/>
                 <a:cs typeface="Arial"/>
               </a:rPr>
-              <a:t>Bajo</a:t>
-            </a:r>
-          </a:p>
-        </p:txBody>
-      </p:sp>
-      <p:sp>
-        <p:nvSpPr>
-          <p:cNvPr id="228" name="txt228">
-            <a:extLst>
-              <a:ext uri="{FF2B5EF4-FFF2-40B4-BE49-F238E27FC236}">
-                <a16:creationId xmlns:a16="http://schemas.microsoft.com/office/drawing/2014/main" id="{7CB2A99A-C23A-4AA7-8633-6F614DB2E0A8}"/>
-              </a:ext>
-            </a:extLst>
-          </p:cNvPr>
-          <p:cNvSpPr>
-            <a:spLocks noGrp="1"/>
-          </p:cNvSpPr>
-          <p:nvPr/>
-        </p:nvSpPr>
-        <p:spPr>
-          <a:xfrm>
-            <a:off x="6784848" y="2688336"/>
-            <a:ext cx="2377440" cy="365760"/>
+              <a:t>Lamport · Vectoriales</a:t>
+            </a:r>
+          </a:p>
+        </p:txBody>
+      </p:sp>
+      <p:sp>
+        <p:nvSpPr>
+          <p:cNvPr id="324" name="txt324"/>
+          <p:cNvSpPr>
+            <a:spLocks noGrp="1"/>
+          </p:cNvSpPr>
+          <p:nvPr/>
+        </p:nvSpPr>
+        <p:spPr>
+          <a:xfrm>
+            <a:off x="4288536" y="2907792"/>
+            <a:ext cx="1673352" cy="457200"/>
           </a:xfrm>
           <a:prstGeom prst="rect">
             <a:avLst/>
@@ -2475,10 +2354,9 @@
               <a:lnSpc>
                 <a:spcPct val="90000"/>
               </a:lnSpc>
-              <a:buNone/>
-            </a:pPr>
-            <a:r>
-              <a:rPr sz="875" b="0" i="0">
+            </a:pPr>
+            <a:r>
+              <a:rPr lang="es-ES" sz="875" b="0" i="0">
                 <a:solidFill>
                   <a:srgbClr val="59636E"/>
                 </a:solidFill>
@@ -2486,29 +2364,23 @@
                 <a:ea typeface="Arial"/>
                 <a:cs typeface="Arial"/>
               </a:rPr>
-              <a:t>Permisos que no se devuelven</a:t>
-            </a:r>
-          </a:p>
-        </p:txBody>
-      </p:sp>
-      <p:sp>
-        <p:nvSpPr>
-          <p:cNvPr id="229" name="txt229">
-            <a:extLst>
-              <a:ext uri="{FF2B5EF4-FFF2-40B4-BE49-F238E27FC236}">
-                <a16:creationId xmlns:a16="http://schemas.microsoft.com/office/drawing/2014/main" id="{D4EE2A7B-8C1A-4C12-BBCA-2C62AAAFDCDB}"/>
-              </a:ext>
-            </a:extLst>
-          </p:cNvPr>
-          <p:cNvSpPr>
-            <a:spLocks noGrp="1"/>
-          </p:cNvSpPr>
-          <p:nvPr/>
-        </p:nvSpPr>
-        <p:spPr>
-          <a:xfrm>
-            <a:off x="9272016" y="2688336"/>
-            <a:ext cx="2569464" cy="365760"/>
+              <a:t>Orden causal sin reloj común</a:t>
+            </a:r>
+          </a:p>
+        </p:txBody>
+      </p:sp>
+      <p:sp>
+        <p:nvSpPr>
+          <p:cNvPr id="325" name="txt325"/>
+          <p:cNvSpPr>
+            <a:spLocks noGrp="1"/>
+          </p:cNvSpPr>
+          <p:nvPr/>
+        </p:nvSpPr>
+        <p:spPr>
+          <a:xfrm>
+            <a:off x="6071616" y="2907792"/>
+            <a:ext cx="1216152" cy="457200"/>
           </a:xfrm>
           <a:prstGeom prst="rect">
             <a:avLst/>
@@ -2528,10 +2400,9 @@
               <a:lnSpc>
                 <a:spcPct val="90000"/>
               </a:lnSpc>
-              <a:buNone/>
-            </a:pPr>
-            <a:r>
-              <a:rPr sz="875" b="0" i="0">
+            </a:pPr>
+            <a:r>
+              <a:rPr lang="es-ES" sz="875" b="0" i="0">
                 <a:solidFill>
                   <a:srgbClr val="59636E"/>
                 </a:solidFill>
@@ -2539,79 +2410,23 @@
                 <a:ea typeface="Arial"/>
                 <a:cs typeface="Arial"/>
               </a:rPr>
-              <a:t>Pools y cupos de concurrencia</a:t>
-            </a:r>
-          </a:p>
-        </p:txBody>
-      </p:sp>
-      <p:sp>
-        <p:nvSpPr>
-          <p:cNvPr id="230" name="txt230">
-            <a:extLst>
-              <a:ext uri="{FF2B5EF4-FFF2-40B4-BE49-F238E27FC236}">
-                <a16:creationId xmlns:a16="http://schemas.microsoft.com/office/drawing/2014/main" id="{8825B71F-0431-47A7-958A-C7EFD2CB5B6F}"/>
-              </a:ext>
-            </a:extLst>
-          </p:cNvPr>
-          <p:cNvSpPr>
-            <a:spLocks noGrp="1"/>
-          </p:cNvSpPr>
-          <p:nvPr/>
-        </p:nvSpPr>
-        <p:spPr>
-          <a:xfrm>
-            <a:off x="539496" y="3090672"/>
-            <a:ext cx="1764792" cy="365760"/>
-          </a:xfrm>
-          <a:prstGeom prst="rect">
-            <a:avLst/>
-          </a:prstGeom>
-          <a:noFill/>
-          <a:ln w="0">
-            <a:noFill/>
-          </a:ln>
-        </p:spPr>
-        <p:txBody>
-          <a:bodyPr lIns="0" tIns="0" rIns="0" bIns="0" anchor="t">
-            <a:normAutofit/>
-          </a:bodyPr>
-          <a:lstStyle/>
-          <a:p>
-            <a:pPr algn="l">
-              <a:buNone/>
-            </a:pPr>
-            <a:r>
-              <a:rPr sz="975" b="1" i="0">
-                <a:solidFill>
-                  <a:srgbClr val="16324F"/>
-                </a:solidFill>
-                <a:latin typeface="Arial"/>
-                <a:ea typeface="Arial"/>
-                <a:cs typeface="Arial"/>
-              </a:rPr>
-              <a:t>Monitor (wait/notify)</a:t>
-            </a:r>
-          </a:p>
-        </p:txBody>
-      </p:sp>
-      <p:sp>
-        <p:nvSpPr>
-          <p:cNvPr id="231" name="txt231">
-            <a:extLst>
-              <a:ext uri="{FF2B5EF4-FFF2-40B4-BE49-F238E27FC236}">
-                <a16:creationId xmlns:a16="http://schemas.microsoft.com/office/drawing/2014/main" id="{2C682006-CE4C-46E2-A426-68915F4E27FC}"/>
-              </a:ext>
-            </a:extLst>
-          </p:cNvPr>
-          <p:cNvSpPr>
-            <a:spLocks noGrp="1"/>
-          </p:cNvSpPr>
-          <p:nvPr/>
-        </p:nvSpPr>
-        <p:spPr>
-          <a:xfrm>
-            <a:off x="2414016" y="3108960"/>
-            <a:ext cx="1920240" cy="365760"/>
+              <a:t>Contador en el mensaje</a:t>
+            </a:r>
+          </a:p>
+        </p:txBody>
+      </p:sp>
+      <p:sp>
+        <p:nvSpPr>
+          <p:cNvPr id="326" name="txt326"/>
+          <p:cNvSpPr>
+            <a:spLocks noGrp="1"/>
+          </p:cNvSpPr>
+          <p:nvPr/>
+        </p:nvSpPr>
+        <p:spPr>
+          <a:xfrm>
+            <a:off x="7397496" y="2907792"/>
+            <a:ext cx="1993392" cy="457200"/>
           </a:xfrm>
           <a:prstGeom prst="rect">
             <a:avLst/>
@@ -2631,10 +2446,9 @@
               <a:lnSpc>
                 <a:spcPct val="90000"/>
               </a:lnSpc>
-              <a:buNone/>
-            </a:pPr>
-            <a:r>
-              <a:rPr sz="875" b="0" i="0">
+            </a:pPr>
+            <a:r>
+              <a:rPr lang="es-ES" sz="875" b="0" i="0">
                 <a:solidFill>
                   <a:srgbClr val="59636E"/>
                 </a:solidFill>
@@ -2642,29 +2456,23 @@
                 <a:ea typeface="Arial"/>
                 <a:cs typeface="Arial"/>
               </a:rPr>
-              <a:t>Exclusión + espera por condición</a:t>
-            </a:r>
-          </a:p>
-        </p:txBody>
-      </p:sp>
-      <p:sp>
-        <p:nvSpPr>
-          <p:cNvPr id="232" name="txt232">
-            <a:extLst>
-              <a:ext uri="{FF2B5EF4-FFF2-40B4-BE49-F238E27FC236}">
-                <a16:creationId xmlns:a16="http://schemas.microsoft.com/office/drawing/2014/main" id="{C2CA283F-1C1D-432B-AFF1-7C25670F03BE}"/>
-              </a:ext>
-            </a:extLst>
-          </p:cNvPr>
-          <p:cNvSpPr>
-            <a:spLocks noGrp="1"/>
-          </p:cNvSpPr>
-          <p:nvPr/>
-        </p:nvSpPr>
-        <p:spPr>
-          <a:xfrm>
-            <a:off x="4443984" y="3108960"/>
-            <a:ext cx="969264" cy="365760"/>
+              <a:t>No producen un orden total real</a:t>
+            </a:r>
+          </a:p>
+        </p:txBody>
+      </p:sp>
+      <p:sp>
+        <p:nvSpPr>
+          <p:cNvPr id="327" name="txt327"/>
+          <p:cNvSpPr>
+            <a:spLocks noGrp="1"/>
+          </p:cNvSpPr>
+          <p:nvPr/>
+        </p:nvSpPr>
+        <p:spPr>
+          <a:xfrm>
+            <a:off x="9500616" y="2907792"/>
+            <a:ext cx="2340864" cy="457200"/>
           </a:xfrm>
           <a:prstGeom prst="rect">
             <a:avLst/>
@@ -2684,10 +2492,9 @@
               <a:lnSpc>
                 <a:spcPct val="90000"/>
               </a:lnSpc>
-              <a:buNone/>
-            </a:pPr>
-            <a:r>
-              <a:rPr sz="875" b="0" i="0">
+            </a:pPr>
+            <a:r>
+              <a:rPr lang="es-ES" sz="875" b="0" i="0">
                 <a:solidFill>
                   <a:srgbClr val="59636E"/>
                 </a:solidFill>
@@ -2695,29 +2502,23 @@
                 <a:ea typeface="Arial"/>
                 <a:cs typeface="Arial"/>
               </a:rPr>
-              <a:t>Bloqueante</a:t>
-            </a:r>
-          </a:p>
-        </p:txBody>
-      </p:sp>
-      <p:sp>
-        <p:nvSpPr>
-          <p:cNvPr id="233" name="txt233">
-            <a:extLst>
-              <a:ext uri="{FF2B5EF4-FFF2-40B4-BE49-F238E27FC236}">
-                <a16:creationId xmlns:a16="http://schemas.microsoft.com/office/drawing/2014/main" id="{EAC8F389-9F2D-4473-A88F-E735281931B9}"/>
-              </a:ext>
-            </a:extLst>
-          </p:cNvPr>
-          <p:cNvSpPr>
-            <a:spLocks noGrp="1"/>
-          </p:cNvSpPr>
-          <p:nvPr/>
-        </p:nvSpPr>
-        <p:spPr>
-          <a:xfrm>
-            <a:off x="5522976" y="3108960"/>
-            <a:ext cx="1152144" cy="365760"/>
+              <a:t>TCP ya ordena dentro de una conexión</a:t>
+            </a:r>
+          </a:p>
+        </p:txBody>
+      </p:sp>
+      <p:sp>
+        <p:nvSpPr>
+          <p:cNvPr id="328" name="txt328"/>
+          <p:cNvSpPr>
+            <a:spLocks noGrp="1"/>
+          </p:cNvSpPr>
+          <p:nvPr/>
+        </p:nvSpPr>
+        <p:spPr>
+          <a:xfrm>
+            <a:off x="539496" y="3474720"/>
+            <a:ext cx="1719072" cy="457200"/>
           </a:xfrm>
           <a:prstGeom prst="rect">
             <a:avLst/>
@@ -2737,40 +2538,33 @@
               <a:lnSpc>
                 <a:spcPct val="90000"/>
               </a:lnSpc>
-              <a:buNone/>
-            </a:pPr>
-            <a:r>
-              <a:rPr sz="875" b="0" i="0">
-                <a:solidFill>
-                  <a:srgbClr val="59636E"/>
-                </a:solidFill>
-                <a:latin typeface="Arial"/>
-                <a:ea typeface="Arial"/>
-                <a:cs typeface="Arial"/>
-              </a:rPr>
-              <a:t>Medio</a:t>
-            </a:r>
-          </a:p>
-        </p:txBody>
-      </p:sp>
-      <p:sp>
-        <p:nvSpPr>
-          <p:cNvPr id="234" name="txt234">
-            <a:extLst>
-              <a:ext uri="{FF2B5EF4-FFF2-40B4-BE49-F238E27FC236}">
-                <a16:creationId xmlns:a16="http://schemas.microsoft.com/office/drawing/2014/main" id="{E4CAEE64-3AAE-45FC-BC0F-C4F50F00FE59}"/>
-              </a:ext>
-            </a:extLst>
-          </p:cNvPr>
-          <p:cNvSpPr>
-            <a:spLocks noGrp="1"/>
-          </p:cNvSpPr>
-          <p:nvPr/>
-        </p:nvSpPr>
-        <p:spPr>
-          <a:xfrm>
-            <a:off x="6784848" y="3108960"/>
-            <a:ext cx="2377440" cy="365760"/>
+            </a:pPr>
+            <a:r>
+              <a:rPr lang="es-ES" sz="975" b="1" i="0">
+                <a:solidFill>
+                  <a:srgbClr val="16324F"/>
+                </a:solidFill>
+                <a:latin typeface="Arial"/>
+                <a:ea typeface="Arial"/>
+                <a:cs typeface="Arial"/>
+              </a:rPr>
+              <a:t>Exclusión mutua distribuida</a:t>
+            </a:r>
+          </a:p>
+        </p:txBody>
+      </p:sp>
+      <p:sp>
+        <p:nvSpPr>
+          <p:cNvPr id="329" name="txt329"/>
+          <p:cNvSpPr>
+            <a:spLocks noGrp="1"/>
+          </p:cNvSpPr>
+          <p:nvPr/>
+        </p:nvSpPr>
+        <p:spPr>
+          <a:xfrm>
+            <a:off x="2368296" y="3493008"/>
+            <a:ext cx="1810512" cy="457200"/>
           </a:xfrm>
           <a:prstGeom prst="rect">
             <a:avLst/>
@@ -2790,10 +2584,9 @@
               <a:lnSpc>
                 <a:spcPct val="90000"/>
               </a:lnSpc>
-              <a:buNone/>
-            </a:pPr>
-            <a:r>
-              <a:rPr sz="875" b="0" i="0">
+            </a:pPr>
+            <a:r>
+              <a:rPr lang="es-ES" sz="875" b="0" i="0">
                 <a:solidFill>
                   <a:srgbClr val="59636E"/>
                 </a:solidFill>
@@ -2801,29 +2594,23 @@
                 <a:ea typeface="Arial"/>
                 <a:cs typeface="Arial"/>
               </a:rPr>
-              <a:t>Señal perdida, despertar espurio</a:t>
-            </a:r>
-          </a:p>
-        </p:txBody>
-      </p:sp>
-      <p:sp>
-        <p:nvSpPr>
-          <p:cNvPr id="235" name="txt235">
-            <a:extLst>
-              <a:ext uri="{FF2B5EF4-FFF2-40B4-BE49-F238E27FC236}">
-                <a16:creationId xmlns:a16="http://schemas.microsoft.com/office/drawing/2014/main" id="{A032A406-9E94-4AF4-959D-29A9F3537ADF}"/>
-              </a:ext>
-            </a:extLst>
-          </p:cNvPr>
-          <p:cNvSpPr>
-            <a:spLocks noGrp="1"/>
-          </p:cNvSpPr>
-          <p:nvPr/>
-        </p:nvSpPr>
-        <p:spPr>
-          <a:xfrm>
-            <a:off x="9272016" y="3108960"/>
-            <a:ext cx="2569464" cy="365760"/>
+              <a:t>Coordinador · Token ring · Ricart-Agrawala</a:t>
+            </a:r>
+          </a:p>
+        </p:txBody>
+      </p:sp>
+      <p:sp>
+        <p:nvSpPr>
+          <p:cNvPr id="330" name="txt330"/>
+          <p:cNvSpPr>
+            <a:spLocks noGrp="1"/>
+          </p:cNvSpPr>
+          <p:nvPr/>
+        </p:nvSpPr>
+        <p:spPr>
+          <a:xfrm>
+            <a:off x="4288536" y="3493008"/>
+            <a:ext cx="1673352" cy="457200"/>
           </a:xfrm>
           <a:prstGeom prst="rect">
             <a:avLst/>
@@ -2843,10 +2630,9 @@
               <a:lnSpc>
                 <a:spcPct val="90000"/>
               </a:lnSpc>
-              <a:buNone/>
-            </a:pPr>
-            <a:r>
-              <a:rPr sz="875" b="0" i="0">
+            </a:pPr>
+            <a:r>
+              <a:rPr lang="es-ES" sz="875" b="0" i="0">
                 <a:solidFill>
                   <a:srgbClr val="59636E"/>
                 </a:solidFill>
@@ -2854,79 +2640,23 @@
                 <a:ea typeface="Arial"/>
                 <a:cs typeface="Arial"/>
               </a:rPr>
-              <a:t>Esperar a que cambie una condición</a:t>
-            </a:r>
-          </a:p>
-        </p:txBody>
-      </p:sp>
-      <p:sp>
-        <p:nvSpPr>
-          <p:cNvPr id="236" name="txt236">
-            <a:extLst>
-              <a:ext uri="{FF2B5EF4-FFF2-40B4-BE49-F238E27FC236}">
-                <a16:creationId xmlns:a16="http://schemas.microsoft.com/office/drawing/2014/main" id="{D6C6D9B8-0208-4E3A-A599-94FA347C263F}"/>
-              </a:ext>
-            </a:extLst>
-          </p:cNvPr>
-          <p:cNvSpPr>
-            <a:spLocks noGrp="1"/>
-          </p:cNvSpPr>
-          <p:nvPr/>
-        </p:nvSpPr>
-        <p:spPr>
-          <a:xfrm>
-            <a:off x="539496" y="3511296"/>
-            <a:ext cx="1764792" cy="365760"/>
-          </a:xfrm>
-          <a:prstGeom prst="rect">
-            <a:avLst/>
-          </a:prstGeom>
-          <a:noFill/>
-          <a:ln w="0">
-            <a:noFill/>
-          </a:ln>
-        </p:spPr>
-        <p:txBody>
-          <a:bodyPr lIns="0" tIns="0" rIns="0" bIns="0" anchor="t">
-            <a:normAutofit/>
-          </a:bodyPr>
-          <a:lstStyle/>
-          <a:p>
-            <a:pPr algn="l">
-              <a:buNone/>
-            </a:pPr>
-            <a:r>
-              <a:rPr sz="975" b="1" i="0">
-                <a:solidFill>
-                  <a:srgbClr val="3D8DFF"/>
-                </a:solidFill>
-                <a:latin typeface="Arial"/>
-                <a:ea typeface="Arial"/>
-                <a:cs typeface="Arial"/>
-              </a:rPr>
-              <a:t>BlockingQueue</a:t>
-            </a:r>
-          </a:p>
-        </p:txBody>
-      </p:sp>
-      <p:sp>
-        <p:nvSpPr>
-          <p:cNvPr id="237" name="txt237">
-            <a:extLst>
-              <a:ext uri="{FF2B5EF4-FFF2-40B4-BE49-F238E27FC236}">
-                <a16:creationId xmlns:a16="http://schemas.microsoft.com/office/drawing/2014/main" id="{23CD9965-2EA1-44EB-AE72-BFA9804F10A6}"/>
-              </a:ext>
-            </a:extLst>
-          </p:cNvPr>
-          <p:cNvSpPr>
-            <a:spLocks noGrp="1"/>
-          </p:cNvSpPr>
-          <p:nvPr/>
-        </p:nvSpPr>
-        <p:spPr>
-          <a:xfrm>
-            <a:off x="2414016" y="3529584"/>
-            <a:ext cx="1920240" cy="365760"/>
+              <a:t>Un nodo a la vez en la región crítica</a:t>
+            </a:r>
+          </a:p>
+        </p:txBody>
+      </p:sp>
+      <p:sp>
+        <p:nvSpPr>
+          <p:cNvPr id="331" name="txt331"/>
+          <p:cNvSpPr>
+            <a:spLocks noGrp="1"/>
+          </p:cNvSpPr>
+          <p:nvPr/>
+        </p:nvSpPr>
+        <p:spPr>
+          <a:xfrm>
+            <a:off x="6071616" y="3493008"/>
+            <a:ext cx="1216152" cy="457200"/>
           </a:xfrm>
           <a:prstGeom prst="rect">
             <a:avLst/>
@@ -2946,10 +2676,9 @@
               <a:lnSpc>
                 <a:spcPct val="90000"/>
               </a:lnSpc>
-              <a:buNone/>
-            </a:pPr>
-            <a:r>
-              <a:rPr sz="875" b="0" i="0">
+            </a:pPr>
+            <a:r>
+              <a:rPr lang="es-ES" sz="875" b="0" i="0">
                 <a:solidFill>
                   <a:srgbClr val="59636E"/>
                 </a:solidFill>
@@ -2957,29 +2686,23 @@
                 <a:ea typeface="Arial"/>
                 <a:cs typeface="Arial"/>
               </a:rPr>
-              <a:t>Transferencia segura entre hilos</a:t>
-            </a:r>
-          </a:p>
-        </p:txBody>
-      </p:sp>
-      <p:sp>
-        <p:nvSpPr>
-          <p:cNvPr id="238" name="txt238">
-            <a:extLst>
-              <a:ext uri="{FF2B5EF4-FFF2-40B4-BE49-F238E27FC236}">
-                <a16:creationId xmlns:a16="http://schemas.microsoft.com/office/drawing/2014/main" id="{F2305C51-D4E4-4804-B37A-20FF69B655B3}"/>
-              </a:ext>
-            </a:extLst>
-          </p:cNvPr>
-          <p:cNvSpPr>
-            <a:spLocks noGrp="1"/>
-          </p:cNvSpPr>
-          <p:nvPr/>
-        </p:nvSpPr>
-        <p:spPr>
-          <a:xfrm>
-            <a:off x="4443984" y="3529584"/>
-            <a:ext cx="969264" cy="365760"/>
+              <a:t>Permisos por mensaje</a:t>
+            </a:r>
+          </a:p>
+        </p:txBody>
+      </p:sp>
+      <p:sp>
+        <p:nvSpPr>
+          <p:cNvPr id="332" name="txt332"/>
+          <p:cNvSpPr>
+            <a:spLocks noGrp="1"/>
+          </p:cNvSpPr>
+          <p:nvPr/>
+        </p:nvSpPr>
+        <p:spPr>
+          <a:xfrm>
+            <a:off x="7397496" y="3493008"/>
+            <a:ext cx="1993392" cy="457200"/>
           </a:xfrm>
           <a:prstGeom prst="rect">
             <a:avLst/>
@@ -2999,10 +2722,9 @@
               <a:lnSpc>
                 <a:spcPct val="90000"/>
               </a:lnSpc>
-              <a:buNone/>
-            </a:pPr>
-            <a:r>
-              <a:rPr sz="875" b="0" i="0">
+            </a:pPr>
+            <a:r>
+              <a:rPr lang="es-ES" sz="875" b="0" i="0">
                 <a:solidFill>
                   <a:srgbClr val="59636E"/>
                 </a:solidFill>
@@ -3010,29 +2732,23 @@
                 <a:ea typeface="Arial"/>
                 <a:cs typeface="Arial"/>
               </a:rPr>
-              <a:t>Bloqueante</a:t>
-            </a:r>
-          </a:p>
-        </p:txBody>
-      </p:sp>
-      <p:sp>
-        <p:nvSpPr>
-          <p:cNvPr id="239" name="txt239">
-            <a:extLst>
-              <a:ext uri="{FF2B5EF4-FFF2-40B4-BE49-F238E27FC236}">
-                <a16:creationId xmlns:a16="http://schemas.microsoft.com/office/drawing/2014/main" id="{7DEBBDD6-23F1-4FCC-8714-0303E07C882E}"/>
-              </a:ext>
-            </a:extLst>
-          </p:cNvPr>
-          <p:cNvSpPr>
-            <a:spLocks noGrp="1"/>
-          </p:cNvSpPr>
-          <p:nvPr/>
-        </p:nvSpPr>
-        <p:spPr>
-          <a:xfrm>
-            <a:off x="5522976" y="3529584"/>
-            <a:ext cx="1152144" cy="365760"/>
+              <a:t>Caída del coordinador o pérdida del testigo</a:t>
+            </a:r>
+          </a:p>
+        </p:txBody>
+      </p:sp>
+      <p:sp>
+        <p:nvSpPr>
+          <p:cNvPr id="333" name="txt333"/>
+          <p:cNvSpPr>
+            <a:spLocks noGrp="1"/>
+          </p:cNvSpPr>
+          <p:nvPr/>
+        </p:nvSpPr>
+        <p:spPr>
+          <a:xfrm>
+            <a:off x="9500616" y="3493008"/>
+            <a:ext cx="2340864" cy="457200"/>
           </a:xfrm>
           <a:prstGeom prst="rect">
             <a:avLst/>
@@ -3052,10 +2768,9 @@
               <a:lnSpc>
                 <a:spcPct val="90000"/>
               </a:lnSpc>
-              <a:buNone/>
-            </a:pPr>
-            <a:r>
-              <a:rPr sz="875" b="0" i="0">
+            </a:pPr>
+            <a:r>
+              <a:rPr lang="es-ES" sz="875" b="0" i="0">
                 <a:solidFill>
                   <a:srgbClr val="59636E"/>
                 </a:solidFill>
@@ -3063,29 +2778,23 @@
                 <a:ea typeface="Arial"/>
                 <a:cs typeface="Arial"/>
               </a:rPr>
-              <a:t>Bajo, ya encapsulado</a:t>
-            </a:r>
-          </a:p>
-        </p:txBody>
-      </p:sp>
-      <p:sp>
-        <p:nvSpPr>
-          <p:cNvPr id="240" name="txt240">
-            <a:extLst>
-              <a:ext uri="{FF2B5EF4-FFF2-40B4-BE49-F238E27FC236}">
-                <a16:creationId xmlns:a16="http://schemas.microsoft.com/office/drawing/2014/main" id="{3D3BB6F8-214E-418B-96C3-AC29E2DD1D28}"/>
-              </a:ext>
-            </a:extLst>
-          </p:cNvPr>
-          <p:cNvSpPr>
-            <a:spLocks noGrp="1"/>
-          </p:cNvSpPr>
-          <p:nvPr/>
-        </p:nvSpPr>
-        <p:spPr>
-          <a:xfrm>
-            <a:off x="6784848" y="3529584"/>
-            <a:ext cx="2377440" cy="365760"/>
+              <a:t>Innecesaria: el estado vive en un servidor</a:t>
+            </a:r>
+          </a:p>
+        </p:txBody>
+      </p:sp>
+      <p:sp>
+        <p:nvSpPr>
+          <p:cNvPr id="334" name="txt334"/>
+          <p:cNvSpPr>
+            <a:spLocks noGrp="1"/>
+          </p:cNvSpPr>
+          <p:nvPr/>
+        </p:nvSpPr>
+        <p:spPr>
+          <a:xfrm>
+            <a:off x="539496" y="4059936"/>
+            <a:ext cx="1719072" cy="457200"/>
           </a:xfrm>
           <a:prstGeom prst="rect">
             <a:avLst/>
@@ -3105,40 +2814,33 @@
               <a:lnSpc>
                 <a:spcPct val="90000"/>
               </a:lnSpc>
-              <a:buNone/>
-            </a:pPr>
-            <a:r>
-              <a:rPr sz="875" b="0" i="0">
-                <a:solidFill>
-                  <a:srgbClr val="59636E"/>
-                </a:solidFill>
-                <a:latin typeface="Arial"/>
-                <a:ea typeface="Arial"/>
-                <a:cs typeface="Arial"/>
-              </a:rPr>
-              <a:t>Memoria si no se acota</a:t>
-            </a:r>
-          </a:p>
-        </p:txBody>
-      </p:sp>
-      <p:sp>
-        <p:nvSpPr>
-          <p:cNvPr id="241" name="txt241">
-            <a:extLst>
-              <a:ext uri="{FF2B5EF4-FFF2-40B4-BE49-F238E27FC236}">
-                <a16:creationId xmlns:a16="http://schemas.microsoft.com/office/drawing/2014/main" id="{39836685-B36F-4E68-A9C4-7EA80CB2794F}"/>
-              </a:ext>
-            </a:extLst>
-          </p:cNvPr>
-          <p:cNvSpPr>
-            <a:spLocks noGrp="1"/>
-          </p:cNvSpPr>
-          <p:nvPr/>
-        </p:nvSpPr>
-        <p:spPr>
-          <a:xfrm>
-            <a:off x="9272016" y="3529584"/>
-            <a:ext cx="2569464" cy="365760"/>
+            </a:pPr>
+            <a:r>
+              <a:rPr lang="es-ES" sz="975" b="1" i="0">
+                <a:solidFill>
+                  <a:srgbClr val="16324F"/>
+                </a:solidFill>
+                <a:latin typeface="Arial"/>
+                <a:ea typeface="Arial"/>
+                <a:cs typeface="Arial"/>
+              </a:rPr>
+              <a:t>Consenso y elección</a:t>
+            </a:r>
+          </a:p>
+        </p:txBody>
+      </p:sp>
+      <p:sp>
+        <p:nvSpPr>
+          <p:cNvPr id="335" name="txt335"/>
+          <p:cNvSpPr>
+            <a:spLocks noGrp="1"/>
+          </p:cNvSpPr>
+          <p:nvPr/>
+        </p:nvSpPr>
+        <p:spPr>
+          <a:xfrm>
+            <a:off x="2368296" y="4078224"/>
+            <a:ext cx="1810512" cy="457200"/>
           </a:xfrm>
           <a:prstGeom prst="rect">
             <a:avLst/>
@@ -3158,10 +2860,9 @@
               <a:lnSpc>
                 <a:spcPct val="90000"/>
               </a:lnSpc>
-              <a:buNone/>
-            </a:pPr>
-            <a:r>
-              <a:rPr sz="875" b="0" i="0">
+            </a:pPr>
+            <a:r>
+              <a:rPr lang="es-ES" sz="875" b="0" i="0">
                 <a:solidFill>
                   <a:srgbClr val="59636E"/>
                 </a:solidFill>
@@ -3169,79 +2870,23 @@
                 <a:ea typeface="Arial"/>
                 <a:cs typeface="Arial"/>
               </a:rPr>
-              <a:t>Desacoplar productor de consumidores</a:t>
-            </a:r>
-          </a:p>
-        </p:txBody>
-      </p:sp>
-      <p:sp>
-        <p:nvSpPr>
-          <p:cNvPr id="242" name="txt242">
-            <a:extLst>
-              <a:ext uri="{FF2B5EF4-FFF2-40B4-BE49-F238E27FC236}">
-                <a16:creationId xmlns:a16="http://schemas.microsoft.com/office/drawing/2014/main" id="{C3509F0F-0E35-4068-B0C7-A778D72276AD}"/>
-              </a:ext>
-            </a:extLst>
-          </p:cNvPr>
-          <p:cNvSpPr>
-            <a:spLocks noGrp="1"/>
-          </p:cNvSpPr>
-          <p:nvPr/>
-        </p:nvSpPr>
-        <p:spPr>
-          <a:xfrm>
-            <a:off x="539496" y="3931920"/>
-            <a:ext cx="1764792" cy="365760"/>
-          </a:xfrm>
-          <a:prstGeom prst="rect">
-            <a:avLst/>
-          </a:prstGeom>
-          <a:noFill/>
-          <a:ln w="0">
-            <a:noFill/>
-          </a:ln>
-        </p:spPr>
-        <p:txBody>
-          <a:bodyPr lIns="0" tIns="0" rIns="0" bIns="0" anchor="t">
-            <a:normAutofit/>
-          </a:bodyPr>
-          <a:lstStyle/>
-          <a:p>
-            <a:pPr algn="l">
-              <a:buNone/>
-            </a:pPr>
-            <a:r>
-              <a:rPr sz="975" b="1" i="0">
-                <a:solidFill>
-                  <a:srgbClr val="3D8DFF"/>
-                </a:solidFill>
-                <a:latin typeface="Arial"/>
-                <a:ea typeface="Arial"/>
-                <a:cs typeface="Arial"/>
-              </a:rPr>
-              <a:t>CAS / Atomic</a:t>
-            </a:r>
-          </a:p>
-        </p:txBody>
-      </p:sp>
-      <p:sp>
-        <p:nvSpPr>
-          <p:cNvPr id="243" name="txt243">
-            <a:extLst>
-              <a:ext uri="{FF2B5EF4-FFF2-40B4-BE49-F238E27FC236}">
-                <a16:creationId xmlns:a16="http://schemas.microsoft.com/office/drawing/2014/main" id="{99D8F579-BF04-4AC3-A6AE-DB650B36E939}"/>
-              </a:ext>
-            </a:extLst>
-          </p:cNvPr>
-          <p:cNvSpPr>
-            <a:spLocks noGrp="1"/>
-          </p:cNvSpPr>
-          <p:nvPr/>
-        </p:nvSpPr>
-        <p:spPr>
-          <a:xfrm>
-            <a:off x="2414016" y="3950208"/>
-            <a:ext cx="1920240" cy="365760"/>
+              <a:t>Paxos · Raft · Bully</a:t>
+            </a:r>
+          </a:p>
+        </p:txBody>
+      </p:sp>
+      <p:sp>
+        <p:nvSpPr>
+          <p:cNvPr id="336" name="txt336"/>
+          <p:cNvSpPr>
+            <a:spLocks noGrp="1"/>
+          </p:cNvSpPr>
+          <p:nvPr/>
+        </p:nvSpPr>
+        <p:spPr>
+          <a:xfrm>
+            <a:off x="4288536" y="4078224"/>
+            <a:ext cx="1673352" cy="457200"/>
           </a:xfrm>
           <a:prstGeom prst="rect">
             <a:avLst/>
@@ -3261,10 +2906,9 @@
               <a:lnSpc>
                 <a:spcPct val="90000"/>
               </a:lnSpc>
-              <a:buNone/>
-            </a:pPr>
-            <a:r>
-              <a:rPr sz="875" b="0" i="0">
+            </a:pPr>
+            <a:r>
+              <a:rPr lang="es-ES" sz="875" b="0" i="0">
                 <a:solidFill>
                   <a:srgbClr val="59636E"/>
                 </a:solidFill>
@@ -3272,29 +2916,23 @@
                 <a:ea typeface="Arial"/>
                 <a:cs typeface="Arial"/>
               </a:rPr>
-              <a:t>Actualización indivisible sin lock</a:t>
-            </a:r>
-          </a:p>
-        </p:txBody>
-      </p:sp>
-      <p:sp>
-        <p:nvSpPr>
-          <p:cNvPr id="244" name="txt244">
-            <a:extLst>
-              <a:ext uri="{FF2B5EF4-FFF2-40B4-BE49-F238E27FC236}">
-                <a16:creationId xmlns:a16="http://schemas.microsoft.com/office/drawing/2014/main" id="{216F180C-1096-4B37-9B46-77A366BB662A}"/>
-              </a:ext>
-            </a:extLst>
-          </p:cNvPr>
-          <p:cNvSpPr>
-            <a:spLocks noGrp="1"/>
-          </p:cNvSpPr>
-          <p:nvPr/>
-        </p:nvSpPr>
-        <p:spPr>
-          <a:xfrm>
-            <a:off x="4443984" y="3950208"/>
-            <a:ext cx="969264" cy="365760"/>
+              <a:t>Acordar un valor o un líder pese a fallos</a:t>
+            </a:r>
+          </a:p>
+        </p:txBody>
+      </p:sp>
+      <p:sp>
+        <p:nvSpPr>
+          <p:cNvPr id="337" name="txt337"/>
+          <p:cNvSpPr>
+            <a:spLocks noGrp="1"/>
+          </p:cNvSpPr>
+          <p:nvPr/>
+        </p:nvSpPr>
+        <p:spPr>
+          <a:xfrm>
+            <a:off x="6071616" y="4078224"/>
+            <a:ext cx="1216152" cy="457200"/>
           </a:xfrm>
           <a:prstGeom prst="rect">
             <a:avLst/>
@@ -3314,59 +2952,33 @@
               <a:lnSpc>
                 <a:spcPct val="90000"/>
               </a:lnSpc>
-              <a:buNone/>
-            </a:pPr>
-            <a:r>
-              <a:rPr sz="875" b="0" i="0" dirty="0">
-                <a:solidFill>
-                  <a:srgbClr val="2E9D72"/>
-                </a:solidFill>
-                <a:latin typeface="Arial"/>
-                <a:ea typeface="Arial"/>
-                <a:cs typeface="Arial"/>
-              </a:rPr>
-              <a:t>No </a:t>
-            </a:r>
-            <a:r>
-              <a:rPr sz="875" b="0" i="0" dirty="0" err="1">
-                <a:solidFill>
-                  <a:srgbClr val="2E9D72"/>
-                </a:solidFill>
-                <a:latin typeface="Arial"/>
-                <a:ea typeface="Arial"/>
-                <a:cs typeface="Arial"/>
-              </a:rPr>
-              <a:t>bloqueante</a:t>
-            </a:r>
-            <a:endParaRPr sz="875" b="0" i="0" dirty="0">
-              <a:solidFill>
-                <a:srgbClr val="2E9D72"/>
-              </a:solidFill>
-              <a:latin typeface="Arial"/>
-              <a:ea typeface="Arial"/>
-              <a:cs typeface="Arial"/>
-            </a:endParaRPr>
-          </a:p>
-        </p:txBody>
-      </p:sp>
-      <p:sp>
-        <p:nvSpPr>
-          <p:cNvPr id="245" name="txt245">
-            <a:extLst>
-              <a:ext uri="{FF2B5EF4-FFF2-40B4-BE49-F238E27FC236}">
-                <a16:creationId xmlns:a16="http://schemas.microsoft.com/office/drawing/2014/main" id="{0CBB91C0-9504-46FD-B1FC-C204B683D2B4}"/>
-              </a:ext>
-            </a:extLst>
-          </p:cNvPr>
-          <p:cNvSpPr>
-            <a:spLocks noGrp="1"/>
-          </p:cNvSpPr>
-          <p:nvPr/>
-        </p:nvSpPr>
-        <p:spPr>
-          <a:xfrm>
-            <a:off x="5522976" y="3950208"/>
-            <a:ext cx="1152144" cy="365760"/>
+            </a:pPr>
+            <a:r>
+              <a:rPr lang="es-ES" sz="875" b="0" i="0">
+                <a:solidFill>
+                  <a:srgbClr val="59636E"/>
+                </a:solidFill>
+                <a:latin typeface="Arial"/>
+                <a:ea typeface="Arial"/>
+                <a:cs typeface="Arial"/>
+              </a:rPr>
+              <a:t>Votación por mayoría</a:t>
+            </a:r>
+          </a:p>
+        </p:txBody>
+      </p:sp>
+      <p:sp>
+        <p:nvSpPr>
+          <p:cNvPr id="338" name="txt338"/>
+          <p:cNvSpPr>
+            <a:spLocks noGrp="1"/>
+          </p:cNvSpPr>
+          <p:nvPr/>
+        </p:nvSpPr>
+        <p:spPr>
+          <a:xfrm>
+            <a:off x="7397496" y="4078224"/>
+            <a:ext cx="1993392" cy="457200"/>
           </a:xfrm>
           <a:prstGeom prst="rect">
             <a:avLst/>
@@ -3386,10 +2998,9 @@
               <a:lnSpc>
                 <a:spcPct val="90000"/>
               </a:lnSpc>
-              <a:buNone/>
-            </a:pPr>
-            <a:r>
-              <a:rPr sz="875" b="0" i="0">
+            </a:pPr>
+            <a:r>
+              <a:rPr lang="es-ES" sz="875" b="0" i="0">
                 <a:solidFill>
                   <a:srgbClr val="59636E"/>
                 </a:solidFill>
@@ -3397,29 +3008,23 @@
                 <a:ea typeface="Arial"/>
                 <a:cs typeface="Arial"/>
               </a:rPr>
-              <a:t>Muy bajo</a:t>
-            </a:r>
-          </a:p>
-        </p:txBody>
-      </p:sp>
-      <p:sp>
-        <p:nvSpPr>
-          <p:cNvPr id="246" name="txt246">
-            <a:extLst>
-              <a:ext uri="{FF2B5EF4-FFF2-40B4-BE49-F238E27FC236}">
-                <a16:creationId xmlns:a16="http://schemas.microsoft.com/office/drawing/2014/main" id="{EDB4374F-71AE-4171-BE3D-5711B6E19FD8}"/>
-              </a:ext>
-            </a:extLst>
-          </p:cNvPr>
-          <p:cNvSpPr>
-            <a:spLocks noGrp="1"/>
-          </p:cNvSpPr>
-          <p:nvPr/>
-        </p:nvSpPr>
-        <p:spPr>
-          <a:xfrm>
-            <a:off x="6784848" y="3950208"/>
-            <a:ext cx="2377440" cy="365760"/>
+              <a:t>Costo alto en latencia y en mensajes</a:t>
+            </a:r>
+          </a:p>
+        </p:txBody>
+      </p:sp>
+      <p:sp>
+        <p:nvSpPr>
+          <p:cNvPr id="339" name="txt339"/>
+          <p:cNvSpPr>
+            <a:spLocks noGrp="1"/>
+          </p:cNvSpPr>
+          <p:nvPr/>
+        </p:nvSpPr>
+        <p:spPr>
+          <a:xfrm>
+            <a:off x="9500616" y="4078224"/>
+            <a:ext cx="2340864" cy="457200"/>
           </a:xfrm>
           <a:prstGeom prst="rect">
             <a:avLst/>
@@ -3439,10 +3044,9 @@
               <a:lnSpc>
                 <a:spcPct val="90000"/>
               </a:lnSpc>
-              <a:buNone/>
-            </a:pPr>
-            <a:r>
-              <a:rPr sz="875" b="0" i="0">
+            </a:pPr>
+            <a:r>
+              <a:rPr lang="es-ES" sz="875" b="0" i="0">
                 <a:solidFill>
                   <a:srgbClr val="59636E"/>
                 </a:solidFill>
@@ -3450,29 +3054,23 @@
                 <a:ea typeface="Arial"/>
                 <a:cs typeface="Arial"/>
               </a:rPr>
-              <a:t>Espera activa con mucha contención</a:t>
-            </a:r>
-          </a:p>
-        </p:txBody>
-      </p:sp>
-      <p:sp>
-        <p:nvSpPr>
-          <p:cNvPr id="247" name="txt247">
-            <a:extLst>
-              <a:ext uri="{FF2B5EF4-FFF2-40B4-BE49-F238E27FC236}">
-                <a16:creationId xmlns:a16="http://schemas.microsoft.com/office/drawing/2014/main" id="{1EB255ED-4F3C-4A90-9501-E80CD16B05C7}"/>
-              </a:ext>
-            </a:extLst>
-          </p:cNvPr>
-          <p:cNvSpPr>
-            <a:spLocks noGrp="1"/>
-          </p:cNvSpPr>
-          <p:nvPr/>
-        </p:nvSpPr>
-        <p:spPr>
-          <a:xfrm>
-            <a:off x="9272016" y="3950208"/>
-            <a:ext cx="2569464" cy="365760"/>
+              <a:t>Fuera de alcance: no hay réplicas</a:t>
+            </a:r>
+          </a:p>
+        </p:txBody>
+      </p:sp>
+      <p:sp>
+        <p:nvSpPr>
+          <p:cNvPr id="340" name="txt340"/>
+          <p:cNvSpPr>
+            <a:spLocks noGrp="1"/>
+          </p:cNvSpPr>
+          <p:nvPr/>
+        </p:nvSpPr>
+        <p:spPr>
+          <a:xfrm>
+            <a:off x="539496" y="4645152"/>
+            <a:ext cx="1719072" cy="457200"/>
           </a:xfrm>
           <a:prstGeom prst="rect">
             <a:avLst/>
@@ -3492,60 +3090,9 @@
               <a:lnSpc>
                 <a:spcPct val="90000"/>
               </a:lnSpc>
-              <a:buNone/>
-            </a:pPr>
-            <a:r>
-              <a:rPr sz="875" b="0" i="0">
-                <a:solidFill>
-                  <a:srgbClr val="59636E"/>
-                </a:solidFill>
-                <a:latin typeface="Arial"/>
-                <a:ea typeface="Arial"/>
-                <a:cs typeface="Arial"/>
-              </a:rPr>
-              <a:t>Banderas y contadores</a:t>
-            </a:r>
-          </a:p>
-        </p:txBody>
-      </p:sp>
-      <p:sp>
-        <p:nvSpPr>
-          <p:cNvPr id="248" name="txt248">
-            <a:extLst>
-              <a:ext uri="{FF2B5EF4-FFF2-40B4-BE49-F238E27FC236}">
-                <a16:creationId xmlns:a16="http://schemas.microsoft.com/office/drawing/2014/main" id="{7785A0AD-FD1A-4049-8A4A-08796FC1417D}"/>
-              </a:ext>
-            </a:extLst>
-          </p:cNvPr>
-          <p:cNvSpPr>
-            <a:spLocks noGrp="1"/>
-          </p:cNvSpPr>
-          <p:nvPr/>
-        </p:nvSpPr>
-        <p:spPr>
-          <a:xfrm>
-            <a:off x="539496" y="4617720"/>
-            <a:ext cx="1764792" cy="365760"/>
-          </a:xfrm>
-          <a:prstGeom prst="rect">
-            <a:avLst/>
-          </a:prstGeom>
-          <a:noFill/>
-          <a:ln w="0">
-            <a:noFill/>
-          </a:ln>
-        </p:spPr>
-        <p:txBody>
-          <a:bodyPr lIns="0" tIns="0" rIns="0" bIns="0" anchor="t">
-            <a:normAutofit/>
-          </a:bodyPr>
-          <a:lstStyle/>
-          <a:p>
-            <a:pPr algn="l">
-              <a:buNone/>
-            </a:pPr>
-            <a:r>
-              <a:rPr sz="975" b="1" i="0">
+            </a:pPr>
+            <a:r>
+              <a:rPr lang="es-ES" sz="975" b="1" i="0">
                 <a:solidFill>
                   <a:srgbClr val="16324F"/>
                 </a:solidFill>
@@ -3553,29 +3100,23 @@
                 <a:ea typeface="Arial"/>
                 <a:cs typeface="Arial"/>
               </a:rPr>
-              <a:t>Barrera / Latch</a:t>
-            </a:r>
-          </a:p>
-        </p:txBody>
-      </p:sp>
-      <p:sp>
-        <p:nvSpPr>
-          <p:cNvPr id="249" name="txt249">
-            <a:extLst>
-              <a:ext uri="{FF2B5EF4-FFF2-40B4-BE49-F238E27FC236}">
-                <a16:creationId xmlns:a16="http://schemas.microsoft.com/office/drawing/2014/main" id="{44865682-0E3F-4755-992C-83FA8A25ADE2}"/>
-              </a:ext>
-            </a:extLst>
-          </p:cNvPr>
-          <p:cNvSpPr>
-            <a:spLocks noGrp="1"/>
-          </p:cNvSpPr>
-          <p:nvPr/>
-        </p:nvSpPr>
-        <p:spPr>
-          <a:xfrm>
-            <a:off x="2414016" y="4636008"/>
-            <a:ext cx="1920240" cy="365760"/>
+              <a:t>Barreras distribuidas</a:t>
+            </a:r>
+          </a:p>
+        </p:txBody>
+      </p:sp>
+      <p:sp>
+        <p:nvSpPr>
+          <p:cNvPr id="341" name="txt341"/>
+          <p:cNvSpPr>
+            <a:spLocks noGrp="1"/>
+          </p:cNvSpPr>
+          <p:nvPr/>
+        </p:nvSpPr>
+        <p:spPr>
+          <a:xfrm>
+            <a:off x="2368296" y="4663440"/>
+            <a:ext cx="1810512" cy="457200"/>
           </a:xfrm>
           <a:prstGeom prst="rect">
             <a:avLst/>
@@ -3595,10 +3136,9 @@
               <a:lnSpc>
                 <a:spcPct val="90000"/>
               </a:lnSpc>
-              <a:buNone/>
-            </a:pPr>
-            <a:r>
-              <a:rPr sz="875" b="0" i="0">
+            </a:pPr>
+            <a:r>
+              <a:rPr lang="es-ES" sz="875" b="0" i="0">
                 <a:solidFill>
                   <a:srgbClr val="59636E"/>
                 </a:solidFill>
@@ -3606,29 +3146,23 @@
                 <a:ea typeface="Arial"/>
                 <a:cs typeface="Arial"/>
               </a:rPr>
-              <a:t>Todos llegan antes de continuar</a:t>
-            </a:r>
-          </a:p>
-        </p:txBody>
-      </p:sp>
-      <p:sp>
-        <p:nvSpPr>
-          <p:cNvPr id="250" name="txt250">
-            <a:extLst>
-              <a:ext uri="{FF2B5EF4-FFF2-40B4-BE49-F238E27FC236}">
-                <a16:creationId xmlns:a16="http://schemas.microsoft.com/office/drawing/2014/main" id="{AC646FD7-8DF3-416D-A5AD-A2D12739F5A1}"/>
-              </a:ext>
-            </a:extLst>
-          </p:cNvPr>
-          <p:cNvSpPr>
-            <a:spLocks noGrp="1"/>
-          </p:cNvSpPr>
-          <p:nvPr/>
-        </p:nvSpPr>
-        <p:spPr>
-          <a:xfrm>
-            <a:off x="4443984" y="4636008"/>
-            <a:ext cx="969264" cy="365760"/>
+              <a:t>Barrera por mensajes · Latch</a:t>
+            </a:r>
+          </a:p>
+        </p:txBody>
+      </p:sp>
+      <p:sp>
+        <p:nvSpPr>
+          <p:cNvPr id="342" name="txt342"/>
+          <p:cNvSpPr>
+            <a:spLocks noGrp="1"/>
+          </p:cNvSpPr>
+          <p:nvPr/>
+        </p:nvSpPr>
+        <p:spPr>
+          <a:xfrm>
+            <a:off x="4288536" y="4663440"/>
+            <a:ext cx="1673352" cy="457200"/>
           </a:xfrm>
           <a:prstGeom prst="rect">
             <a:avLst/>
@@ -3648,10 +3182,9 @@
               <a:lnSpc>
                 <a:spcPct val="90000"/>
               </a:lnSpc>
-              <a:buNone/>
-            </a:pPr>
-            <a:r>
-              <a:rPr sz="875" b="0" i="0">
+            </a:pPr>
+            <a:r>
+              <a:rPr lang="es-ES" sz="875" b="0" i="0">
                 <a:solidFill>
                   <a:srgbClr val="59636E"/>
                 </a:solidFill>
@@ -3659,29 +3192,23 @@
                 <a:ea typeface="Arial"/>
                 <a:cs typeface="Arial"/>
               </a:rPr>
-              <a:t>Bloqueante</a:t>
-            </a:r>
-          </a:p>
-        </p:txBody>
-      </p:sp>
-      <p:sp>
-        <p:nvSpPr>
-          <p:cNvPr id="251" name="txt251">
-            <a:extLst>
-              <a:ext uri="{FF2B5EF4-FFF2-40B4-BE49-F238E27FC236}">
-                <a16:creationId xmlns:a16="http://schemas.microsoft.com/office/drawing/2014/main" id="{2687DAE0-B5AD-48AC-AD15-053B8942E190}"/>
-              </a:ext>
-            </a:extLst>
-          </p:cNvPr>
-          <p:cNvSpPr>
-            <a:spLocks noGrp="1"/>
-          </p:cNvSpPr>
-          <p:nvPr/>
-        </p:nvSpPr>
-        <p:spPr>
-          <a:xfrm>
-            <a:off x="5522976" y="4636008"/>
-            <a:ext cx="1152144" cy="365760"/>
+              <a:t>Sincronizar fases entre nodos</a:t>
+            </a:r>
+          </a:p>
+        </p:txBody>
+      </p:sp>
+      <p:sp>
+        <p:nvSpPr>
+          <p:cNvPr id="343" name="txt343"/>
+          <p:cNvSpPr>
+            <a:spLocks noGrp="1"/>
+          </p:cNvSpPr>
+          <p:nvPr/>
+        </p:nvSpPr>
+        <p:spPr>
+          <a:xfrm>
+            <a:off x="6071616" y="4663440"/>
+            <a:ext cx="1216152" cy="457200"/>
           </a:xfrm>
           <a:prstGeom prst="rect">
             <a:avLst/>
@@ -3701,10 +3228,9 @@
               <a:lnSpc>
                 <a:spcPct val="90000"/>
               </a:lnSpc>
-              <a:buNone/>
-            </a:pPr>
-            <a:r>
-              <a:rPr sz="875" b="0" i="0">
+            </a:pPr>
+            <a:r>
+              <a:rPr lang="es-ES" sz="875" b="0" i="0">
                 <a:solidFill>
                   <a:srgbClr val="59636E"/>
                 </a:solidFill>
@@ -3712,29 +3238,23 @@
                 <a:ea typeface="Arial"/>
                 <a:cs typeface="Arial"/>
               </a:rPr>
-              <a:t>Medio</a:t>
-            </a:r>
-          </a:p>
-        </p:txBody>
-      </p:sp>
-      <p:sp>
-        <p:nvSpPr>
-          <p:cNvPr id="252" name="txt252">
-            <a:extLst>
-              <a:ext uri="{FF2B5EF4-FFF2-40B4-BE49-F238E27FC236}">
-                <a16:creationId xmlns:a16="http://schemas.microsoft.com/office/drawing/2014/main" id="{B2E8C5CA-3B2B-47E6-B351-CA9914AD718E}"/>
-              </a:ext>
-            </a:extLst>
-          </p:cNvPr>
-          <p:cNvSpPr>
-            <a:spLocks noGrp="1"/>
-          </p:cNvSpPr>
-          <p:nvPr/>
-        </p:nvSpPr>
-        <p:spPr>
-          <a:xfrm>
-            <a:off x="6784848" y="4636008"/>
-            <a:ext cx="2377440" cy="365760"/>
+              <a:t>Confirmaciones cruzadas</a:t>
+            </a:r>
+          </a:p>
+        </p:txBody>
+      </p:sp>
+      <p:sp>
+        <p:nvSpPr>
+          <p:cNvPr id="344" name="txt344"/>
+          <p:cNvSpPr>
+            <a:spLocks noGrp="1"/>
+          </p:cNvSpPr>
+          <p:nvPr/>
+        </p:nvSpPr>
+        <p:spPr>
+          <a:xfrm>
+            <a:off x="7397496" y="4663440"/>
+            <a:ext cx="1993392" cy="457200"/>
           </a:xfrm>
           <a:prstGeom prst="rect">
             <a:avLst/>
@@ -3754,10 +3274,9 @@
               <a:lnSpc>
                 <a:spcPct val="90000"/>
               </a:lnSpc>
-              <a:buNone/>
-            </a:pPr>
-            <a:r>
-              <a:rPr sz="875" b="0" i="0">
+            </a:pPr>
+            <a:r>
+              <a:rPr lang="es-ES" sz="875" b="0" i="0">
                 <a:solidFill>
                   <a:srgbClr val="59636E"/>
                 </a:solidFill>
@@ -3765,29 +3284,23 @@
                 <a:ea typeface="Arial"/>
                 <a:cs typeface="Arial"/>
               </a:rPr>
-              <a:t>Se cuelga si uno no llega</a:t>
-            </a:r>
-          </a:p>
-        </p:txBody>
-      </p:sp>
-      <p:sp>
-        <p:nvSpPr>
-          <p:cNvPr id="253" name="txt253">
-            <a:extLst>
-              <a:ext uri="{FF2B5EF4-FFF2-40B4-BE49-F238E27FC236}">
-                <a16:creationId xmlns:a16="http://schemas.microsoft.com/office/drawing/2014/main" id="{B01DDFCE-230E-4DF3-B072-1991B2A9D8DC}"/>
-              </a:ext>
-            </a:extLst>
-          </p:cNvPr>
-          <p:cNvSpPr>
-            <a:spLocks noGrp="1"/>
-          </p:cNvSpPr>
-          <p:nvPr/>
-        </p:nvSpPr>
-        <p:spPr>
-          <a:xfrm>
-            <a:off x="9272016" y="4636008"/>
-            <a:ext cx="2569464" cy="365760"/>
+              <a:t>Se detiene si un nodo no responde</a:t>
+            </a:r>
+          </a:p>
+        </p:txBody>
+      </p:sp>
+      <p:sp>
+        <p:nvSpPr>
+          <p:cNvPr id="345" name="txt345"/>
+          <p:cNvSpPr>
+            <a:spLocks noGrp="1"/>
+          </p:cNvSpPr>
+          <p:nvPr/>
+        </p:nvSpPr>
+        <p:spPr>
+          <a:xfrm>
+            <a:off x="9500616" y="4663440"/>
+            <a:ext cx="2340864" cy="457200"/>
           </a:xfrm>
           <a:prstGeom prst="rect">
             <a:avLst/>
@@ -3807,10 +3320,9 @@
               <a:lnSpc>
                 <a:spcPct val="90000"/>
               </a:lnSpc>
-              <a:buNone/>
-            </a:pPr>
-            <a:r>
-              <a:rPr sz="875" b="0" i="0">
+            </a:pPr>
+            <a:r>
+              <a:rPr lang="es-ES" sz="875" b="0" i="0">
                 <a:solidFill>
                   <a:srgbClr val="59636E"/>
                 </a:solidFill>
@@ -3818,155 +3330,41 @@
                 <a:ea typeface="Arial"/>
                 <a:cs typeface="Arial"/>
               </a:rPr>
-              <a:t>Cómputo paralelo por fases</a:t>
-            </a:r>
-          </a:p>
-        </p:txBody>
-      </p:sp>
-      <p:sp>
-        <p:nvSpPr>
-          <p:cNvPr id="254" name="txt254">
-            <a:extLst>
-              <a:ext uri="{FF2B5EF4-FFF2-40B4-BE49-F238E27FC236}">
-                <a16:creationId xmlns:a16="http://schemas.microsoft.com/office/drawing/2014/main" id="{D5202600-E384-4DC3-B68B-2CE63634181B}"/>
-              </a:ext>
-            </a:extLst>
-          </p:cNvPr>
-          <p:cNvSpPr>
-            <a:spLocks noGrp="1"/>
-          </p:cNvSpPr>
-          <p:nvPr/>
-        </p:nvSpPr>
-        <p:spPr>
-          <a:xfrm>
-            <a:off x="539496" y="5038344"/>
-            <a:ext cx="1764792" cy="365760"/>
-          </a:xfrm>
-          <a:prstGeom prst="rect">
-            <a:avLst/>
-          </a:prstGeom>
-          <a:noFill/>
-          <a:ln w="0">
-            <a:noFill/>
-          </a:ln>
-        </p:spPr>
-        <p:txBody>
-          <a:bodyPr lIns="0" tIns="0" rIns="0" bIns="0" anchor="t">
-            <a:normAutofit/>
-          </a:bodyPr>
-          <a:lstStyle/>
-          <a:p>
-            <a:pPr algn="l">
-              <a:buNone/>
-            </a:pPr>
-            <a:r>
-              <a:rPr sz="975" b="1" i="0">
-                <a:solidFill>
-                  <a:srgbClr val="16324F"/>
-                </a:solidFill>
-                <a:latin typeface="Arial"/>
-                <a:ea typeface="Arial"/>
-                <a:cs typeface="Arial"/>
-              </a:rPr>
-              <a:t>Confinamiento a hilo</a:t>
-            </a:r>
-          </a:p>
-        </p:txBody>
-      </p:sp>
-      <p:sp>
-        <p:nvSpPr>
-          <p:cNvPr id="255" name="txt255">
-            <a:extLst>
-              <a:ext uri="{FF2B5EF4-FFF2-40B4-BE49-F238E27FC236}">
-                <a16:creationId xmlns:a16="http://schemas.microsoft.com/office/drawing/2014/main" id="{2038F1D3-C1FD-4305-B97D-F0C4C745D184}"/>
-              </a:ext>
-            </a:extLst>
-          </p:cNvPr>
-          <p:cNvSpPr>
-            <a:spLocks noGrp="1"/>
-          </p:cNvSpPr>
-          <p:nvPr/>
-        </p:nvSpPr>
-        <p:spPr>
-          <a:xfrm>
-            <a:off x="2414016" y="5056632"/>
-            <a:ext cx="1920240" cy="365760"/>
-          </a:xfrm>
-          <a:prstGeom prst="rect">
-            <a:avLst/>
-          </a:prstGeom>
-          <a:noFill/>
-          <a:ln w="0">
-            <a:noFill/>
-          </a:ln>
-        </p:spPr>
-        <p:txBody>
-          <a:bodyPr lIns="0" tIns="0" rIns="0" bIns="0" anchor="t">
-            <a:normAutofit/>
-          </a:bodyPr>
-          <a:lstStyle/>
-          <a:p>
-            <a:pPr algn="l">
-              <a:lnSpc>
-                <a:spcPct val="90000"/>
-              </a:lnSpc>
-              <a:buNone/>
-            </a:pPr>
-            <a:r>
-              <a:rPr sz="875" b="0" i="0">
-                <a:solidFill>
-                  <a:srgbClr val="59636E"/>
-                </a:solidFill>
-                <a:latin typeface="Arial"/>
-                <a:ea typeface="Arial"/>
-                <a:cs typeface="Arial"/>
-              </a:rPr>
-              <a:t>Un solo hilo es dueño del estado</a:t>
-            </a:r>
-          </a:p>
-        </p:txBody>
-      </p:sp>
-      <p:sp>
-        <p:nvSpPr>
-          <p:cNvPr id="256" name="txt256">
-            <a:extLst>
-              <a:ext uri="{FF2B5EF4-FFF2-40B4-BE49-F238E27FC236}">
-                <a16:creationId xmlns:a16="http://schemas.microsoft.com/office/drawing/2014/main" id="{49808CD2-A3FA-4DA9-A28E-84E365D03EC5}"/>
-              </a:ext>
-            </a:extLst>
-          </p:cNvPr>
-          <p:cNvSpPr>
-            <a:spLocks noGrp="1"/>
-          </p:cNvSpPr>
-          <p:nvPr/>
-        </p:nvSpPr>
-        <p:spPr>
-          <a:xfrm>
-            <a:off x="4443984" y="5056632"/>
-            <a:ext cx="969264" cy="365760"/>
-          </a:xfrm>
-          <a:prstGeom prst="rect">
-            <a:avLst/>
-          </a:prstGeom>
-          <a:noFill/>
-          <a:ln w="0">
-            <a:noFill/>
-          </a:ln>
-        </p:spPr>
-        <p:txBody>
-          <a:bodyPr lIns="0" tIns="0" rIns="0" bIns="0" anchor="t">
-            <a:normAutofit/>
-          </a:bodyPr>
-          <a:lstStyle/>
-          <a:p>
-            <a:pPr algn="l">
-              <a:lnSpc>
-                <a:spcPct val="90000"/>
-              </a:lnSpc>
-              <a:buNone/>
-            </a:pPr>
-            <a:r>
-              <a:rPr sz="875" b="0" i="0">
+              <a:t>El chat no trabaja por fases</a:t>
+            </a:r>
+          </a:p>
+        </p:txBody>
+      </p:sp>
+      <p:sp>
+        <p:nvSpPr>
+          <p:cNvPr id="346" name="txt346"/>
+          <p:cNvSpPr>
+            <a:spLocks noGrp="1"/>
+          </p:cNvSpPr>
+          <p:nvPr/>
+        </p:nvSpPr>
+        <p:spPr>
+          <a:xfrm>
+            <a:off x="539496" y="5248656"/>
+            <a:ext cx="10881360" cy="182880"/>
+          </a:xfrm>
+          <a:prstGeom prst="rect">
+            <a:avLst/>
+          </a:prstGeom>
+          <a:noFill/>
+          <a:ln w="0">
+            <a:noFill/>
+          </a:ln>
+        </p:spPr>
+        <p:txBody>
+          <a:bodyPr lIns="0" tIns="0" rIns="0" bIns="0" anchor="t">
+            <a:normAutofit/>
+          </a:bodyPr>
+          <a:lstStyle/>
+          <a:p>
+            <a:pPr algn="l"/>
+            <a:r>
+              <a:rPr lang="es-ES" sz="800" b="1" i="0">
                 <a:solidFill>
                   <a:srgbClr val="2E9D72"/>
                 </a:solidFill>
@@ -3974,232 +3372,15 @@
                 <a:ea typeface="Arial"/>
                 <a:cs typeface="Arial"/>
               </a:rPr>
-              <a:t>No espera</a:t>
-            </a:r>
-          </a:p>
-        </p:txBody>
-      </p:sp>
-      <p:sp>
-        <p:nvSpPr>
-          <p:cNvPr id="257" name="txt257">
-            <a:extLst>
-              <a:ext uri="{FF2B5EF4-FFF2-40B4-BE49-F238E27FC236}">
-                <a16:creationId xmlns:a16="http://schemas.microsoft.com/office/drawing/2014/main" id="{A1514BE3-609C-4C48-81E5-622E57D51FC7}"/>
-              </a:ext>
-            </a:extLst>
-          </p:cNvPr>
-          <p:cNvSpPr>
-            <a:spLocks noGrp="1"/>
-          </p:cNvSpPr>
-          <p:nvPr/>
-        </p:nvSpPr>
-        <p:spPr>
-          <a:xfrm>
-            <a:off x="5522976" y="5056632"/>
-            <a:ext cx="1152144" cy="365760"/>
-          </a:xfrm>
-          <a:prstGeom prst="rect">
-            <a:avLst/>
-          </a:prstGeom>
-          <a:noFill/>
-          <a:ln w="0">
-            <a:noFill/>
-          </a:ln>
-        </p:spPr>
-        <p:txBody>
-          <a:bodyPr lIns="0" tIns="0" rIns="0" bIns="0" anchor="t">
-            <a:normAutofit/>
-          </a:bodyPr>
-          <a:lstStyle/>
-          <a:p>
-            <a:pPr algn="l">
-              <a:lnSpc>
-                <a:spcPct val="90000"/>
-              </a:lnSpc>
-              <a:buNone/>
-            </a:pPr>
-            <a:r>
-              <a:rPr sz="875" b="0" i="0">
-                <a:solidFill>
-                  <a:srgbClr val="59636E"/>
-                </a:solidFill>
-                <a:latin typeface="Arial"/>
-                <a:ea typeface="Arial"/>
-                <a:cs typeface="Arial"/>
-              </a:rPr>
-              <a:t>Nulo</a:t>
-            </a:r>
-          </a:p>
-        </p:txBody>
-      </p:sp>
-      <p:sp>
-        <p:nvSpPr>
-          <p:cNvPr id="258" name="txt258">
-            <a:extLst>
-              <a:ext uri="{FF2B5EF4-FFF2-40B4-BE49-F238E27FC236}">
-                <a16:creationId xmlns:a16="http://schemas.microsoft.com/office/drawing/2014/main" id="{445DE8A1-1740-4ACB-A831-68247CCB8C99}"/>
-              </a:ext>
-            </a:extLst>
-          </p:cNvPr>
-          <p:cNvSpPr>
-            <a:spLocks noGrp="1"/>
-          </p:cNvSpPr>
-          <p:nvPr/>
-        </p:nvSpPr>
-        <p:spPr>
-          <a:xfrm>
-            <a:off x="6784848" y="5056632"/>
-            <a:ext cx="2377440" cy="365760"/>
-          </a:xfrm>
-          <a:prstGeom prst="rect">
-            <a:avLst/>
-          </a:prstGeom>
-          <a:noFill/>
-          <a:ln w="0">
-            <a:noFill/>
-          </a:ln>
-        </p:spPr>
-        <p:txBody>
-          <a:bodyPr lIns="0" tIns="0" rIns="0" bIns="0" anchor="t">
-            <a:normAutofit/>
-          </a:bodyPr>
-          <a:lstStyle/>
-          <a:p>
-            <a:pPr algn="l">
-              <a:lnSpc>
-                <a:spcPct val="90000"/>
-              </a:lnSpc>
-              <a:buNone/>
-            </a:pPr>
-            <a:r>
-              <a:rPr sz="875" b="0" i="0">
-                <a:solidFill>
-                  <a:srgbClr val="59636E"/>
-                </a:solidFill>
-                <a:latin typeface="Arial"/>
-                <a:ea typeface="Arial"/>
-                <a:cs typeface="Arial"/>
-              </a:rPr>
-              <a:t>No reparte la carga</a:t>
-            </a:r>
-          </a:p>
-        </p:txBody>
-      </p:sp>
-      <p:sp>
-        <p:nvSpPr>
-          <p:cNvPr id="259" name="txt259">
-            <a:extLst>
-              <a:ext uri="{FF2B5EF4-FFF2-40B4-BE49-F238E27FC236}">
-                <a16:creationId xmlns:a16="http://schemas.microsoft.com/office/drawing/2014/main" id="{33A29332-2333-4132-AA07-52A226A8BC86}"/>
-              </a:ext>
-            </a:extLst>
-          </p:cNvPr>
-          <p:cNvSpPr>
-            <a:spLocks noGrp="1"/>
-          </p:cNvSpPr>
-          <p:nvPr/>
-        </p:nvSpPr>
-        <p:spPr>
-          <a:xfrm>
-            <a:off x="9272016" y="5056632"/>
-            <a:ext cx="2569464" cy="365760"/>
-          </a:xfrm>
-          <a:prstGeom prst="rect">
-            <a:avLst/>
-          </a:prstGeom>
-          <a:noFill/>
-          <a:ln w="0">
-            <a:noFill/>
-          </a:ln>
-        </p:spPr>
-        <p:txBody>
-          <a:bodyPr lIns="0" tIns="0" rIns="0" bIns="0" anchor="t">
-            <a:normAutofit/>
-          </a:bodyPr>
-          <a:lstStyle/>
-          <a:p>
-            <a:pPr algn="l">
-              <a:lnSpc>
-                <a:spcPct val="90000"/>
-              </a:lnSpc>
-              <a:buNone/>
-            </a:pPr>
-            <a:r>
-              <a:rPr sz="875" b="0" i="0">
-                <a:solidFill>
-                  <a:srgbClr val="59636E"/>
-                </a:solidFill>
-                <a:latin typeface="Arial"/>
-                <a:ea typeface="Arial"/>
-                <a:cs typeface="Arial"/>
-              </a:rPr>
-              <a:t>Sockets y claves del Selector</a:t>
-            </a:r>
-          </a:p>
-        </p:txBody>
-      </p:sp>
-      <p:sp>
-        <p:nvSpPr>
-          <p:cNvPr id="260" name="txt260">
-            <a:extLst>
-              <a:ext uri="{FF2B5EF4-FFF2-40B4-BE49-F238E27FC236}">
-                <a16:creationId xmlns:a16="http://schemas.microsoft.com/office/drawing/2014/main" id="{E39ABBB5-3262-491E-82C5-4B08F7239E4A}"/>
-              </a:ext>
-            </a:extLst>
-          </p:cNvPr>
-          <p:cNvSpPr>
-            <a:spLocks noGrp="1"/>
-          </p:cNvSpPr>
-          <p:nvPr/>
-        </p:nvSpPr>
-        <p:spPr>
-          <a:xfrm>
-            <a:off x="539496" y="4169664"/>
-            <a:ext cx="6400800" cy="164592"/>
-          </a:xfrm>
-          <a:prstGeom prst="rect">
-            <a:avLst/>
-          </a:prstGeom>
-          <a:noFill/>
-          <a:ln w="0">
-            <a:noFill/>
-          </a:ln>
-        </p:spPr>
-        <p:txBody>
-          <a:bodyPr lIns="0" tIns="0" rIns="0" bIns="0" anchor="t">
-            <a:normAutofit/>
-          </a:bodyPr>
-          <a:lstStyle/>
-          <a:p>
-            <a:pPr algn="l">
-              <a:buNone/>
-            </a:pPr>
-            <a:r>
-              <a:rPr sz="800" b="1" i="0">
-                <a:solidFill>
-                  <a:srgbClr val="2E9D72"/>
-                </a:solidFill>
-                <a:latin typeface="Arial"/>
-                <a:ea typeface="Arial"/>
-                <a:cs typeface="Arial"/>
-              </a:rPr>
-              <a:t>▸ Las dos técnicas implementadas en la solución del laboratorio</a:t>
-            </a:r>
-          </a:p>
-        </p:txBody>
-      </p:sp>
-      <p:sp>
-        <p:nvSpPr>
-          <p:cNvPr id="261" name="box261">
-            <a:extLst>
-              <a:ext uri="{FF2B5EF4-FFF2-40B4-BE49-F238E27FC236}">
-                <a16:creationId xmlns:a16="http://schemas.microsoft.com/office/drawing/2014/main" id="{B228FC14-2082-4196-A141-1AD4E542E18F}"/>
-              </a:ext>
-            </a:extLst>
-          </p:cNvPr>
-          <p:cNvSpPr>
-            <a:spLocks noGrp="1"/>
-          </p:cNvSpPr>
+              <a:t>▸ Ninguna se implementa aquí: el chat es distribuido, pero su problema de sincronización ocurre dentro del servidor (Nivel B).</a:t>
+            </a:r>
+          </a:p>
+        </p:txBody>
+      </p:sp>
+      <p:sp>
+        <p:nvSpPr>
+          <p:cNvPr id="347" name="box347"/>
+          <p:cNvSpPr/>
           <p:nvPr/>
         </p:nvSpPr>
         <p:spPr>
@@ -4223,23 +3404,13 @@
           <a:bodyPr/>
           <a:lstStyle/>
           <a:p>
-            <a:endParaRPr dirty="0">
-              <a:highlight>
-                <a:srgbClr val="FFFF00"/>
-              </a:highlight>
-            </a:endParaRPr>
-          </a:p>
-        </p:txBody>
-      </p:sp>
-      <p:sp>
-        <p:nvSpPr>
-          <p:cNvPr id="262" name="txt262">
-            <a:extLst>
-              <a:ext uri="{FF2B5EF4-FFF2-40B4-BE49-F238E27FC236}">
-                <a16:creationId xmlns:a16="http://schemas.microsoft.com/office/drawing/2014/main" id="{2B381E29-6A8B-4199-A850-E3682579E461}"/>
-              </a:ext>
-            </a:extLst>
-          </p:cNvPr>
+            <a:endParaRPr/>
+          </a:p>
+        </p:txBody>
+      </p:sp>
+      <p:sp>
+        <p:nvSpPr>
+          <p:cNvPr id="348" name="txt348"/>
           <p:cNvSpPr>
             <a:spLocks noGrp="1"/>
           </p:cNvSpPr>
@@ -4264,11 +3435,9 @@
           </a:bodyPr>
           <a:lstStyle/>
           <a:p>
-            <a:pPr algn="l">
-              <a:buNone/>
-            </a:pPr>
-            <a:r>
-              <a:rPr sz="1050" b="1" i="0">
+            <a:pPr algn="l"/>
+            <a:r>
+              <a:rPr lang="es-ES" sz="1050" b="1" i="0">
                 <a:solidFill>
                   <a:srgbClr val="3D8DFF"/>
                 </a:solidFill>
@@ -4276,20 +3445,14 @@
                 <a:ea typeface="Arial"/>
                 <a:cs typeface="Arial"/>
               </a:rPr>
-              <a:t>Bloqueante</a:t>
-            </a:r>
-          </a:p>
-        </p:txBody>
-      </p:sp>
-      <p:sp>
-        <p:nvSpPr>
-          <p:cNvPr id="263" name="txt263">
-            <a:extLst>
-              <a:ext uri="{FF2B5EF4-FFF2-40B4-BE49-F238E27FC236}">
-                <a16:creationId xmlns:a16="http://schemas.microsoft.com/office/drawing/2014/main" id="{444DB6AC-D3F8-4231-801E-8467CE94981A}"/>
-              </a:ext>
-            </a:extLst>
-          </p:cNvPr>
+              <a:t>Sin memoria compartida</a:t>
+            </a:r>
+          </a:p>
+        </p:txBody>
+      </p:sp>
+      <p:sp>
+        <p:nvSpPr>
+          <p:cNvPr id="349" name="txt349"/>
           <p:cNvSpPr>
             <a:spLocks noGrp="1"/>
           </p:cNvSpPr>
@@ -4314,11 +3477,9 @@
           </a:bodyPr>
           <a:lstStyle/>
           <a:p>
-            <a:pPr algn="l">
-              <a:buNone/>
-            </a:pPr>
-            <a:r>
-              <a:rPr sz="900" b="0" i="0" dirty="0" err="1">
+            <a:pPr algn="l"/>
+            <a:r>
+              <a:rPr lang="es-ES" sz="900" b="0" i="0">
                 <a:solidFill>
                   <a:srgbClr val="CBD1D8"/>
                 </a:solidFill>
@@ -4326,75 +3487,14 @@
                 <a:ea typeface="Arial"/>
                 <a:cs typeface="Arial"/>
               </a:rPr>
-              <a:t>el</a:t>
-            </a:r>
-            <a:r>
-              <a:rPr sz="900" b="0" i="0" dirty="0">
-                <a:solidFill>
-                  <a:srgbClr val="CBD1D8"/>
-                </a:solidFill>
-                <a:latin typeface="Arial"/>
-                <a:ea typeface="Arial"/>
-                <a:cs typeface="Arial"/>
-              </a:rPr>
-              <a:t> </a:t>
-            </a:r>
-            <a:r>
-              <a:rPr sz="900" b="0" i="0" dirty="0" err="1">
-                <a:solidFill>
-                  <a:srgbClr val="CBD1D8"/>
-                </a:solidFill>
-                <a:latin typeface="Arial"/>
-                <a:ea typeface="Arial"/>
-                <a:cs typeface="Arial"/>
-              </a:rPr>
-              <a:t>hilo</a:t>
-            </a:r>
-            <a:r>
-              <a:rPr sz="900" b="0" i="0" dirty="0">
-                <a:solidFill>
-                  <a:srgbClr val="CBD1D8"/>
-                </a:solidFill>
-                <a:latin typeface="Arial"/>
-                <a:ea typeface="Arial"/>
-                <a:cs typeface="Arial"/>
-              </a:rPr>
-              <a:t> se </a:t>
-            </a:r>
-            <a:r>
-              <a:rPr sz="900" b="0" i="0" dirty="0" err="1">
-                <a:solidFill>
-                  <a:srgbClr val="CBD1D8"/>
-                </a:solidFill>
-                <a:latin typeface="Arial"/>
-                <a:ea typeface="Arial"/>
-                <a:cs typeface="Arial"/>
-              </a:rPr>
-              <a:t>suspende</a:t>
-            </a:r>
-            <a:r>
-              <a:rPr sz="900" b="0" i="0" dirty="0">
-                <a:solidFill>
-                  <a:srgbClr val="CBD1D8"/>
-                </a:solidFill>
-                <a:latin typeface="Arial"/>
-                <a:ea typeface="Arial"/>
-                <a:cs typeface="Arial"/>
-              </a:rPr>
-              <a:t> y no consume CPU</a:t>
-            </a:r>
-          </a:p>
-        </p:txBody>
-      </p:sp>
-      <p:sp>
-        <p:nvSpPr>
-          <p:cNvPr id="264" name="txt264">
-            <a:extLst>
-              <a:ext uri="{FF2B5EF4-FFF2-40B4-BE49-F238E27FC236}">
-                <a16:creationId xmlns:a16="http://schemas.microsoft.com/office/drawing/2014/main" id="{318B9BFD-652B-4669-911E-2DBB679F5F8E}"/>
-              </a:ext>
-            </a:extLst>
-          </p:cNvPr>
+              <a:t>los nodos solo se coordinan por mensajes</a:t>
+            </a:r>
+          </a:p>
+        </p:txBody>
+      </p:sp>
+      <p:sp>
+        <p:nvSpPr>
+          <p:cNvPr id="350" name="txt350"/>
           <p:cNvSpPr>
             <a:spLocks noGrp="1"/>
           </p:cNvSpPr>
@@ -4419,11 +3519,9 @@
           </a:bodyPr>
           <a:lstStyle/>
           <a:p>
-            <a:pPr algn="l">
-              <a:buNone/>
-            </a:pPr>
-            <a:r>
-              <a:rPr sz="1050" b="1" i="0">
+            <a:pPr algn="l"/>
+            <a:r>
+              <a:rPr lang="es-ES" sz="1050" b="1" i="0">
                 <a:solidFill>
                   <a:srgbClr val="6DCBF4"/>
                 </a:solidFill>
@@ -4431,20 +3529,14 @@
                 <a:ea typeface="Arial"/>
                 <a:cs typeface="Arial"/>
               </a:rPr>
-              <a:t>No bloqueante</a:t>
-            </a:r>
-          </a:p>
-        </p:txBody>
-      </p:sp>
-      <p:sp>
-        <p:nvSpPr>
-          <p:cNvPr id="265" name="txt265">
-            <a:extLst>
-              <a:ext uri="{FF2B5EF4-FFF2-40B4-BE49-F238E27FC236}">
-                <a16:creationId xmlns:a16="http://schemas.microsoft.com/office/drawing/2014/main" id="{8D2EC335-965A-4F7B-9044-6B8CA66CCF59}"/>
-              </a:ext>
-            </a:extLst>
-          </p:cNvPr>
+              <a:t>Sin reloj global</a:t>
+            </a:r>
+          </a:p>
+        </p:txBody>
+      </p:sp>
+      <p:sp>
+        <p:nvSpPr>
+          <p:cNvPr id="351" name="txt351"/>
           <p:cNvSpPr>
             <a:spLocks noGrp="1"/>
           </p:cNvSpPr>
@@ -4469,11 +3561,9 @@
           </a:bodyPr>
           <a:lstStyle/>
           <a:p>
-            <a:pPr algn="l">
-              <a:buNone/>
-            </a:pPr>
-            <a:r>
-              <a:rPr sz="900" b="0" i="0">
+            <a:pPr algn="l"/>
+            <a:r>
+              <a:rPr lang="es-ES" sz="900" b="0" i="0">
                 <a:solidFill>
                   <a:srgbClr val="CBD1D8"/>
                 </a:solidFill>
@@ -4481,20 +3571,14 @@
                 <a:ea typeface="Arial"/>
                 <a:cs typeface="Arial"/>
               </a:rPr>
-              <a:t>el hilo reintenta sin suspenderse jamás</a:t>
-            </a:r>
-          </a:p>
-        </p:txBody>
-      </p:sp>
-      <p:sp>
-        <p:nvSpPr>
-          <p:cNvPr id="266" name="txt266">
-            <a:extLst>
-              <a:ext uri="{FF2B5EF4-FFF2-40B4-BE49-F238E27FC236}">
-                <a16:creationId xmlns:a16="http://schemas.microsoft.com/office/drawing/2014/main" id="{A3AC17D5-30B0-4853-B2D9-FF4DA62FC51D}"/>
-              </a:ext>
-            </a:extLst>
-          </p:cNvPr>
+              <a:t>el orden causal se construye, no se lee</a:t>
+            </a:r>
+          </a:p>
+        </p:txBody>
+      </p:sp>
+      <p:sp>
+        <p:nvSpPr>
+          <p:cNvPr id="352" name="txt352"/>
           <p:cNvSpPr>
             <a:spLocks noGrp="1"/>
           </p:cNvSpPr>
@@ -4519,11 +3603,9 @@
           </a:bodyPr>
           <a:lstStyle/>
           <a:p>
-            <a:pPr algn="l">
-              <a:buNone/>
-            </a:pPr>
-            <a:r>
-              <a:rPr sz="1050" b="1" i="0">
+            <a:pPr algn="l"/>
+            <a:r>
+              <a:rPr lang="es-ES" sz="1050" b="1" i="0">
                 <a:solidFill>
                   <a:srgbClr val="F4B942"/>
                 </a:solidFill>
@@ -4531,20 +3613,14 @@
                 <a:ea typeface="Arial"/>
                 <a:cs typeface="Arial"/>
               </a:rPr>
-              <a:t>En el laboratorio</a:t>
-            </a:r>
-          </a:p>
-        </p:txBody>
-      </p:sp>
-      <p:sp>
-        <p:nvSpPr>
-          <p:cNvPr id="267" name="txt267">
-            <a:extLst>
-              <a:ext uri="{FF2B5EF4-FFF2-40B4-BE49-F238E27FC236}">
-                <a16:creationId xmlns:a16="http://schemas.microsoft.com/office/drawing/2014/main" id="{A8F4BAB2-27F3-4CE4-8F42-2820B08DAE74}"/>
-              </a:ext>
-            </a:extLst>
-          </p:cNvPr>
+              <a:t>Nuestro caso</a:t>
+            </a:r>
+          </a:p>
+        </p:txBody>
+      </p:sp>
+      <p:sp>
+        <p:nvSpPr>
+          <p:cNvPr id="353" name="txt353"/>
           <p:cNvSpPr>
             <a:spLocks noGrp="1"/>
           </p:cNvSpPr>
@@ -4569,11 +3645,9 @@
           </a:bodyPr>
           <a:lstStyle/>
           <a:p>
-            <a:pPr algn="l">
-              <a:buNone/>
-            </a:pPr>
-            <a:r>
-              <a:rPr sz="900" b="0" i="0">
+            <a:pPr algn="l"/>
+            <a:r>
+              <a:rPr lang="es-ES" sz="900" b="0" i="0">
                 <a:solidFill>
                   <a:srgbClr val="CBD1D8"/>
                 </a:solidFill>
@@ -4581,65 +3655,49 @@
                 <a:ea typeface="Arial"/>
                 <a:cs typeface="Arial"/>
               </a:rPr>
-              <a:t>BlockingQueue coordina · CAS ordena</a:t>
-            </a:r>
-          </a:p>
-        </p:txBody>
-      </p:sp>
-      <p:sp>
-        <p:nvSpPr>
-          <p:cNvPr id="268" name="merged-page">
-            <a:extLst>
-              <a:ext uri="{FF2B5EF4-FFF2-40B4-BE49-F238E27FC236}">
-                <a16:creationId xmlns:a16="http://schemas.microsoft.com/office/drawing/2014/main" id="{8912BD7A-79E6-47FC-81A2-879EEC4CAB6C}"/>
-              </a:ext>
-            </a:extLst>
-          </p:cNvPr>
-          <p:cNvSpPr>
-            <a:spLocks noGrp="1"/>
-          </p:cNvSpPr>
-          <p:nvPr/>
-        </p:nvSpPr>
-        <p:spPr>
-          <a:xfrm>
-            <a:off x="10858500" y="6457950"/>
-            <a:ext cx="933450" cy="171450"/>
-          </a:xfrm>
-          <a:prstGeom prst="rect">
-            <a:avLst/>
-          </a:prstGeom>
-          <a:noFill/>
-          <a:ln w="0">
-            <a:noFill/>
-            <a:prstDash val="solid"/>
-          </a:ln>
-        </p:spPr>
-        <p:txBody>
-          <a:bodyPr lIns="0" tIns="0" rIns="0" bIns="0">
-            <a:normAutofit/>
-          </a:bodyPr>
-          <a:lstStyle/>
-          <a:p>
-            <a:pPr algn="r">
-              <a:defRPr sz="825">
+              <a:t>sincronización de hilos dentro de un proceso</a:t>
+            </a:r>
+          </a:p>
+        </p:txBody>
+      </p:sp>
+      <p:sp>
+        <p:nvSpPr>
+          <p:cNvPr id="354" name="txt354"/>
+          <p:cNvSpPr>
+            <a:spLocks noGrp="1"/>
+          </p:cNvSpPr>
+          <p:nvPr/>
+        </p:nvSpPr>
+        <p:spPr>
+          <a:xfrm>
+            <a:off x="10863072" y="6455664"/>
+            <a:ext cx="932688" cy="173736"/>
+          </a:xfrm>
+          <a:prstGeom prst="rect">
+            <a:avLst/>
+          </a:prstGeom>
+          <a:noFill/>
+          <a:ln w="0">
+            <a:noFill/>
+          </a:ln>
+        </p:spPr>
+        <p:txBody>
+          <a:bodyPr lIns="0" tIns="0" rIns="0" bIns="0" anchor="t">
+            <a:normAutofit/>
+          </a:bodyPr>
+          <a:lstStyle/>
+          <a:p>
+            <a:pPr algn="r"/>
+            <a:r>
+              <a:rPr lang="es-ES" sz="825" b="0" i="0">
                 <a:solidFill>
                   <a:srgbClr val="59636E"/>
                 </a:solidFill>
                 <a:latin typeface="Arial"/>
                 <a:ea typeface="Arial"/>
                 <a:cs typeface="Arial"/>
-              </a:defRPr>
-            </a:pPr>
-            <a:r>
-              <a:rPr sz="825">
-                <a:solidFill>
-                  <a:srgbClr val="59636E"/>
-                </a:solidFill>
-                <a:latin typeface="Arial"/>
-                <a:ea typeface="Arial"/>
-                <a:cs typeface="Arial"/>
-              </a:rPr>
-              <a:t>03 / 03</a:t>
+              </a:rPr>
+              <a:t>01 / 04</a:t>
             </a:r>
           </a:p>
         </p:txBody>
@@ -4679,6 +3737,3324 @@
       </p:grpSpPr>
       <p:sp>
         <p:nvSpPr>
+          <p:cNvPr id="201" name="txt201">
+            <a:extLst>
+              <a:ext uri="{FF2B5EF4-FFF2-40B4-BE49-F238E27FC236}">
+                <a16:creationId xmlns:a16="http://schemas.microsoft.com/office/drawing/2014/main" id="{9BF22391-0507-47F5-A562-E2A448E1A11F}"/>
+              </a:ext>
+            </a:extLst>
+          </p:cNvPr>
+          <p:cNvSpPr>
+            <a:spLocks noGrp="1"/>
+          </p:cNvSpPr>
+          <p:nvPr/>
+        </p:nvSpPr>
+        <p:spPr>
+          <a:xfrm>
+            <a:off x="393192" y="237744"/>
+            <a:ext cx="4764024" cy="210312"/>
+          </a:xfrm>
+          <a:prstGeom prst="rect">
+            <a:avLst/>
+          </a:prstGeom>
+          <a:noFill/>
+          <a:ln w="0">
+            <a:noFill/>
+          </a:ln>
+        </p:spPr>
+        <p:txBody>
+          <a:bodyPr lIns="0" tIns="0" rIns="0" bIns="0" anchor="t">
+            <a:normAutofit/>
+          </a:bodyPr>
+          <a:lstStyle/>
+          <a:p>
+            <a:pPr algn="l">
+              <a:buNone/>
+            </a:pPr>
+            <a:r>
+              <a:rPr sz="1050" b="1" i="0" dirty="0">
+                <a:solidFill>
+                  <a:srgbClr val="3D8DFF"/>
+                </a:solidFill>
+                <a:latin typeface="Arial"/>
+                <a:ea typeface="Arial"/>
+                <a:cs typeface="Arial"/>
+              </a:rPr>
+              <a:t>PROCESOS · HILOS · SINCRONIZACIÓN</a:t>
+            </a:r>
+          </a:p>
+        </p:txBody>
+      </p:sp>
+      <p:sp>
+        <p:nvSpPr>
+          <p:cNvPr id="202" name="txt202">
+            <a:extLst>
+              <a:ext uri="{FF2B5EF4-FFF2-40B4-BE49-F238E27FC236}">
+                <a16:creationId xmlns:a16="http://schemas.microsoft.com/office/drawing/2014/main" id="{BFF159CA-2AA5-420F-B4FB-C26CCB248C12}"/>
+              </a:ext>
+            </a:extLst>
+          </p:cNvPr>
+          <p:cNvSpPr>
+            <a:spLocks noGrp="1"/>
+          </p:cNvSpPr>
+          <p:nvPr/>
+        </p:nvSpPr>
+        <p:spPr>
+          <a:xfrm>
+            <a:off x="393192" y="484632"/>
+            <a:ext cx="8284464" cy="548640"/>
+          </a:xfrm>
+          <a:prstGeom prst="rect">
+            <a:avLst/>
+          </a:prstGeom>
+          <a:noFill/>
+          <a:ln w="0">
+            <a:noFill/>
+          </a:ln>
+        </p:spPr>
+        <p:txBody>
+          <a:bodyPr lIns="0" tIns="0" rIns="0" bIns="0" anchor="t">
+            <a:normAutofit/>
+          </a:bodyPr>
+          <a:lstStyle/>
+          <a:p>
+            <a:pPr algn="l">
+              <a:buNone/>
+            </a:pPr>
+            <a:r>
+              <a:rPr sz="3450" b="1" i="0">
+                <a:solidFill>
+                  <a:srgbClr val="101820"/>
+                </a:solidFill>
+                <a:latin typeface="Arial"/>
+                <a:ea typeface="Arial"/>
+                <a:cs typeface="Arial"/>
+              </a:rPr>
+              <a:t>Técnicas de sincronización de hilos</a:t>
+            </a:r>
+          </a:p>
+        </p:txBody>
+      </p:sp>
+      <p:sp>
+        <p:nvSpPr>
+          <p:cNvPr id="208" name="box208">
+            <a:extLst>
+              <a:ext uri="{FF2B5EF4-FFF2-40B4-BE49-F238E27FC236}">
+                <a16:creationId xmlns:a16="http://schemas.microsoft.com/office/drawing/2014/main" id="{C8C7A1D2-11A2-481E-97F9-BBC32535BC6F}"/>
+              </a:ext>
+            </a:extLst>
+          </p:cNvPr>
+          <p:cNvSpPr>
+            <a:spLocks noGrp="1"/>
+          </p:cNvSpPr>
+          <p:nvPr/>
+        </p:nvSpPr>
+        <p:spPr>
+          <a:xfrm>
+            <a:off x="393192" y="1755648"/>
+            <a:ext cx="11411712" cy="3785616"/>
+          </a:xfrm>
+          <a:prstGeom prst="roundRect">
+            <a:avLst>
+              <a:gd name="adj" fmla="val 6000"/>
+            </a:avLst>
+          </a:prstGeom>
+          <a:solidFill>
+            <a:srgbClr val="F7F9FB"/>
+          </a:solidFill>
+          <a:ln w="9525">
+            <a:solidFill>
+              <a:srgbClr val="D7E2EF"/>
+            </a:solidFill>
+            <a:prstDash val="solid"/>
+          </a:ln>
+        </p:spPr>
+        <p:txBody>
+          <a:bodyPr/>
+          <a:lstStyle/>
+          <a:p>
+            <a:endParaRPr/>
+          </a:p>
+        </p:txBody>
+      </p:sp>
+      <p:sp>
+        <p:nvSpPr>
+          <p:cNvPr id="209" name="txt209">
+            <a:extLst>
+              <a:ext uri="{FF2B5EF4-FFF2-40B4-BE49-F238E27FC236}">
+                <a16:creationId xmlns:a16="http://schemas.microsoft.com/office/drawing/2014/main" id="{2EEF117B-F4DE-45AE-BF49-C78E2450312B}"/>
+              </a:ext>
+            </a:extLst>
+          </p:cNvPr>
+          <p:cNvSpPr>
+            <a:spLocks noGrp="1"/>
+          </p:cNvSpPr>
+          <p:nvPr/>
+        </p:nvSpPr>
+        <p:spPr>
+          <a:xfrm>
+            <a:off x="539496" y="1901952"/>
+            <a:ext cx="1764792" cy="201168"/>
+          </a:xfrm>
+          <a:prstGeom prst="rect">
+            <a:avLst/>
+          </a:prstGeom>
+          <a:noFill/>
+          <a:ln w="0">
+            <a:noFill/>
+          </a:ln>
+        </p:spPr>
+        <p:txBody>
+          <a:bodyPr lIns="0" tIns="0" rIns="0" bIns="0" anchor="t">
+            <a:normAutofit/>
+          </a:bodyPr>
+          <a:lstStyle/>
+          <a:p>
+            <a:pPr algn="l">
+              <a:buNone/>
+            </a:pPr>
+            <a:r>
+              <a:rPr sz="875" b="1" i="0">
+                <a:solidFill>
+                  <a:srgbClr val="3D8DFF"/>
+                </a:solidFill>
+                <a:latin typeface="Arial"/>
+                <a:ea typeface="Arial"/>
+                <a:cs typeface="Arial"/>
+              </a:rPr>
+              <a:t>TÉCNICA</a:t>
+            </a:r>
+          </a:p>
+        </p:txBody>
+      </p:sp>
+      <p:sp>
+        <p:nvSpPr>
+          <p:cNvPr id="210" name="txt210">
+            <a:extLst>
+              <a:ext uri="{FF2B5EF4-FFF2-40B4-BE49-F238E27FC236}">
+                <a16:creationId xmlns:a16="http://schemas.microsoft.com/office/drawing/2014/main" id="{69522252-860E-4883-8C56-3DA23A2142E8}"/>
+              </a:ext>
+            </a:extLst>
+          </p:cNvPr>
+          <p:cNvSpPr>
+            <a:spLocks noGrp="1"/>
+          </p:cNvSpPr>
+          <p:nvPr/>
+        </p:nvSpPr>
+        <p:spPr>
+          <a:xfrm>
+            <a:off x="2414016" y="1901952"/>
+            <a:ext cx="1920240" cy="201168"/>
+          </a:xfrm>
+          <a:prstGeom prst="rect">
+            <a:avLst/>
+          </a:prstGeom>
+          <a:noFill/>
+          <a:ln w="0">
+            <a:noFill/>
+          </a:ln>
+        </p:spPr>
+        <p:txBody>
+          <a:bodyPr lIns="0" tIns="0" rIns="0" bIns="0" anchor="t">
+            <a:normAutofit/>
+          </a:bodyPr>
+          <a:lstStyle/>
+          <a:p>
+            <a:pPr algn="l">
+              <a:buNone/>
+            </a:pPr>
+            <a:r>
+              <a:rPr sz="875" b="1" i="0">
+                <a:solidFill>
+                  <a:srgbClr val="3D8DFF"/>
+                </a:solidFill>
+                <a:latin typeface="Arial"/>
+                <a:ea typeface="Arial"/>
+                <a:cs typeface="Arial"/>
+              </a:rPr>
+              <a:t>QUÉ GARANTIZA</a:t>
+            </a:r>
+          </a:p>
+        </p:txBody>
+      </p:sp>
+      <p:sp>
+        <p:nvSpPr>
+          <p:cNvPr id="211" name="txt211">
+            <a:extLst>
+              <a:ext uri="{FF2B5EF4-FFF2-40B4-BE49-F238E27FC236}">
+                <a16:creationId xmlns:a16="http://schemas.microsoft.com/office/drawing/2014/main" id="{C598CA4B-B8E9-4A82-A53F-33DD727678CF}"/>
+              </a:ext>
+            </a:extLst>
+          </p:cNvPr>
+          <p:cNvSpPr>
+            <a:spLocks noGrp="1"/>
+          </p:cNvSpPr>
+          <p:nvPr/>
+        </p:nvSpPr>
+        <p:spPr>
+          <a:xfrm>
+            <a:off x="4443984" y="1901952"/>
+            <a:ext cx="969264" cy="201168"/>
+          </a:xfrm>
+          <a:prstGeom prst="rect">
+            <a:avLst/>
+          </a:prstGeom>
+          <a:noFill/>
+          <a:ln w="0">
+            <a:noFill/>
+          </a:ln>
+        </p:spPr>
+        <p:txBody>
+          <a:bodyPr lIns="0" tIns="0" rIns="0" bIns="0" anchor="t">
+            <a:normAutofit/>
+          </a:bodyPr>
+          <a:lstStyle/>
+          <a:p>
+            <a:pPr algn="l">
+              <a:buNone/>
+            </a:pPr>
+            <a:r>
+              <a:rPr sz="875" b="1" i="0">
+                <a:solidFill>
+                  <a:srgbClr val="3D8DFF"/>
+                </a:solidFill>
+                <a:latin typeface="Arial"/>
+                <a:ea typeface="Arial"/>
+                <a:cs typeface="Arial"/>
+              </a:rPr>
+              <a:t>CÓMO ESPERA</a:t>
+            </a:r>
+          </a:p>
+        </p:txBody>
+      </p:sp>
+      <p:sp>
+        <p:nvSpPr>
+          <p:cNvPr id="212" name="txt212">
+            <a:extLst>
+              <a:ext uri="{FF2B5EF4-FFF2-40B4-BE49-F238E27FC236}">
+                <a16:creationId xmlns:a16="http://schemas.microsoft.com/office/drawing/2014/main" id="{81C4A169-02CD-4DD2-8F1E-2F780A889B97}"/>
+              </a:ext>
+            </a:extLst>
+          </p:cNvPr>
+          <p:cNvSpPr>
+            <a:spLocks noGrp="1"/>
+          </p:cNvSpPr>
+          <p:nvPr/>
+        </p:nvSpPr>
+        <p:spPr>
+          <a:xfrm>
+            <a:off x="5522976" y="1901952"/>
+            <a:ext cx="1152144" cy="201168"/>
+          </a:xfrm>
+          <a:prstGeom prst="rect">
+            <a:avLst/>
+          </a:prstGeom>
+          <a:noFill/>
+          <a:ln w="0">
+            <a:noFill/>
+          </a:ln>
+        </p:spPr>
+        <p:txBody>
+          <a:bodyPr lIns="0" tIns="0" rIns="0" bIns="0" anchor="t">
+            <a:normAutofit/>
+          </a:bodyPr>
+          <a:lstStyle/>
+          <a:p>
+            <a:pPr algn="l">
+              <a:buNone/>
+            </a:pPr>
+            <a:r>
+              <a:rPr sz="875" b="1" i="0">
+                <a:solidFill>
+                  <a:srgbClr val="3D8DFF"/>
+                </a:solidFill>
+                <a:latin typeface="Arial"/>
+                <a:ea typeface="Arial"/>
+                <a:cs typeface="Arial"/>
+              </a:rPr>
+              <a:t>COSTO</a:t>
+            </a:r>
+          </a:p>
+        </p:txBody>
+      </p:sp>
+      <p:sp>
+        <p:nvSpPr>
+          <p:cNvPr id="213" name="txt213">
+            <a:extLst>
+              <a:ext uri="{FF2B5EF4-FFF2-40B4-BE49-F238E27FC236}">
+                <a16:creationId xmlns:a16="http://schemas.microsoft.com/office/drawing/2014/main" id="{A38D8545-1082-432C-B483-F321504E9325}"/>
+              </a:ext>
+            </a:extLst>
+          </p:cNvPr>
+          <p:cNvSpPr>
+            <a:spLocks noGrp="1"/>
+          </p:cNvSpPr>
+          <p:nvPr/>
+        </p:nvSpPr>
+        <p:spPr>
+          <a:xfrm>
+            <a:off x="6784848" y="1901952"/>
+            <a:ext cx="2377440" cy="201168"/>
+          </a:xfrm>
+          <a:prstGeom prst="rect">
+            <a:avLst/>
+          </a:prstGeom>
+          <a:noFill/>
+          <a:ln w="0">
+            <a:noFill/>
+          </a:ln>
+        </p:spPr>
+        <p:txBody>
+          <a:bodyPr lIns="0" tIns="0" rIns="0" bIns="0" anchor="t">
+            <a:normAutofit/>
+          </a:bodyPr>
+          <a:lstStyle/>
+          <a:p>
+            <a:pPr algn="l">
+              <a:buNone/>
+            </a:pPr>
+            <a:r>
+              <a:rPr sz="875" b="1" i="0">
+                <a:solidFill>
+                  <a:srgbClr val="3D8DFF"/>
+                </a:solidFill>
+                <a:latin typeface="Arial"/>
+                <a:ea typeface="Arial"/>
+                <a:cs typeface="Arial"/>
+              </a:rPr>
+              <a:t>RIESGO PRINCIPAL</a:t>
+            </a:r>
+          </a:p>
+        </p:txBody>
+      </p:sp>
+      <p:sp>
+        <p:nvSpPr>
+          <p:cNvPr id="214" name="txt214">
+            <a:extLst>
+              <a:ext uri="{FF2B5EF4-FFF2-40B4-BE49-F238E27FC236}">
+                <a16:creationId xmlns:a16="http://schemas.microsoft.com/office/drawing/2014/main" id="{F0C9849E-3ABA-4997-A752-867E4882B13E}"/>
+              </a:ext>
+            </a:extLst>
+          </p:cNvPr>
+          <p:cNvSpPr>
+            <a:spLocks noGrp="1"/>
+          </p:cNvSpPr>
+          <p:nvPr/>
+        </p:nvSpPr>
+        <p:spPr>
+          <a:xfrm>
+            <a:off x="9272016" y="1901952"/>
+            <a:ext cx="2569464" cy="201168"/>
+          </a:xfrm>
+          <a:prstGeom prst="rect">
+            <a:avLst/>
+          </a:prstGeom>
+          <a:noFill/>
+          <a:ln w="0">
+            <a:noFill/>
+          </a:ln>
+        </p:spPr>
+        <p:txBody>
+          <a:bodyPr lIns="0" tIns="0" rIns="0" bIns="0" anchor="t">
+            <a:normAutofit/>
+          </a:bodyPr>
+          <a:lstStyle/>
+          <a:p>
+            <a:pPr algn="l">
+              <a:buNone/>
+            </a:pPr>
+            <a:r>
+              <a:rPr sz="875" b="1" i="0">
+                <a:solidFill>
+                  <a:srgbClr val="3D8DFF"/>
+                </a:solidFill>
+                <a:latin typeface="Arial"/>
+                <a:ea typeface="Arial"/>
+                <a:cs typeface="Arial"/>
+              </a:rPr>
+              <a:t>CUÁNDO CONVIENE</a:t>
+            </a:r>
+          </a:p>
+        </p:txBody>
+      </p:sp>
+      <p:sp>
+        <p:nvSpPr>
+          <p:cNvPr id="215" name="box215">
+            <a:extLst>
+              <a:ext uri="{FF2B5EF4-FFF2-40B4-BE49-F238E27FC236}">
+                <a16:creationId xmlns:a16="http://schemas.microsoft.com/office/drawing/2014/main" id="{E51B3FAE-5353-47F3-A6A0-5F3243A847C3}"/>
+              </a:ext>
+            </a:extLst>
+          </p:cNvPr>
+          <p:cNvSpPr>
+            <a:spLocks noGrp="1"/>
+          </p:cNvSpPr>
+          <p:nvPr/>
+        </p:nvSpPr>
+        <p:spPr>
+          <a:xfrm>
+            <a:off x="539496" y="2157984"/>
+            <a:ext cx="11119104" cy="12802"/>
+          </a:xfrm>
+          <a:prstGeom prst="rect">
+            <a:avLst/>
+          </a:prstGeom>
+          <a:solidFill>
+            <a:srgbClr val="D7E2EF"/>
+          </a:solidFill>
+          <a:ln w="0">
+            <a:noFill/>
+          </a:ln>
+        </p:spPr>
+        <p:txBody>
+          <a:bodyPr/>
+          <a:lstStyle/>
+          <a:p>
+            <a:endParaRPr/>
+          </a:p>
+        </p:txBody>
+      </p:sp>
+      <p:sp>
+        <p:nvSpPr>
+          <p:cNvPr id="216" name="box216">
+            <a:extLst>
+              <a:ext uri="{FF2B5EF4-FFF2-40B4-BE49-F238E27FC236}">
+                <a16:creationId xmlns:a16="http://schemas.microsoft.com/office/drawing/2014/main" id="{722DF90C-57EE-4E7E-A5D1-F125D09C5BA1}"/>
+              </a:ext>
+            </a:extLst>
+          </p:cNvPr>
+          <p:cNvSpPr>
+            <a:spLocks noGrp="1"/>
+          </p:cNvSpPr>
+          <p:nvPr/>
+        </p:nvSpPr>
+        <p:spPr>
+          <a:xfrm>
+            <a:off x="475488" y="3438144"/>
+            <a:ext cx="11247120" cy="1060704"/>
+          </a:xfrm>
+          <a:prstGeom prst="roundRect">
+            <a:avLst>
+              <a:gd name="adj" fmla="val 9000"/>
+            </a:avLst>
+          </a:prstGeom>
+          <a:solidFill>
+            <a:srgbClr val="DDEEFF"/>
+          </a:solidFill>
+          <a:ln w="0">
+            <a:noFill/>
+          </a:ln>
+        </p:spPr>
+        <p:txBody>
+          <a:bodyPr/>
+          <a:lstStyle/>
+          <a:p>
+            <a:endParaRPr/>
+          </a:p>
+        </p:txBody>
+      </p:sp>
+      <p:sp>
+        <p:nvSpPr>
+          <p:cNvPr id="217" name="box217">
+            <a:extLst>
+              <a:ext uri="{FF2B5EF4-FFF2-40B4-BE49-F238E27FC236}">
+                <a16:creationId xmlns:a16="http://schemas.microsoft.com/office/drawing/2014/main" id="{CE306B71-74E5-42F1-8623-D3E3C94474A1}"/>
+              </a:ext>
+            </a:extLst>
+          </p:cNvPr>
+          <p:cNvSpPr>
+            <a:spLocks noGrp="1"/>
+          </p:cNvSpPr>
+          <p:nvPr/>
+        </p:nvSpPr>
+        <p:spPr>
+          <a:xfrm>
+            <a:off x="475488" y="3438144"/>
+            <a:ext cx="45720" cy="1060704"/>
+          </a:xfrm>
+          <a:prstGeom prst="rect">
+            <a:avLst/>
+          </a:prstGeom>
+          <a:solidFill>
+            <a:srgbClr val="3D8DFF"/>
+          </a:solidFill>
+          <a:ln w="0">
+            <a:noFill/>
+          </a:ln>
+        </p:spPr>
+        <p:txBody>
+          <a:bodyPr/>
+          <a:lstStyle/>
+          <a:p>
+            <a:endParaRPr/>
+          </a:p>
+        </p:txBody>
+      </p:sp>
+      <p:sp>
+        <p:nvSpPr>
+          <p:cNvPr id="218" name="txt218">
+            <a:extLst>
+              <a:ext uri="{FF2B5EF4-FFF2-40B4-BE49-F238E27FC236}">
+                <a16:creationId xmlns:a16="http://schemas.microsoft.com/office/drawing/2014/main" id="{385C3EFB-3D82-40BA-B031-D4496C29E795}"/>
+              </a:ext>
+            </a:extLst>
+          </p:cNvPr>
+          <p:cNvSpPr>
+            <a:spLocks noGrp="1"/>
+          </p:cNvSpPr>
+          <p:nvPr/>
+        </p:nvSpPr>
+        <p:spPr>
+          <a:xfrm>
+            <a:off x="539496" y="2249424"/>
+            <a:ext cx="1764792" cy="365760"/>
+          </a:xfrm>
+          <a:prstGeom prst="rect">
+            <a:avLst/>
+          </a:prstGeom>
+          <a:noFill/>
+          <a:ln w="0">
+            <a:noFill/>
+          </a:ln>
+        </p:spPr>
+        <p:txBody>
+          <a:bodyPr lIns="0" tIns="0" rIns="0" bIns="0" anchor="t">
+            <a:normAutofit/>
+          </a:bodyPr>
+          <a:lstStyle/>
+          <a:p>
+            <a:pPr algn="l">
+              <a:buNone/>
+            </a:pPr>
+            <a:r>
+              <a:rPr sz="975" b="1" i="0">
+                <a:solidFill>
+                  <a:srgbClr val="16324F"/>
+                </a:solidFill>
+                <a:latin typeface="Arial"/>
+                <a:ea typeface="Arial"/>
+                <a:cs typeface="Arial"/>
+              </a:rPr>
+              <a:t>Mutex / synchronized</a:t>
+            </a:r>
+          </a:p>
+        </p:txBody>
+      </p:sp>
+      <p:sp>
+        <p:nvSpPr>
+          <p:cNvPr id="219" name="txt219">
+            <a:extLst>
+              <a:ext uri="{FF2B5EF4-FFF2-40B4-BE49-F238E27FC236}">
+                <a16:creationId xmlns:a16="http://schemas.microsoft.com/office/drawing/2014/main" id="{F2ACC454-A71A-42D4-AB19-EF2BDFAFC6A8}"/>
+              </a:ext>
+            </a:extLst>
+          </p:cNvPr>
+          <p:cNvSpPr>
+            <a:spLocks noGrp="1"/>
+          </p:cNvSpPr>
+          <p:nvPr/>
+        </p:nvSpPr>
+        <p:spPr>
+          <a:xfrm>
+            <a:off x="2414016" y="2267712"/>
+            <a:ext cx="1920240" cy="365760"/>
+          </a:xfrm>
+          <a:prstGeom prst="rect">
+            <a:avLst/>
+          </a:prstGeom>
+          <a:noFill/>
+          <a:ln w="0">
+            <a:noFill/>
+          </a:ln>
+        </p:spPr>
+        <p:txBody>
+          <a:bodyPr lIns="0" tIns="0" rIns="0" bIns="0" anchor="t">
+            <a:normAutofit/>
+          </a:bodyPr>
+          <a:lstStyle/>
+          <a:p>
+            <a:pPr algn="l">
+              <a:lnSpc>
+                <a:spcPct val="90000"/>
+              </a:lnSpc>
+              <a:buNone/>
+            </a:pPr>
+            <a:r>
+              <a:rPr sz="875" b="0" i="0">
+                <a:solidFill>
+                  <a:srgbClr val="59636E"/>
+                </a:solidFill>
+                <a:latin typeface="Arial"/>
+                <a:ea typeface="Arial"/>
+                <a:cs typeface="Arial"/>
+              </a:rPr>
+              <a:t>Un hilo a la vez en la región crítica</a:t>
+            </a:r>
+          </a:p>
+        </p:txBody>
+      </p:sp>
+      <p:sp>
+        <p:nvSpPr>
+          <p:cNvPr id="220" name="txt220">
+            <a:extLst>
+              <a:ext uri="{FF2B5EF4-FFF2-40B4-BE49-F238E27FC236}">
+                <a16:creationId xmlns:a16="http://schemas.microsoft.com/office/drawing/2014/main" id="{B2CF14E3-774A-4901-ACDD-AA2BF8330B58}"/>
+              </a:ext>
+            </a:extLst>
+          </p:cNvPr>
+          <p:cNvSpPr>
+            <a:spLocks noGrp="1"/>
+          </p:cNvSpPr>
+          <p:nvPr/>
+        </p:nvSpPr>
+        <p:spPr>
+          <a:xfrm>
+            <a:off x="4443984" y="2267712"/>
+            <a:ext cx="969264" cy="365760"/>
+          </a:xfrm>
+          <a:prstGeom prst="rect">
+            <a:avLst/>
+          </a:prstGeom>
+          <a:noFill/>
+          <a:ln w="0">
+            <a:noFill/>
+          </a:ln>
+        </p:spPr>
+        <p:txBody>
+          <a:bodyPr lIns="0" tIns="0" rIns="0" bIns="0" anchor="t">
+            <a:normAutofit/>
+          </a:bodyPr>
+          <a:lstStyle/>
+          <a:p>
+            <a:pPr algn="l">
+              <a:lnSpc>
+                <a:spcPct val="90000"/>
+              </a:lnSpc>
+              <a:buNone/>
+            </a:pPr>
+            <a:r>
+              <a:rPr sz="875" b="0" i="0">
+                <a:solidFill>
+                  <a:srgbClr val="59636E"/>
+                </a:solidFill>
+                <a:latin typeface="Arial"/>
+                <a:ea typeface="Arial"/>
+                <a:cs typeface="Arial"/>
+              </a:rPr>
+              <a:t>Bloqueante</a:t>
+            </a:r>
+          </a:p>
+        </p:txBody>
+      </p:sp>
+      <p:sp>
+        <p:nvSpPr>
+          <p:cNvPr id="221" name="txt221">
+            <a:extLst>
+              <a:ext uri="{FF2B5EF4-FFF2-40B4-BE49-F238E27FC236}">
+                <a16:creationId xmlns:a16="http://schemas.microsoft.com/office/drawing/2014/main" id="{D4FE0F26-BBBD-46F7-9D2F-71A1ECAD96A1}"/>
+              </a:ext>
+            </a:extLst>
+          </p:cNvPr>
+          <p:cNvSpPr>
+            <a:spLocks noGrp="1"/>
+          </p:cNvSpPr>
+          <p:nvPr/>
+        </p:nvSpPr>
+        <p:spPr>
+          <a:xfrm>
+            <a:off x="5522976" y="2267712"/>
+            <a:ext cx="1152144" cy="365760"/>
+          </a:xfrm>
+          <a:prstGeom prst="rect">
+            <a:avLst/>
+          </a:prstGeom>
+          <a:noFill/>
+          <a:ln w="0">
+            <a:noFill/>
+          </a:ln>
+        </p:spPr>
+        <p:txBody>
+          <a:bodyPr lIns="0" tIns="0" rIns="0" bIns="0" anchor="t">
+            <a:normAutofit/>
+          </a:bodyPr>
+          <a:lstStyle/>
+          <a:p>
+            <a:pPr algn="l">
+              <a:lnSpc>
+                <a:spcPct val="90000"/>
+              </a:lnSpc>
+              <a:buNone/>
+            </a:pPr>
+            <a:r>
+              <a:rPr sz="875" b="0" i="0">
+                <a:solidFill>
+                  <a:srgbClr val="59636E"/>
+                </a:solidFill>
+                <a:latin typeface="Arial"/>
+                <a:ea typeface="Arial"/>
+                <a:cs typeface="Arial"/>
+              </a:rPr>
+              <a:t>Bajo sin contención</a:t>
+            </a:r>
+          </a:p>
+        </p:txBody>
+      </p:sp>
+      <p:sp>
+        <p:nvSpPr>
+          <p:cNvPr id="222" name="txt222">
+            <a:extLst>
+              <a:ext uri="{FF2B5EF4-FFF2-40B4-BE49-F238E27FC236}">
+                <a16:creationId xmlns:a16="http://schemas.microsoft.com/office/drawing/2014/main" id="{AE599FD8-578B-495B-89CF-BA44221E3B9C}"/>
+              </a:ext>
+            </a:extLst>
+          </p:cNvPr>
+          <p:cNvSpPr>
+            <a:spLocks noGrp="1"/>
+          </p:cNvSpPr>
+          <p:nvPr/>
+        </p:nvSpPr>
+        <p:spPr>
+          <a:xfrm>
+            <a:off x="6784848" y="2267712"/>
+            <a:ext cx="2377440" cy="365760"/>
+          </a:xfrm>
+          <a:prstGeom prst="rect">
+            <a:avLst/>
+          </a:prstGeom>
+          <a:noFill/>
+          <a:ln w="0">
+            <a:noFill/>
+          </a:ln>
+        </p:spPr>
+        <p:txBody>
+          <a:bodyPr lIns="0" tIns="0" rIns="0" bIns="0" anchor="t">
+            <a:normAutofit/>
+          </a:bodyPr>
+          <a:lstStyle/>
+          <a:p>
+            <a:pPr algn="l">
+              <a:lnSpc>
+                <a:spcPct val="90000"/>
+              </a:lnSpc>
+              <a:buNone/>
+            </a:pPr>
+            <a:r>
+              <a:rPr sz="875" b="0" i="0">
+                <a:solidFill>
+                  <a:srgbClr val="59636E"/>
+                </a:solidFill>
+                <a:latin typeface="Arial"/>
+                <a:ea typeface="Arial"/>
+                <a:cs typeface="Arial"/>
+              </a:rPr>
+              <a:t>Deadlock si se anidan mal</a:t>
+            </a:r>
+          </a:p>
+        </p:txBody>
+      </p:sp>
+      <p:sp>
+        <p:nvSpPr>
+          <p:cNvPr id="223" name="txt223">
+            <a:extLst>
+              <a:ext uri="{FF2B5EF4-FFF2-40B4-BE49-F238E27FC236}">
+                <a16:creationId xmlns:a16="http://schemas.microsoft.com/office/drawing/2014/main" id="{764632A7-84A2-41AF-8FCB-BF287D437BB9}"/>
+              </a:ext>
+            </a:extLst>
+          </p:cNvPr>
+          <p:cNvSpPr>
+            <a:spLocks noGrp="1"/>
+          </p:cNvSpPr>
+          <p:nvPr/>
+        </p:nvSpPr>
+        <p:spPr>
+          <a:xfrm>
+            <a:off x="9272016" y="2267712"/>
+            <a:ext cx="2569464" cy="365760"/>
+          </a:xfrm>
+          <a:prstGeom prst="rect">
+            <a:avLst/>
+          </a:prstGeom>
+          <a:noFill/>
+          <a:ln w="0">
+            <a:noFill/>
+          </a:ln>
+        </p:spPr>
+        <p:txBody>
+          <a:bodyPr lIns="0" tIns="0" rIns="0" bIns="0" anchor="t">
+            <a:normAutofit/>
+          </a:bodyPr>
+          <a:lstStyle/>
+          <a:p>
+            <a:pPr algn="l">
+              <a:lnSpc>
+                <a:spcPct val="90000"/>
+              </a:lnSpc>
+              <a:buNone/>
+            </a:pPr>
+            <a:r>
+              <a:rPr sz="875" b="0" i="0">
+                <a:solidFill>
+                  <a:srgbClr val="59636E"/>
+                </a:solidFill>
+                <a:latin typeface="Arial"/>
+                <a:ea typeface="Arial"/>
+                <a:cs typeface="Arial"/>
+              </a:rPr>
+              <a:t>Proteger estado compartido pequeño</a:t>
+            </a:r>
+          </a:p>
+        </p:txBody>
+      </p:sp>
+      <p:sp>
+        <p:nvSpPr>
+          <p:cNvPr id="224" name="txt224">
+            <a:extLst>
+              <a:ext uri="{FF2B5EF4-FFF2-40B4-BE49-F238E27FC236}">
+                <a16:creationId xmlns:a16="http://schemas.microsoft.com/office/drawing/2014/main" id="{FE8056FF-CEC6-4F24-AC80-AF6F2EBE6A87}"/>
+              </a:ext>
+            </a:extLst>
+          </p:cNvPr>
+          <p:cNvSpPr>
+            <a:spLocks noGrp="1"/>
+          </p:cNvSpPr>
+          <p:nvPr/>
+        </p:nvSpPr>
+        <p:spPr>
+          <a:xfrm>
+            <a:off x="539496" y="2670048"/>
+            <a:ext cx="1764792" cy="365760"/>
+          </a:xfrm>
+          <a:prstGeom prst="rect">
+            <a:avLst/>
+          </a:prstGeom>
+          <a:noFill/>
+          <a:ln w="0">
+            <a:noFill/>
+          </a:ln>
+        </p:spPr>
+        <p:txBody>
+          <a:bodyPr lIns="0" tIns="0" rIns="0" bIns="0" anchor="t">
+            <a:normAutofit/>
+          </a:bodyPr>
+          <a:lstStyle/>
+          <a:p>
+            <a:pPr algn="l">
+              <a:buNone/>
+            </a:pPr>
+            <a:r>
+              <a:rPr sz="975" b="1" i="0">
+                <a:solidFill>
+                  <a:srgbClr val="16324F"/>
+                </a:solidFill>
+                <a:latin typeface="Arial"/>
+                <a:ea typeface="Arial"/>
+                <a:cs typeface="Arial"/>
+              </a:rPr>
+              <a:t>Semáforo</a:t>
+            </a:r>
+          </a:p>
+        </p:txBody>
+      </p:sp>
+      <p:sp>
+        <p:nvSpPr>
+          <p:cNvPr id="225" name="txt225">
+            <a:extLst>
+              <a:ext uri="{FF2B5EF4-FFF2-40B4-BE49-F238E27FC236}">
+                <a16:creationId xmlns:a16="http://schemas.microsoft.com/office/drawing/2014/main" id="{F0E602B3-48D7-41E9-A34B-D81A9C8046CA}"/>
+              </a:ext>
+            </a:extLst>
+          </p:cNvPr>
+          <p:cNvSpPr>
+            <a:spLocks noGrp="1"/>
+          </p:cNvSpPr>
+          <p:nvPr/>
+        </p:nvSpPr>
+        <p:spPr>
+          <a:xfrm>
+            <a:off x="2414016" y="2688336"/>
+            <a:ext cx="1920240" cy="365760"/>
+          </a:xfrm>
+          <a:prstGeom prst="rect">
+            <a:avLst/>
+          </a:prstGeom>
+          <a:noFill/>
+          <a:ln w="0">
+            <a:noFill/>
+          </a:ln>
+        </p:spPr>
+        <p:txBody>
+          <a:bodyPr lIns="0" tIns="0" rIns="0" bIns="0" anchor="t">
+            <a:normAutofit/>
+          </a:bodyPr>
+          <a:lstStyle/>
+          <a:p>
+            <a:pPr algn="l">
+              <a:lnSpc>
+                <a:spcPct val="90000"/>
+              </a:lnSpc>
+              <a:buNone/>
+            </a:pPr>
+            <a:r>
+              <a:rPr sz="875" b="0" i="0">
+                <a:solidFill>
+                  <a:srgbClr val="59636E"/>
+                </a:solidFill>
+                <a:latin typeface="Arial"/>
+                <a:ea typeface="Arial"/>
+                <a:cs typeface="Arial"/>
+              </a:rPr>
+              <a:t>Máximo N accesos simultáneos</a:t>
+            </a:r>
+          </a:p>
+        </p:txBody>
+      </p:sp>
+      <p:sp>
+        <p:nvSpPr>
+          <p:cNvPr id="226" name="txt226">
+            <a:extLst>
+              <a:ext uri="{FF2B5EF4-FFF2-40B4-BE49-F238E27FC236}">
+                <a16:creationId xmlns:a16="http://schemas.microsoft.com/office/drawing/2014/main" id="{29A5C0B1-B1A0-4194-A85F-57446FBBEC7F}"/>
+              </a:ext>
+            </a:extLst>
+          </p:cNvPr>
+          <p:cNvSpPr>
+            <a:spLocks noGrp="1"/>
+          </p:cNvSpPr>
+          <p:nvPr/>
+        </p:nvSpPr>
+        <p:spPr>
+          <a:xfrm>
+            <a:off x="4443984" y="2688336"/>
+            <a:ext cx="969264" cy="365760"/>
+          </a:xfrm>
+          <a:prstGeom prst="rect">
+            <a:avLst/>
+          </a:prstGeom>
+          <a:noFill/>
+          <a:ln w="0">
+            <a:noFill/>
+          </a:ln>
+        </p:spPr>
+        <p:txBody>
+          <a:bodyPr lIns="0" tIns="0" rIns="0" bIns="0" anchor="t">
+            <a:normAutofit/>
+          </a:bodyPr>
+          <a:lstStyle/>
+          <a:p>
+            <a:pPr algn="l">
+              <a:lnSpc>
+                <a:spcPct val="90000"/>
+              </a:lnSpc>
+              <a:buNone/>
+            </a:pPr>
+            <a:r>
+              <a:rPr sz="875" b="0" i="0">
+                <a:solidFill>
+                  <a:srgbClr val="59636E"/>
+                </a:solidFill>
+                <a:latin typeface="Arial"/>
+                <a:ea typeface="Arial"/>
+                <a:cs typeface="Arial"/>
+              </a:rPr>
+              <a:t>Bloqueante</a:t>
+            </a:r>
+          </a:p>
+        </p:txBody>
+      </p:sp>
+      <p:sp>
+        <p:nvSpPr>
+          <p:cNvPr id="227" name="txt227">
+            <a:extLst>
+              <a:ext uri="{FF2B5EF4-FFF2-40B4-BE49-F238E27FC236}">
+                <a16:creationId xmlns:a16="http://schemas.microsoft.com/office/drawing/2014/main" id="{183CAB0A-60AD-45CD-B689-357659304AC3}"/>
+              </a:ext>
+            </a:extLst>
+          </p:cNvPr>
+          <p:cNvSpPr>
+            <a:spLocks noGrp="1"/>
+          </p:cNvSpPr>
+          <p:nvPr/>
+        </p:nvSpPr>
+        <p:spPr>
+          <a:xfrm>
+            <a:off x="5522976" y="2688336"/>
+            <a:ext cx="1152144" cy="365760"/>
+          </a:xfrm>
+          <a:prstGeom prst="rect">
+            <a:avLst/>
+          </a:prstGeom>
+          <a:noFill/>
+          <a:ln w="0">
+            <a:noFill/>
+          </a:ln>
+        </p:spPr>
+        <p:txBody>
+          <a:bodyPr lIns="0" tIns="0" rIns="0" bIns="0" anchor="t">
+            <a:normAutofit/>
+          </a:bodyPr>
+          <a:lstStyle/>
+          <a:p>
+            <a:pPr algn="l">
+              <a:lnSpc>
+                <a:spcPct val="90000"/>
+              </a:lnSpc>
+              <a:buNone/>
+            </a:pPr>
+            <a:r>
+              <a:rPr sz="875" b="0" i="0">
+                <a:solidFill>
+                  <a:srgbClr val="59636E"/>
+                </a:solidFill>
+                <a:latin typeface="Arial"/>
+                <a:ea typeface="Arial"/>
+                <a:cs typeface="Arial"/>
+              </a:rPr>
+              <a:t>Bajo</a:t>
+            </a:r>
+          </a:p>
+        </p:txBody>
+      </p:sp>
+      <p:sp>
+        <p:nvSpPr>
+          <p:cNvPr id="228" name="txt228">
+            <a:extLst>
+              <a:ext uri="{FF2B5EF4-FFF2-40B4-BE49-F238E27FC236}">
+                <a16:creationId xmlns:a16="http://schemas.microsoft.com/office/drawing/2014/main" id="{7CB2A99A-C23A-4AA7-8633-6F614DB2E0A8}"/>
+              </a:ext>
+            </a:extLst>
+          </p:cNvPr>
+          <p:cNvSpPr>
+            <a:spLocks noGrp="1"/>
+          </p:cNvSpPr>
+          <p:nvPr/>
+        </p:nvSpPr>
+        <p:spPr>
+          <a:xfrm>
+            <a:off x="6784848" y="2688336"/>
+            <a:ext cx="2377440" cy="365760"/>
+          </a:xfrm>
+          <a:prstGeom prst="rect">
+            <a:avLst/>
+          </a:prstGeom>
+          <a:noFill/>
+          <a:ln w="0">
+            <a:noFill/>
+          </a:ln>
+        </p:spPr>
+        <p:txBody>
+          <a:bodyPr lIns="0" tIns="0" rIns="0" bIns="0" anchor="t">
+            <a:normAutofit/>
+          </a:bodyPr>
+          <a:lstStyle/>
+          <a:p>
+            <a:pPr algn="l">
+              <a:lnSpc>
+                <a:spcPct val="90000"/>
+              </a:lnSpc>
+              <a:buNone/>
+            </a:pPr>
+            <a:r>
+              <a:rPr sz="875" b="0" i="0">
+                <a:solidFill>
+                  <a:srgbClr val="59636E"/>
+                </a:solidFill>
+                <a:latin typeface="Arial"/>
+                <a:ea typeface="Arial"/>
+                <a:cs typeface="Arial"/>
+              </a:rPr>
+              <a:t>Permisos que no se devuelven</a:t>
+            </a:r>
+          </a:p>
+        </p:txBody>
+      </p:sp>
+      <p:sp>
+        <p:nvSpPr>
+          <p:cNvPr id="229" name="txt229">
+            <a:extLst>
+              <a:ext uri="{FF2B5EF4-FFF2-40B4-BE49-F238E27FC236}">
+                <a16:creationId xmlns:a16="http://schemas.microsoft.com/office/drawing/2014/main" id="{D4EE2A7B-8C1A-4C12-BBCA-2C62AAAFDCDB}"/>
+              </a:ext>
+            </a:extLst>
+          </p:cNvPr>
+          <p:cNvSpPr>
+            <a:spLocks noGrp="1"/>
+          </p:cNvSpPr>
+          <p:nvPr/>
+        </p:nvSpPr>
+        <p:spPr>
+          <a:xfrm>
+            <a:off x="9272016" y="2688336"/>
+            <a:ext cx="2569464" cy="365760"/>
+          </a:xfrm>
+          <a:prstGeom prst="rect">
+            <a:avLst/>
+          </a:prstGeom>
+          <a:noFill/>
+          <a:ln w="0">
+            <a:noFill/>
+          </a:ln>
+        </p:spPr>
+        <p:txBody>
+          <a:bodyPr lIns="0" tIns="0" rIns="0" bIns="0" anchor="t">
+            <a:normAutofit/>
+          </a:bodyPr>
+          <a:lstStyle/>
+          <a:p>
+            <a:pPr algn="l">
+              <a:lnSpc>
+                <a:spcPct val="90000"/>
+              </a:lnSpc>
+              <a:buNone/>
+            </a:pPr>
+            <a:r>
+              <a:rPr sz="875" b="0" i="0">
+                <a:solidFill>
+                  <a:srgbClr val="59636E"/>
+                </a:solidFill>
+                <a:latin typeface="Arial"/>
+                <a:ea typeface="Arial"/>
+                <a:cs typeface="Arial"/>
+              </a:rPr>
+              <a:t>Pools y cupos de concurrencia</a:t>
+            </a:r>
+          </a:p>
+        </p:txBody>
+      </p:sp>
+      <p:sp>
+        <p:nvSpPr>
+          <p:cNvPr id="230" name="txt230">
+            <a:extLst>
+              <a:ext uri="{FF2B5EF4-FFF2-40B4-BE49-F238E27FC236}">
+                <a16:creationId xmlns:a16="http://schemas.microsoft.com/office/drawing/2014/main" id="{8825B71F-0431-47A7-958A-C7EFD2CB5B6F}"/>
+              </a:ext>
+            </a:extLst>
+          </p:cNvPr>
+          <p:cNvSpPr>
+            <a:spLocks noGrp="1"/>
+          </p:cNvSpPr>
+          <p:nvPr/>
+        </p:nvSpPr>
+        <p:spPr>
+          <a:xfrm>
+            <a:off x="539496" y="3090672"/>
+            <a:ext cx="1764792" cy="365760"/>
+          </a:xfrm>
+          <a:prstGeom prst="rect">
+            <a:avLst/>
+          </a:prstGeom>
+          <a:noFill/>
+          <a:ln w="0">
+            <a:noFill/>
+          </a:ln>
+        </p:spPr>
+        <p:txBody>
+          <a:bodyPr lIns="0" tIns="0" rIns="0" bIns="0" anchor="t">
+            <a:normAutofit/>
+          </a:bodyPr>
+          <a:lstStyle/>
+          <a:p>
+            <a:pPr algn="l">
+              <a:buNone/>
+            </a:pPr>
+            <a:r>
+              <a:rPr sz="975" b="1" i="0">
+                <a:solidFill>
+                  <a:srgbClr val="16324F"/>
+                </a:solidFill>
+                <a:latin typeface="Arial"/>
+                <a:ea typeface="Arial"/>
+                <a:cs typeface="Arial"/>
+              </a:rPr>
+              <a:t>Monitor (wait/notify)</a:t>
+            </a:r>
+          </a:p>
+        </p:txBody>
+      </p:sp>
+      <p:sp>
+        <p:nvSpPr>
+          <p:cNvPr id="231" name="txt231">
+            <a:extLst>
+              <a:ext uri="{FF2B5EF4-FFF2-40B4-BE49-F238E27FC236}">
+                <a16:creationId xmlns:a16="http://schemas.microsoft.com/office/drawing/2014/main" id="{2C682006-CE4C-46E2-A426-68915F4E27FC}"/>
+              </a:ext>
+            </a:extLst>
+          </p:cNvPr>
+          <p:cNvSpPr>
+            <a:spLocks noGrp="1"/>
+          </p:cNvSpPr>
+          <p:nvPr/>
+        </p:nvSpPr>
+        <p:spPr>
+          <a:xfrm>
+            <a:off x="2414016" y="3108960"/>
+            <a:ext cx="1920240" cy="365760"/>
+          </a:xfrm>
+          <a:prstGeom prst="rect">
+            <a:avLst/>
+          </a:prstGeom>
+          <a:noFill/>
+          <a:ln w="0">
+            <a:noFill/>
+          </a:ln>
+        </p:spPr>
+        <p:txBody>
+          <a:bodyPr lIns="0" tIns="0" rIns="0" bIns="0" anchor="t">
+            <a:normAutofit/>
+          </a:bodyPr>
+          <a:lstStyle/>
+          <a:p>
+            <a:pPr algn="l">
+              <a:lnSpc>
+                <a:spcPct val="90000"/>
+              </a:lnSpc>
+              <a:buNone/>
+            </a:pPr>
+            <a:r>
+              <a:rPr sz="875" b="0" i="0">
+                <a:solidFill>
+                  <a:srgbClr val="59636E"/>
+                </a:solidFill>
+                <a:latin typeface="Arial"/>
+                <a:ea typeface="Arial"/>
+                <a:cs typeface="Arial"/>
+              </a:rPr>
+              <a:t>Exclusión + espera por condición</a:t>
+            </a:r>
+          </a:p>
+        </p:txBody>
+      </p:sp>
+      <p:sp>
+        <p:nvSpPr>
+          <p:cNvPr id="232" name="txt232">
+            <a:extLst>
+              <a:ext uri="{FF2B5EF4-FFF2-40B4-BE49-F238E27FC236}">
+                <a16:creationId xmlns:a16="http://schemas.microsoft.com/office/drawing/2014/main" id="{C2CA283F-1C1D-432B-AFF1-7C25670F03BE}"/>
+              </a:ext>
+            </a:extLst>
+          </p:cNvPr>
+          <p:cNvSpPr>
+            <a:spLocks noGrp="1"/>
+          </p:cNvSpPr>
+          <p:nvPr/>
+        </p:nvSpPr>
+        <p:spPr>
+          <a:xfrm>
+            <a:off x="4443984" y="3108960"/>
+            <a:ext cx="969264" cy="365760"/>
+          </a:xfrm>
+          <a:prstGeom prst="rect">
+            <a:avLst/>
+          </a:prstGeom>
+          <a:noFill/>
+          <a:ln w="0">
+            <a:noFill/>
+          </a:ln>
+        </p:spPr>
+        <p:txBody>
+          <a:bodyPr lIns="0" tIns="0" rIns="0" bIns="0" anchor="t">
+            <a:normAutofit/>
+          </a:bodyPr>
+          <a:lstStyle/>
+          <a:p>
+            <a:pPr algn="l">
+              <a:lnSpc>
+                <a:spcPct val="90000"/>
+              </a:lnSpc>
+              <a:buNone/>
+            </a:pPr>
+            <a:r>
+              <a:rPr sz="875" b="0" i="0">
+                <a:solidFill>
+                  <a:srgbClr val="59636E"/>
+                </a:solidFill>
+                <a:latin typeface="Arial"/>
+                <a:ea typeface="Arial"/>
+                <a:cs typeface="Arial"/>
+              </a:rPr>
+              <a:t>Bloqueante</a:t>
+            </a:r>
+          </a:p>
+        </p:txBody>
+      </p:sp>
+      <p:sp>
+        <p:nvSpPr>
+          <p:cNvPr id="233" name="txt233">
+            <a:extLst>
+              <a:ext uri="{FF2B5EF4-FFF2-40B4-BE49-F238E27FC236}">
+                <a16:creationId xmlns:a16="http://schemas.microsoft.com/office/drawing/2014/main" id="{EAC8F389-9F2D-4473-A88F-E735281931B9}"/>
+              </a:ext>
+            </a:extLst>
+          </p:cNvPr>
+          <p:cNvSpPr>
+            <a:spLocks noGrp="1"/>
+          </p:cNvSpPr>
+          <p:nvPr/>
+        </p:nvSpPr>
+        <p:spPr>
+          <a:xfrm>
+            <a:off x="5522976" y="3108960"/>
+            <a:ext cx="1152144" cy="365760"/>
+          </a:xfrm>
+          <a:prstGeom prst="rect">
+            <a:avLst/>
+          </a:prstGeom>
+          <a:noFill/>
+          <a:ln w="0">
+            <a:noFill/>
+          </a:ln>
+        </p:spPr>
+        <p:txBody>
+          <a:bodyPr lIns="0" tIns="0" rIns="0" bIns="0" anchor="t">
+            <a:normAutofit/>
+          </a:bodyPr>
+          <a:lstStyle/>
+          <a:p>
+            <a:pPr algn="l">
+              <a:lnSpc>
+                <a:spcPct val="90000"/>
+              </a:lnSpc>
+              <a:buNone/>
+            </a:pPr>
+            <a:r>
+              <a:rPr sz="875" b="0" i="0">
+                <a:solidFill>
+                  <a:srgbClr val="59636E"/>
+                </a:solidFill>
+                <a:latin typeface="Arial"/>
+                <a:ea typeface="Arial"/>
+                <a:cs typeface="Arial"/>
+              </a:rPr>
+              <a:t>Medio</a:t>
+            </a:r>
+          </a:p>
+        </p:txBody>
+      </p:sp>
+      <p:sp>
+        <p:nvSpPr>
+          <p:cNvPr id="234" name="txt234">
+            <a:extLst>
+              <a:ext uri="{FF2B5EF4-FFF2-40B4-BE49-F238E27FC236}">
+                <a16:creationId xmlns:a16="http://schemas.microsoft.com/office/drawing/2014/main" id="{E4CAEE64-3AAE-45FC-BC0F-C4F50F00FE59}"/>
+              </a:ext>
+            </a:extLst>
+          </p:cNvPr>
+          <p:cNvSpPr>
+            <a:spLocks noGrp="1"/>
+          </p:cNvSpPr>
+          <p:nvPr/>
+        </p:nvSpPr>
+        <p:spPr>
+          <a:xfrm>
+            <a:off x="6784848" y="3108960"/>
+            <a:ext cx="2377440" cy="365760"/>
+          </a:xfrm>
+          <a:prstGeom prst="rect">
+            <a:avLst/>
+          </a:prstGeom>
+          <a:noFill/>
+          <a:ln w="0">
+            <a:noFill/>
+          </a:ln>
+        </p:spPr>
+        <p:txBody>
+          <a:bodyPr lIns="0" tIns="0" rIns="0" bIns="0" anchor="t">
+            <a:normAutofit/>
+          </a:bodyPr>
+          <a:lstStyle/>
+          <a:p>
+            <a:pPr algn="l">
+              <a:lnSpc>
+                <a:spcPct val="90000"/>
+              </a:lnSpc>
+              <a:buNone/>
+            </a:pPr>
+            <a:r>
+              <a:rPr sz="875" b="0" i="0">
+                <a:solidFill>
+                  <a:srgbClr val="59636E"/>
+                </a:solidFill>
+                <a:latin typeface="Arial"/>
+                <a:ea typeface="Arial"/>
+                <a:cs typeface="Arial"/>
+              </a:rPr>
+              <a:t>Señal perdida, despertar espurio</a:t>
+            </a:r>
+          </a:p>
+        </p:txBody>
+      </p:sp>
+      <p:sp>
+        <p:nvSpPr>
+          <p:cNvPr id="235" name="txt235">
+            <a:extLst>
+              <a:ext uri="{FF2B5EF4-FFF2-40B4-BE49-F238E27FC236}">
+                <a16:creationId xmlns:a16="http://schemas.microsoft.com/office/drawing/2014/main" id="{A032A406-9E94-4AF4-959D-29A9F3537ADF}"/>
+              </a:ext>
+            </a:extLst>
+          </p:cNvPr>
+          <p:cNvSpPr>
+            <a:spLocks noGrp="1"/>
+          </p:cNvSpPr>
+          <p:nvPr/>
+        </p:nvSpPr>
+        <p:spPr>
+          <a:xfrm>
+            <a:off x="9272016" y="3108960"/>
+            <a:ext cx="2569464" cy="365760"/>
+          </a:xfrm>
+          <a:prstGeom prst="rect">
+            <a:avLst/>
+          </a:prstGeom>
+          <a:noFill/>
+          <a:ln w="0">
+            <a:noFill/>
+          </a:ln>
+        </p:spPr>
+        <p:txBody>
+          <a:bodyPr lIns="0" tIns="0" rIns="0" bIns="0" anchor="t">
+            <a:normAutofit/>
+          </a:bodyPr>
+          <a:lstStyle/>
+          <a:p>
+            <a:pPr algn="l">
+              <a:lnSpc>
+                <a:spcPct val="90000"/>
+              </a:lnSpc>
+              <a:buNone/>
+            </a:pPr>
+            <a:r>
+              <a:rPr sz="875" b="0" i="0">
+                <a:solidFill>
+                  <a:srgbClr val="59636E"/>
+                </a:solidFill>
+                <a:latin typeface="Arial"/>
+                <a:ea typeface="Arial"/>
+                <a:cs typeface="Arial"/>
+              </a:rPr>
+              <a:t>Esperar a que cambie una condición</a:t>
+            </a:r>
+          </a:p>
+        </p:txBody>
+      </p:sp>
+      <p:sp>
+        <p:nvSpPr>
+          <p:cNvPr id="236" name="txt236">
+            <a:extLst>
+              <a:ext uri="{FF2B5EF4-FFF2-40B4-BE49-F238E27FC236}">
+                <a16:creationId xmlns:a16="http://schemas.microsoft.com/office/drawing/2014/main" id="{D6C6D9B8-0208-4E3A-A599-94FA347C263F}"/>
+              </a:ext>
+            </a:extLst>
+          </p:cNvPr>
+          <p:cNvSpPr>
+            <a:spLocks noGrp="1"/>
+          </p:cNvSpPr>
+          <p:nvPr/>
+        </p:nvSpPr>
+        <p:spPr>
+          <a:xfrm>
+            <a:off x="539496" y="3511296"/>
+            <a:ext cx="1764792" cy="365760"/>
+          </a:xfrm>
+          <a:prstGeom prst="rect">
+            <a:avLst/>
+          </a:prstGeom>
+          <a:noFill/>
+          <a:ln w="0">
+            <a:noFill/>
+          </a:ln>
+        </p:spPr>
+        <p:txBody>
+          <a:bodyPr lIns="0" tIns="0" rIns="0" bIns="0" anchor="t">
+            <a:normAutofit/>
+          </a:bodyPr>
+          <a:lstStyle/>
+          <a:p>
+            <a:pPr algn="l">
+              <a:buNone/>
+            </a:pPr>
+            <a:r>
+              <a:rPr sz="975" b="1" i="0">
+                <a:solidFill>
+                  <a:srgbClr val="3D8DFF"/>
+                </a:solidFill>
+                <a:latin typeface="Arial"/>
+                <a:ea typeface="Arial"/>
+                <a:cs typeface="Arial"/>
+              </a:rPr>
+              <a:t>BlockingQueue</a:t>
+            </a:r>
+          </a:p>
+        </p:txBody>
+      </p:sp>
+      <p:sp>
+        <p:nvSpPr>
+          <p:cNvPr id="237" name="txt237">
+            <a:extLst>
+              <a:ext uri="{FF2B5EF4-FFF2-40B4-BE49-F238E27FC236}">
+                <a16:creationId xmlns:a16="http://schemas.microsoft.com/office/drawing/2014/main" id="{23CD9965-2EA1-44EB-AE72-BFA9804F10A6}"/>
+              </a:ext>
+            </a:extLst>
+          </p:cNvPr>
+          <p:cNvSpPr>
+            <a:spLocks noGrp="1"/>
+          </p:cNvSpPr>
+          <p:nvPr/>
+        </p:nvSpPr>
+        <p:spPr>
+          <a:xfrm>
+            <a:off x="2414016" y="3529584"/>
+            <a:ext cx="1920240" cy="365760"/>
+          </a:xfrm>
+          <a:prstGeom prst="rect">
+            <a:avLst/>
+          </a:prstGeom>
+          <a:noFill/>
+          <a:ln w="0">
+            <a:noFill/>
+          </a:ln>
+        </p:spPr>
+        <p:txBody>
+          <a:bodyPr lIns="0" tIns="0" rIns="0" bIns="0" anchor="t">
+            <a:normAutofit/>
+          </a:bodyPr>
+          <a:lstStyle/>
+          <a:p>
+            <a:pPr algn="l">
+              <a:lnSpc>
+                <a:spcPct val="90000"/>
+              </a:lnSpc>
+              <a:buNone/>
+            </a:pPr>
+            <a:r>
+              <a:rPr sz="875" b="0" i="0">
+                <a:solidFill>
+                  <a:srgbClr val="59636E"/>
+                </a:solidFill>
+                <a:latin typeface="Arial"/>
+                <a:ea typeface="Arial"/>
+                <a:cs typeface="Arial"/>
+              </a:rPr>
+              <a:t>Transferencia segura entre hilos</a:t>
+            </a:r>
+          </a:p>
+        </p:txBody>
+      </p:sp>
+      <p:sp>
+        <p:nvSpPr>
+          <p:cNvPr id="238" name="txt238">
+            <a:extLst>
+              <a:ext uri="{FF2B5EF4-FFF2-40B4-BE49-F238E27FC236}">
+                <a16:creationId xmlns:a16="http://schemas.microsoft.com/office/drawing/2014/main" id="{F2305C51-D4E4-4804-B37A-20FF69B655B3}"/>
+              </a:ext>
+            </a:extLst>
+          </p:cNvPr>
+          <p:cNvSpPr>
+            <a:spLocks noGrp="1"/>
+          </p:cNvSpPr>
+          <p:nvPr/>
+        </p:nvSpPr>
+        <p:spPr>
+          <a:xfrm>
+            <a:off x="4443984" y="3529584"/>
+            <a:ext cx="969264" cy="365760"/>
+          </a:xfrm>
+          <a:prstGeom prst="rect">
+            <a:avLst/>
+          </a:prstGeom>
+          <a:noFill/>
+          <a:ln w="0">
+            <a:noFill/>
+          </a:ln>
+        </p:spPr>
+        <p:txBody>
+          <a:bodyPr lIns="0" tIns="0" rIns="0" bIns="0" anchor="t">
+            <a:normAutofit/>
+          </a:bodyPr>
+          <a:lstStyle/>
+          <a:p>
+            <a:pPr algn="l">
+              <a:lnSpc>
+                <a:spcPct val="90000"/>
+              </a:lnSpc>
+              <a:buNone/>
+            </a:pPr>
+            <a:r>
+              <a:rPr sz="875" b="0" i="0">
+                <a:solidFill>
+                  <a:srgbClr val="59636E"/>
+                </a:solidFill>
+                <a:latin typeface="Arial"/>
+                <a:ea typeface="Arial"/>
+                <a:cs typeface="Arial"/>
+              </a:rPr>
+              <a:t>Bloqueante</a:t>
+            </a:r>
+          </a:p>
+        </p:txBody>
+      </p:sp>
+      <p:sp>
+        <p:nvSpPr>
+          <p:cNvPr id="239" name="txt239">
+            <a:extLst>
+              <a:ext uri="{FF2B5EF4-FFF2-40B4-BE49-F238E27FC236}">
+                <a16:creationId xmlns:a16="http://schemas.microsoft.com/office/drawing/2014/main" id="{7DEBBDD6-23F1-4FCC-8714-0303E07C882E}"/>
+              </a:ext>
+            </a:extLst>
+          </p:cNvPr>
+          <p:cNvSpPr>
+            <a:spLocks noGrp="1"/>
+          </p:cNvSpPr>
+          <p:nvPr/>
+        </p:nvSpPr>
+        <p:spPr>
+          <a:xfrm>
+            <a:off x="5522976" y="3529584"/>
+            <a:ext cx="1152144" cy="365760"/>
+          </a:xfrm>
+          <a:prstGeom prst="rect">
+            <a:avLst/>
+          </a:prstGeom>
+          <a:noFill/>
+          <a:ln w="0">
+            <a:noFill/>
+          </a:ln>
+        </p:spPr>
+        <p:txBody>
+          <a:bodyPr lIns="0" tIns="0" rIns="0" bIns="0" anchor="t">
+            <a:normAutofit/>
+          </a:bodyPr>
+          <a:lstStyle/>
+          <a:p>
+            <a:pPr algn="l">
+              <a:lnSpc>
+                <a:spcPct val="90000"/>
+              </a:lnSpc>
+              <a:buNone/>
+            </a:pPr>
+            <a:r>
+              <a:rPr sz="875" b="0" i="0">
+                <a:solidFill>
+                  <a:srgbClr val="59636E"/>
+                </a:solidFill>
+                <a:latin typeface="Arial"/>
+                <a:ea typeface="Arial"/>
+                <a:cs typeface="Arial"/>
+              </a:rPr>
+              <a:t>Bajo, ya encapsulado</a:t>
+            </a:r>
+          </a:p>
+        </p:txBody>
+      </p:sp>
+      <p:sp>
+        <p:nvSpPr>
+          <p:cNvPr id="240" name="txt240">
+            <a:extLst>
+              <a:ext uri="{FF2B5EF4-FFF2-40B4-BE49-F238E27FC236}">
+                <a16:creationId xmlns:a16="http://schemas.microsoft.com/office/drawing/2014/main" id="{3D3BB6F8-214E-418B-96C3-AC29E2DD1D28}"/>
+              </a:ext>
+            </a:extLst>
+          </p:cNvPr>
+          <p:cNvSpPr>
+            <a:spLocks noGrp="1"/>
+          </p:cNvSpPr>
+          <p:nvPr/>
+        </p:nvSpPr>
+        <p:spPr>
+          <a:xfrm>
+            <a:off x="6784848" y="3529584"/>
+            <a:ext cx="2377440" cy="365760"/>
+          </a:xfrm>
+          <a:prstGeom prst="rect">
+            <a:avLst/>
+          </a:prstGeom>
+          <a:noFill/>
+          <a:ln w="0">
+            <a:noFill/>
+          </a:ln>
+        </p:spPr>
+        <p:txBody>
+          <a:bodyPr lIns="0" tIns="0" rIns="0" bIns="0" anchor="t">
+            <a:normAutofit/>
+          </a:bodyPr>
+          <a:lstStyle/>
+          <a:p>
+            <a:pPr algn="l">
+              <a:lnSpc>
+                <a:spcPct val="90000"/>
+              </a:lnSpc>
+              <a:buNone/>
+            </a:pPr>
+            <a:r>
+              <a:rPr sz="875" b="0" i="0">
+                <a:solidFill>
+                  <a:srgbClr val="59636E"/>
+                </a:solidFill>
+                <a:latin typeface="Arial"/>
+                <a:ea typeface="Arial"/>
+                <a:cs typeface="Arial"/>
+              </a:rPr>
+              <a:t>Memoria si no se acota</a:t>
+            </a:r>
+          </a:p>
+        </p:txBody>
+      </p:sp>
+      <p:sp>
+        <p:nvSpPr>
+          <p:cNvPr id="241" name="txt241">
+            <a:extLst>
+              <a:ext uri="{FF2B5EF4-FFF2-40B4-BE49-F238E27FC236}">
+                <a16:creationId xmlns:a16="http://schemas.microsoft.com/office/drawing/2014/main" id="{39836685-B36F-4E68-A9C4-7EA80CB2794F}"/>
+              </a:ext>
+            </a:extLst>
+          </p:cNvPr>
+          <p:cNvSpPr>
+            <a:spLocks noGrp="1"/>
+          </p:cNvSpPr>
+          <p:nvPr/>
+        </p:nvSpPr>
+        <p:spPr>
+          <a:xfrm>
+            <a:off x="9272016" y="3529584"/>
+            <a:ext cx="2569464" cy="365760"/>
+          </a:xfrm>
+          <a:prstGeom prst="rect">
+            <a:avLst/>
+          </a:prstGeom>
+          <a:noFill/>
+          <a:ln w="0">
+            <a:noFill/>
+          </a:ln>
+        </p:spPr>
+        <p:txBody>
+          <a:bodyPr lIns="0" tIns="0" rIns="0" bIns="0" anchor="t">
+            <a:normAutofit/>
+          </a:bodyPr>
+          <a:lstStyle/>
+          <a:p>
+            <a:pPr algn="l">
+              <a:lnSpc>
+                <a:spcPct val="90000"/>
+              </a:lnSpc>
+              <a:buNone/>
+            </a:pPr>
+            <a:r>
+              <a:rPr sz="875" b="0" i="0">
+                <a:solidFill>
+                  <a:srgbClr val="59636E"/>
+                </a:solidFill>
+                <a:latin typeface="Arial"/>
+                <a:ea typeface="Arial"/>
+                <a:cs typeface="Arial"/>
+              </a:rPr>
+              <a:t>Desacoplar productor de consumidores</a:t>
+            </a:r>
+          </a:p>
+        </p:txBody>
+      </p:sp>
+      <p:sp>
+        <p:nvSpPr>
+          <p:cNvPr id="242" name="txt242">
+            <a:extLst>
+              <a:ext uri="{FF2B5EF4-FFF2-40B4-BE49-F238E27FC236}">
+                <a16:creationId xmlns:a16="http://schemas.microsoft.com/office/drawing/2014/main" id="{C3509F0F-0E35-4068-B0C7-A778D72276AD}"/>
+              </a:ext>
+            </a:extLst>
+          </p:cNvPr>
+          <p:cNvSpPr>
+            <a:spLocks noGrp="1"/>
+          </p:cNvSpPr>
+          <p:nvPr/>
+        </p:nvSpPr>
+        <p:spPr>
+          <a:xfrm>
+            <a:off x="539496" y="3931920"/>
+            <a:ext cx="1764792" cy="365760"/>
+          </a:xfrm>
+          <a:prstGeom prst="rect">
+            <a:avLst/>
+          </a:prstGeom>
+          <a:noFill/>
+          <a:ln w="0">
+            <a:noFill/>
+          </a:ln>
+        </p:spPr>
+        <p:txBody>
+          <a:bodyPr lIns="0" tIns="0" rIns="0" bIns="0" anchor="t">
+            <a:normAutofit/>
+          </a:bodyPr>
+          <a:lstStyle/>
+          <a:p>
+            <a:pPr algn="l">
+              <a:buNone/>
+            </a:pPr>
+            <a:r>
+              <a:rPr sz="975" b="1" i="0">
+                <a:solidFill>
+                  <a:srgbClr val="3D8DFF"/>
+                </a:solidFill>
+                <a:latin typeface="Arial"/>
+                <a:ea typeface="Arial"/>
+                <a:cs typeface="Arial"/>
+              </a:rPr>
+              <a:t>CAS / Atomic</a:t>
+            </a:r>
+          </a:p>
+        </p:txBody>
+      </p:sp>
+      <p:sp>
+        <p:nvSpPr>
+          <p:cNvPr id="243" name="txt243">
+            <a:extLst>
+              <a:ext uri="{FF2B5EF4-FFF2-40B4-BE49-F238E27FC236}">
+                <a16:creationId xmlns:a16="http://schemas.microsoft.com/office/drawing/2014/main" id="{99D8F579-BF04-4AC3-A6AE-DB650B36E939}"/>
+              </a:ext>
+            </a:extLst>
+          </p:cNvPr>
+          <p:cNvSpPr>
+            <a:spLocks noGrp="1"/>
+          </p:cNvSpPr>
+          <p:nvPr/>
+        </p:nvSpPr>
+        <p:spPr>
+          <a:xfrm>
+            <a:off x="2414016" y="3950208"/>
+            <a:ext cx="1920240" cy="365760"/>
+          </a:xfrm>
+          <a:prstGeom prst="rect">
+            <a:avLst/>
+          </a:prstGeom>
+          <a:noFill/>
+          <a:ln w="0">
+            <a:noFill/>
+          </a:ln>
+        </p:spPr>
+        <p:txBody>
+          <a:bodyPr lIns="0" tIns="0" rIns="0" bIns="0" anchor="t">
+            <a:normAutofit/>
+          </a:bodyPr>
+          <a:lstStyle/>
+          <a:p>
+            <a:pPr algn="l">
+              <a:lnSpc>
+                <a:spcPct val="90000"/>
+              </a:lnSpc>
+              <a:buNone/>
+            </a:pPr>
+            <a:r>
+              <a:rPr sz="875" b="0" i="0">
+                <a:solidFill>
+                  <a:srgbClr val="59636E"/>
+                </a:solidFill>
+                <a:latin typeface="Arial"/>
+                <a:ea typeface="Arial"/>
+                <a:cs typeface="Arial"/>
+              </a:rPr>
+              <a:t>Actualización indivisible sin lock</a:t>
+            </a:r>
+          </a:p>
+        </p:txBody>
+      </p:sp>
+      <p:sp>
+        <p:nvSpPr>
+          <p:cNvPr id="244" name="txt244">
+            <a:extLst>
+              <a:ext uri="{FF2B5EF4-FFF2-40B4-BE49-F238E27FC236}">
+                <a16:creationId xmlns:a16="http://schemas.microsoft.com/office/drawing/2014/main" id="{216F180C-1096-4B37-9B46-77A366BB662A}"/>
+              </a:ext>
+            </a:extLst>
+          </p:cNvPr>
+          <p:cNvSpPr>
+            <a:spLocks noGrp="1"/>
+          </p:cNvSpPr>
+          <p:nvPr/>
+        </p:nvSpPr>
+        <p:spPr>
+          <a:xfrm>
+            <a:off x="4443984" y="3950208"/>
+            <a:ext cx="969264" cy="365760"/>
+          </a:xfrm>
+          <a:prstGeom prst="rect">
+            <a:avLst/>
+          </a:prstGeom>
+          <a:noFill/>
+          <a:ln w="0">
+            <a:noFill/>
+          </a:ln>
+        </p:spPr>
+        <p:txBody>
+          <a:bodyPr lIns="0" tIns="0" rIns="0" bIns="0" anchor="t">
+            <a:normAutofit/>
+          </a:bodyPr>
+          <a:lstStyle/>
+          <a:p>
+            <a:pPr algn="l">
+              <a:lnSpc>
+                <a:spcPct val="90000"/>
+              </a:lnSpc>
+              <a:buNone/>
+            </a:pPr>
+            <a:r>
+              <a:rPr sz="875" b="0" i="0" dirty="0">
+                <a:solidFill>
+                  <a:srgbClr val="2E9D72"/>
+                </a:solidFill>
+                <a:latin typeface="Arial"/>
+                <a:ea typeface="Arial"/>
+                <a:cs typeface="Arial"/>
+              </a:rPr>
+              <a:t>No </a:t>
+            </a:r>
+            <a:r>
+              <a:rPr sz="875" b="0" i="0" dirty="0" err="1">
+                <a:solidFill>
+                  <a:srgbClr val="2E9D72"/>
+                </a:solidFill>
+                <a:latin typeface="Arial"/>
+                <a:ea typeface="Arial"/>
+                <a:cs typeface="Arial"/>
+              </a:rPr>
+              <a:t>bloqueante</a:t>
+            </a:r>
+            <a:endParaRPr sz="875" b="0" i="0" dirty="0">
+              <a:solidFill>
+                <a:srgbClr val="2E9D72"/>
+              </a:solidFill>
+              <a:latin typeface="Arial"/>
+              <a:ea typeface="Arial"/>
+              <a:cs typeface="Arial"/>
+            </a:endParaRPr>
+          </a:p>
+        </p:txBody>
+      </p:sp>
+      <p:sp>
+        <p:nvSpPr>
+          <p:cNvPr id="245" name="txt245">
+            <a:extLst>
+              <a:ext uri="{FF2B5EF4-FFF2-40B4-BE49-F238E27FC236}">
+                <a16:creationId xmlns:a16="http://schemas.microsoft.com/office/drawing/2014/main" id="{0CBB91C0-9504-46FD-B1FC-C204B683D2B4}"/>
+              </a:ext>
+            </a:extLst>
+          </p:cNvPr>
+          <p:cNvSpPr>
+            <a:spLocks noGrp="1"/>
+          </p:cNvSpPr>
+          <p:nvPr/>
+        </p:nvSpPr>
+        <p:spPr>
+          <a:xfrm>
+            <a:off x="5522976" y="3950208"/>
+            <a:ext cx="1152144" cy="365760"/>
+          </a:xfrm>
+          <a:prstGeom prst="rect">
+            <a:avLst/>
+          </a:prstGeom>
+          <a:noFill/>
+          <a:ln w="0">
+            <a:noFill/>
+          </a:ln>
+        </p:spPr>
+        <p:txBody>
+          <a:bodyPr lIns="0" tIns="0" rIns="0" bIns="0" anchor="t">
+            <a:normAutofit/>
+          </a:bodyPr>
+          <a:lstStyle/>
+          <a:p>
+            <a:pPr algn="l">
+              <a:lnSpc>
+                <a:spcPct val="90000"/>
+              </a:lnSpc>
+              <a:buNone/>
+            </a:pPr>
+            <a:r>
+              <a:rPr sz="875" b="0" i="0">
+                <a:solidFill>
+                  <a:srgbClr val="59636E"/>
+                </a:solidFill>
+                <a:latin typeface="Arial"/>
+                <a:ea typeface="Arial"/>
+                <a:cs typeface="Arial"/>
+              </a:rPr>
+              <a:t>Muy bajo</a:t>
+            </a:r>
+          </a:p>
+        </p:txBody>
+      </p:sp>
+      <p:sp>
+        <p:nvSpPr>
+          <p:cNvPr id="246" name="txt246">
+            <a:extLst>
+              <a:ext uri="{FF2B5EF4-FFF2-40B4-BE49-F238E27FC236}">
+                <a16:creationId xmlns:a16="http://schemas.microsoft.com/office/drawing/2014/main" id="{EDB4374F-71AE-4171-BE3D-5711B6E19FD8}"/>
+              </a:ext>
+            </a:extLst>
+          </p:cNvPr>
+          <p:cNvSpPr>
+            <a:spLocks noGrp="1"/>
+          </p:cNvSpPr>
+          <p:nvPr/>
+        </p:nvSpPr>
+        <p:spPr>
+          <a:xfrm>
+            <a:off x="6784848" y="3950208"/>
+            <a:ext cx="2377440" cy="365760"/>
+          </a:xfrm>
+          <a:prstGeom prst="rect">
+            <a:avLst/>
+          </a:prstGeom>
+          <a:noFill/>
+          <a:ln w="0">
+            <a:noFill/>
+          </a:ln>
+        </p:spPr>
+        <p:txBody>
+          <a:bodyPr lIns="0" tIns="0" rIns="0" bIns="0" anchor="t">
+            <a:normAutofit/>
+          </a:bodyPr>
+          <a:lstStyle/>
+          <a:p>
+            <a:pPr algn="l">
+              <a:lnSpc>
+                <a:spcPct val="90000"/>
+              </a:lnSpc>
+              <a:buNone/>
+            </a:pPr>
+            <a:r>
+              <a:rPr sz="875" b="0" i="0">
+                <a:solidFill>
+                  <a:srgbClr val="59636E"/>
+                </a:solidFill>
+                <a:latin typeface="Arial"/>
+                <a:ea typeface="Arial"/>
+                <a:cs typeface="Arial"/>
+              </a:rPr>
+              <a:t>Espera activa con mucha contención</a:t>
+            </a:r>
+          </a:p>
+        </p:txBody>
+      </p:sp>
+      <p:sp>
+        <p:nvSpPr>
+          <p:cNvPr id="247" name="txt247">
+            <a:extLst>
+              <a:ext uri="{FF2B5EF4-FFF2-40B4-BE49-F238E27FC236}">
+                <a16:creationId xmlns:a16="http://schemas.microsoft.com/office/drawing/2014/main" id="{1EB255ED-4F3C-4A90-9501-E80CD16B05C7}"/>
+              </a:ext>
+            </a:extLst>
+          </p:cNvPr>
+          <p:cNvSpPr>
+            <a:spLocks noGrp="1"/>
+          </p:cNvSpPr>
+          <p:nvPr/>
+        </p:nvSpPr>
+        <p:spPr>
+          <a:xfrm>
+            <a:off x="9272016" y="3950208"/>
+            <a:ext cx="2569464" cy="365760"/>
+          </a:xfrm>
+          <a:prstGeom prst="rect">
+            <a:avLst/>
+          </a:prstGeom>
+          <a:noFill/>
+          <a:ln w="0">
+            <a:noFill/>
+          </a:ln>
+        </p:spPr>
+        <p:txBody>
+          <a:bodyPr lIns="0" tIns="0" rIns="0" bIns="0" anchor="t">
+            <a:normAutofit/>
+          </a:bodyPr>
+          <a:lstStyle/>
+          <a:p>
+            <a:pPr algn="l">
+              <a:lnSpc>
+                <a:spcPct val="90000"/>
+              </a:lnSpc>
+              <a:buNone/>
+            </a:pPr>
+            <a:r>
+              <a:rPr sz="875" b="0" i="0">
+                <a:solidFill>
+                  <a:srgbClr val="59636E"/>
+                </a:solidFill>
+                <a:latin typeface="Arial"/>
+                <a:ea typeface="Arial"/>
+                <a:cs typeface="Arial"/>
+              </a:rPr>
+              <a:t>Banderas y contadores</a:t>
+            </a:r>
+          </a:p>
+        </p:txBody>
+      </p:sp>
+      <p:sp>
+        <p:nvSpPr>
+          <p:cNvPr id="248" name="txt248">
+            <a:extLst>
+              <a:ext uri="{FF2B5EF4-FFF2-40B4-BE49-F238E27FC236}">
+                <a16:creationId xmlns:a16="http://schemas.microsoft.com/office/drawing/2014/main" id="{7785A0AD-FD1A-4049-8A4A-08796FC1417D}"/>
+              </a:ext>
+            </a:extLst>
+          </p:cNvPr>
+          <p:cNvSpPr>
+            <a:spLocks noGrp="1"/>
+          </p:cNvSpPr>
+          <p:nvPr/>
+        </p:nvSpPr>
+        <p:spPr>
+          <a:xfrm>
+            <a:off x="539496" y="4617720"/>
+            <a:ext cx="1764792" cy="365760"/>
+          </a:xfrm>
+          <a:prstGeom prst="rect">
+            <a:avLst/>
+          </a:prstGeom>
+          <a:noFill/>
+          <a:ln w="0">
+            <a:noFill/>
+          </a:ln>
+        </p:spPr>
+        <p:txBody>
+          <a:bodyPr lIns="0" tIns="0" rIns="0" bIns="0" anchor="t">
+            <a:normAutofit/>
+          </a:bodyPr>
+          <a:lstStyle/>
+          <a:p>
+            <a:pPr algn="l">
+              <a:buNone/>
+            </a:pPr>
+            <a:r>
+              <a:rPr sz="975" b="1" i="0">
+                <a:solidFill>
+                  <a:srgbClr val="16324F"/>
+                </a:solidFill>
+                <a:latin typeface="Arial"/>
+                <a:ea typeface="Arial"/>
+                <a:cs typeface="Arial"/>
+              </a:rPr>
+              <a:t>Barrera / Latch</a:t>
+            </a:r>
+          </a:p>
+        </p:txBody>
+      </p:sp>
+      <p:sp>
+        <p:nvSpPr>
+          <p:cNvPr id="249" name="txt249">
+            <a:extLst>
+              <a:ext uri="{FF2B5EF4-FFF2-40B4-BE49-F238E27FC236}">
+                <a16:creationId xmlns:a16="http://schemas.microsoft.com/office/drawing/2014/main" id="{44865682-0E3F-4755-992C-83FA8A25ADE2}"/>
+              </a:ext>
+            </a:extLst>
+          </p:cNvPr>
+          <p:cNvSpPr>
+            <a:spLocks noGrp="1"/>
+          </p:cNvSpPr>
+          <p:nvPr/>
+        </p:nvSpPr>
+        <p:spPr>
+          <a:xfrm>
+            <a:off x="2414016" y="4636008"/>
+            <a:ext cx="1920240" cy="365760"/>
+          </a:xfrm>
+          <a:prstGeom prst="rect">
+            <a:avLst/>
+          </a:prstGeom>
+          <a:noFill/>
+          <a:ln w="0">
+            <a:noFill/>
+          </a:ln>
+        </p:spPr>
+        <p:txBody>
+          <a:bodyPr lIns="0" tIns="0" rIns="0" bIns="0" anchor="t">
+            <a:normAutofit/>
+          </a:bodyPr>
+          <a:lstStyle/>
+          <a:p>
+            <a:pPr algn="l">
+              <a:lnSpc>
+                <a:spcPct val="90000"/>
+              </a:lnSpc>
+              <a:buNone/>
+            </a:pPr>
+            <a:r>
+              <a:rPr sz="875" b="0" i="0">
+                <a:solidFill>
+                  <a:srgbClr val="59636E"/>
+                </a:solidFill>
+                <a:latin typeface="Arial"/>
+                <a:ea typeface="Arial"/>
+                <a:cs typeface="Arial"/>
+              </a:rPr>
+              <a:t>Todos llegan antes de continuar</a:t>
+            </a:r>
+          </a:p>
+        </p:txBody>
+      </p:sp>
+      <p:sp>
+        <p:nvSpPr>
+          <p:cNvPr id="250" name="txt250">
+            <a:extLst>
+              <a:ext uri="{FF2B5EF4-FFF2-40B4-BE49-F238E27FC236}">
+                <a16:creationId xmlns:a16="http://schemas.microsoft.com/office/drawing/2014/main" id="{AC646FD7-8DF3-416D-A5AD-A2D12739F5A1}"/>
+              </a:ext>
+            </a:extLst>
+          </p:cNvPr>
+          <p:cNvSpPr>
+            <a:spLocks noGrp="1"/>
+          </p:cNvSpPr>
+          <p:nvPr/>
+        </p:nvSpPr>
+        <p:spPr>
+          <a:xfrm>
+            <a:off x="4443984" y="4636008"/>
+            <a:ext cx="969264" cy="365760"/>
+          </a:xfrm>
+          <a:prstGeom prst="rect">
+            <a:avLst/>
+          </a:prstGeom>
+          <a:noFill/>
+          <a:ln w="0">
+            <a:noFill/>
+          </a:ln>
+        </p:spPr>
+        <p:txBody>
+          <a:bodyPr lIns="0" tIns="0" rIns="0" bIns="0" anchor="t">
+            <a:normAutofit/>
+          </a:bodyPr>
+          <a:lstStyle/>
+          <a:p>
+            <a:pPr algn="l">
+              <a:lnSpc>
+                <a:spcPct val="90000"/>
+              </a:lnSpc>
+              <a:buNone/>
+            </a:pPr>
+            <a:r>
+              <a:rPr sz="875" b="0" i="0">
+                <a:solidFill>
+                  <a:srgbClr val="59636E"/>
+                </a:solidFill>
+                <a:latin typeface="Arial"/>
+                <a:ea typeface="Arial"/>
+                <a:cs typeface="Arial"/>
+              </a:rPr>
+              <a:t>Bloqueante</a:t>
+            </a:r>
+          </a:p>
+        </p:txBody>
+      </p:sp>
+      <p:sp>
+        <p:nvSpPr>
+          <p:cNvPr id="251" name="txt251">
+            <a:extLst>
+              <a:ext uri="{FF2B5EF4-FFF2-40B4-BE49-F238E27FC236}">
+                <a16:creationId xmlns:a16="http://schemas.microsoft.com/office/drawing/2014/main" id="{2687DAE0-B5AD-48AC-AD15-053B8942E190}"/>
+              </a:ext>
+            </a:extLst>
+          </p:cNvPr>
+          <p:cNvSpPr>
+            <a:spLocks noGrp="1"/>
+          </p:cNvSpPr>
+          <p:nvPr/>
+        </p:nvSpPr>
+        <p:spPr>
+          <a:xfrm>
+            <a:off x="5522976" y="4636008"/>
+            <a:ext cx="1152144" cy="365760"/>
+          </a:xfrm>
+          <a:prstGeom prst="rect">
+            <a:avLst/>
+          </a:prstGeom>
+          <a:noFill/>
+          <a:ln w="0">
+            <a:noFill/>
+          </a:ln>
+        </p:spPr>
+        <p:txBody>
+          <a:bodyPr lIns="0" tIns="0" rIns="0" bIns="0" anchor="t">
+            <a:normAutofit/>
+          </a:bodyPr>
+          <a:lstStyle/>
+          <a:p>
+            <a:pPr algn="l">
+              <a:lnSpc>
+                <a:spcPct val="90000"/>
+              </a:lnSpc>
+              <a:buNone/>
+            </a:pPr>
+            <a:r>
+              <a:rPr sz="875" b="0" i="0">
+                <a:solidFill>
+                  <a:srgbClr val="59636E"/>
+                </a:solidFill>
+                <a:latin typeface="Arial"/>
+                <a:ea typeface="Arial"/>
+                <a:cs typeface="Arial"/>
+              </a:rPr>
+              <a:t>Medio</a:t>
+            </a:r>
+          </a:p>
+        </p:txBody>
+      </p:sp>
+      <p:sp>
+        <p:nvSpPr>
+          <p:cNvPr id="252" name="txt252">
+            <a:extLst>
+              <a:ext uri="{FF2B5EF4-FFF2-40B4-BE49-F238E27FC236}">
+                <a16:creationId xmlns:a16="http://schemas.microsoft.com/office/drawing/2014/main" id="{B2E8C5CA-3B2B-47E6-B351-CA9914AD718E}"/>
+              </a:ext>
+            </a:extLst>
+          </p:cNvPr>
+          <p:cNvSpPr>
+            <a:spLocks noGrp="1"/>
+          </p:cNvSpPr>
+          <p:nvPr/>
+        </p:nvSpPr>
+        <p:spPr>
+          <a:xfrm>
+            <a:off x="6784848" y="4636008"/>
+            <a:ext cx="2377440" cy="365760"/>
+          </a:xfrm>
+          <a:prstGeom prst="rect">
+            <a:avLst/>
+          </a:prstGeom>
+          <a:noFill/>
+          <a:ln w="0">
+            <a:noFill/>
+          </a:ln>
+        </p:spPr>
+        <p:txBody>
+          <a:bodyPr lIns="0" tIns="0" rIns="0" bIns="0" anchor="t">
+            <a:normAutofit/>
+          </a:bodyPr>
+          <a:lstStyle/>
+          <a:p>
+            <a:pPr algn="l">
+              <a:lnSpc>
+                <a:spcPct val="90000"/>
+              </a:lnSpc>
+              <a:buNone/>
+            </a:pPr>
+            <a:r>
+              <a:rPr sz="875" b="0" i="0">
+                <a:solidFill>
+                  <a:srgbClr val="59636E"/>
+                </a:solidFill>
+                <a:latin typeface="Arial"/>
+                <a:ea typeface="Arial"/>
+                <a:cs typeface="Arial"/>
+              </a:rPr>
+              <a:t>Se cuelga si uno no llega</a:t>
+            </a:r>
+          </a:p>
+        </p:txBody>
+      </p:sp>
+      <p:sp>
+        <p:nvSpPr>
+          <p:cNvPr id="253" name="txt253">
+            <a:extLst>
+              <a:ext uri="{FF2B5EF4-FFF2-40B4-BE49-F238E27FC236}">
+                <a16:creationId xmlns:a16="http://schemas.microsoft.com/office/drawing/2014/main" id="{B01DDFCE-230E-4DF3-B072-1991B2A9D8DC}"/>
+              </a:ext>
+            </a:extLst>
+          </p:cNvPr>
+          <p:cNvSpPr>
+            <a:spLocks noGrp="1"/>
+          </p:cNvSpPr>
+          <p:nvPr/>
+        </p:nvSpPr>
+        <p:spPr>
+          <a:xfrm>
+            <a:off x="9272016" y="4636008"/>
+            <a:ext cx="2569464" cy="365760"/>
+          </a:xfrm>
+          <a:prstGeom prst="rect">
+            <a:avLst/>
+          </a:prstGeom>
+          <a:noFill/>
+          <a:ln w="0">
+            <a:noFill/>
+          </a:ln>
+        </p:spPr>
+        <p:txBody>
+          <a:bodyPr lIns="0" tIns="0" rIns="0" bIns="0" anchor="t">
+            <a:normAutofit/>
+          </a:bodyPr>
+          <a:lstStyle/>
+          <a:p>
+            <a:pPr algn="l">
+              <a:lnSpc>
+                <a:spcPct val="90000"/>
+              </a:lnSpc>
+              <a:buNone/>
+            </a:pPr>
+            <a:r>
+              <a:rPr sz="875" b="0" i="0">
+                <a:solidFill>
+                  <a:srgbClr val="59636E"/>
+                </a:solidFill>
+                <a:latin typeface="Arial"/>
+                <a:ea typeface="Arial"/>
+                <a:cs typeface="Arial"/>
+              </a:rPr>
+              <a:t>Cómputo paralelo por fases</a:t>
+            </a:r>
+          </a:p>
+        </p:txBody>
+      </p:sp>
+      <p:sp>
+        <p:nvSpPr>
+          <p:cNvPr id="254" name="txt254">
+            <a:extLst>
+              <a:ext uri="{FF2B5EF4-FFF2-40B4-BE49-F238E27FC236}">
+                <a16:creationId xmlns:a16="http://schemas.microsoft.com/office/drawing/2014/main" id="{D5202600-E384-4DC3-B68B-2CE63634181B}"/>
+              </a:ext>
+            </a:extLst>
+          </p:cNvPr>
+          <p:cNvSpPr>
+            <a:spLocks noGrp="1"/>
+          </p:cNvSpPr>
+          <p:nvPr/>
+        </p:nvSpPr>
+        <p:spPr>
+          <a:xfrm>
+            <a:off x="539496" y="5038344"/>
+            <a:ext cx="1764792" cy="365760"/>
+          </a:xfrm>
+          <a:prstGeom prst="rect">
+            <a:avLst/>
+          </a:prstGeom>
+          <a:noFill/>
+          <a:ln w="0">
+            <a:noFill/>
+          </a:ln>
+        </p:spPr>
+        <p:txBody>
+          <a:bodyPr lIns="0" tIns="0" rIns="0" bIns="0" anchor="t">
+            <a:normAutofit/>
+          </a:bodyPr>
+          <a:lstStyle/>
+          <a:p>
+            <a:pPr algn="l">
+              <a:buNone/>
+            </a:pPr>
+            <a:r>
+              <a:rPr sz="975" b="1" i="0">
+                <a:solidFill>
+                  <a:srgbClr val="16324F"/>
+                </a:solidFill>
+                <a:latin typeface="Arial"/>
+                <a:ea typeface="Arial"/>
+                <a:cs typeface="Arial"/>
+              </a:rPr>
+              <a:t>Confinamiento a hilo</a:t>
+            </a:r>
+          </a:p>
+        </p:txBody>
+      </p:sp>
+      <p:sp>
+        <p:nvSpPr>
+          <p:cNvPr id="255" name="txt255">
+            <a:extLst>
+              <a:ext uri="{FF2B5EF4-FFF2-40B4-BE49-F238E27FC236}">
+                <a16:creationId xmlns:a16="http://schemas.microsoft.com/office/drawing/2014/main" id="{2038F1D3-C1FD-4305-B97D-F0C4C745D184}"/>
+              </a:ext>
+            </a:extLst>
+          </p:cNvPr>
+          <p:cNvSpPr>
+            <a:spLocks noGrp="1"/>
+          </p:cNvSpPr>
+          <p:nvPr/>
+        </p:nvSpPr>
+        <p:spPr>
+          <a:xfrm>
+            <a:off x="2414016" y="5056632"/>
+            <a:ext cx="1920240" cy="365760"/>
+          </a:xfrm>
+          <a:prstGeom prst="rect">
+            <a:avLst/>
+          </a:prstGeom>
+          <a:noFill/>
+          <a:ln w="0">
+            <a:noFill/>
+          </a:ln>
+        </p:spPr>
+        <p:txBody>
+          <a:bodyPr lIns="0" tIns="0" rIns="0" bIns="0" anchor="t">
+            <a:normAutofit/>
+          </a:bodyPr>
+          <a:lstStyle/>
+          <a:p>
+            <a:pPr algn="l">
+              <a:lnSpc>
+                <a:spcPct val="90000"/>
+              </a:lnSpc>
+              <a:buNone/>
+            </a:pPr>
+            <a:r>
+              <a:rPr sz="875" b="0" i="0">
+                <a:solidFill>
+                  <a:srgbClr val="59636E"/>
+                </a:solidFill>
+                <a:latin typeface="Arial"/>
+                <a:ea typeface="Arial"/>
+                <a:cs typeface="Arial"/>
+              </a:rPr>
+              <a:t>Un solo hilo es dueño del estado</a:t>
+            </a:r>
+          </a:p>
+        </p:txBody>
+      </p:sp>
+      <p:sp>
+        <p:nvSpPr>
+          <p:cNvPr id="256" name="txt256">
+            <a:extLst>
+              <a:ext uri="{FF2B5EF4-FFF2-40B4-BE49-F238E27FC236}">
+                <a16:creationId xmlns:a16="http://schemas.microsoft.com/office/drawing/2014/main" id="{49808CD2-A3FA-4DA9-A28E-84E365D03EC5}"/>
+              </a:ext>
+            </a:extLst>
+          </p:cNvPr>
+          <p:cNvSpPr>
+            <a:spLocks noGrp="1"/>
+          </p:cNvSpPr>
+          <p:nvPr/>
+        </p:nvSpPr>
+        <p:spPr>
+          <a:xfrm>
+            <a:off x="4443984" y="5056632"/>
+            <a:ext cx="969264" cy="365760"/>
+          </a:xfrm>
+          <a:prstGeom prst="rect">
+            <a:avLst/>
+          </a:prstGeom>
+          <a:noFill/>
+          <a:ln w="0">
+            <a:noFill/>
+          </a:ln>
+        </p:spPr>
+        <p:txBody>
+          <a:bodyPr lIns="0" tIns="0" rIns="0" bIns="0" anchor="t">
+            <a:normAutofit/>
+          </a:bodyPr>
+          <a:lstStyle/>
+          <a:p>
+            <a:pPr algn="l">
+              <a:lnSpc>
+                <a:spcPct val="90000"/>
+              </a:lnSpc>
+              <a:buNone/>
+            </a:pPr>
+            <a:r>
+              <a:rPr sz="875" b="0" i="0">
+                <a:solidFill>
+                  <a:srgbClr val="2E9D72"/>
+                </a:solidFill>
+                <a:latin typeface="Arial"/>
+                <a:ea typeface="Arial"/>
+                <a:cs typeface="Arial"/>
+              </a:rPr>
+              <a:t>No espera</a:t>
+            </a:r>
+          </a:p>
+        </p:txBody>
+      </p:sp>
+      <p:sp>
+        <p:nvSpPr>
+          <p:cNvPr id="257" name="txt257">
+            <a:extLst>
+              <a:ext uri="{FF2B5EF4-FFF2-40B4-BE49-F238E27FC236}">
+                <a16:creationId xmlns:a16="http://schemas.microsoft.com/office/drawing/2014/main" id="{A1514BE3-609C-4C48-81E5-622E57D51FC7}"/>
+              </a:ext>
+            </a:extLst>
+          </p:cNvPr>
+          <p:cNvSpPr>
+            <a:spLocks noGrp="1"/>
+          </p:cNvSpPr>
+          <p:nvPr/>
+        </p:nvSpPr>
+        <p:spPr>
+          <a:xfrm>
+            <a:off x="5522976" y="5056632"/>
+            <a:ext cx="1152144" cy="365760"/>
+          </a:xfrm>
+          <a:prstGeom prst="rect">
+            <a:avLst/>
+          </a:prstGeom>
+          <a:noFill/>
+          <a:ln w="0">
+            <a:noFill/>
+          </a:ln>
+        </p:spPr>
+        <p:txBody>
+          <a:bodyPr lIns="0" tIns="0" rIns="0" bIns="0" anchor="t">
+            <a:normAutofit/>
+          </a:bodyPr>
+          <a:lstStyle/>
+          <a:p>
+            <a:pPr algn="l">
+              <a:lnSpc>
+                <a:spcPct val="90000"/>
+              </a:lnSpc>
+              <a:buNone/>
+            </a:pPr>
+            <a:r>
+              <a:rPr sz="875" b="0" i="0">
+                <a:solidFill>
+                  <a:srgbClr val="59636E"/>
+                </a:solidFill>
+                <a:latin typeface="Arial"/>
+                <a:ea typeface="Arial"/>
+                <a:cs typeface="Arial"/>
+              </a:rPr>
+              <a:t>Nulo</a:t>
+            </a:r>
+          </a:p>
+        </p:txBody>
+      </p:sp>
+      <p:sp>
+        <p:nvSpPr>
+          <p:cNvPr id="258" name="txt258">
+            <a:extLst>
+              <a:ext uri="{FF2B5EF4-FFF2-40B4-BE49-F238E27FC236}">
+                <a16:creationId xmlns:a16="http://schemas.microsoft.com/office/drawing/2014/main" id="{445DE8A1-1740-4ACB-A831-68247CCB8C99}"/>
+              </a:ext>
+            </a:extLst>
+          </p:cNvPr>
+          <p:cNvSpPr>
+            <a:spLocks noGrp="1"/>
+          </p:cNvSpPr>
+          <p:nvPr/>
+        </p:nvSpPr>
+        <p:spPr>
+          <a:xfrm>
+            <a:off x="6784848" y="5056632"/>
+            <a:ext cx="2377440" cy="365760"/>
+          </a:xfrm>
+          <a:prstGeom prst="rect">
+            <a:avLst/>
+          </a:prstGeom>
+          <a:noFill/>
+          <a:ln w="0">
+            <a:noFill/>
+          </a:ln>
+        </p:spPr>
+        <p:txBody>
+          <a:bodyPr lIns="0" tIns="0" rIns="0" bIns="0" anchor="t">
+            <a:normAutofit/>
+          </a:bodyPr>
+          <a:lstStyle/>
+          <a:p>
+            <a:pPr algn="l">
+              <a:lnSpc>
+                <a:spcPct val="90000"/>
+              </a:lnSpc>
+              <a:buNone/>
+            </a:pPr>
+            <a:r>
+              <a:rPr sz="875" b="0" i="0">
+                <a:solidFill>
+                  <a:srgbClr val="59636E"/>
+                </a:solidFill>
+                <a:latin typeface="Arial"/>
+                <a:ea typeface="Arial"/>
+                <a:cs typeface="Arial"/>
+              </a:rPr>
+              <a:t>No reparte la carga</a:t>
+            </a:r>
+          </a:p>
+        </p:txBody>
+      </p:sp>
+      <p:sp>
+        <p:nvSpPr>
+          <p:cNvPr id="259" name="txt259">
+            <a:extLst>
+              <a:ext uri="{FF2B5EF4-FFF2-40B4-BE49-F238E27FC236}">
+                <a16:creationId xmlns:a16="http://schemas.microsoft.com/office/drawing/2014/main" id="{33A29332-2333-4132-AA07-52A226A8BC86}"/>
+              </a:ext>
+            </a:extLst>
+          </p:cNvPr>
+          <p:cNvSpPr>
+            <a:spLocks noGrp="1"/>
+          </p:cNvSpPr>
+          <p:nvPr/>
+        </p:nvSpPr>
+        <p:spPr>
+          <a:xfrm>
+            <a:off x="9272016" y="5056632"/>
+            <a:ext cx="2569464" cy="365760"/>
+          </a:xfrm>
+          <a:prstGeom prst="rect">
+            <a:avLst/>
+          </a:prstGeom>
+          <a:noFill/>
+          <a:ln w="0">
+            <a:noFill/>
+          </a:ln>
+        </p:spPr>
+        <p:txBody>
+          <a:bodyPr lIns="0" tIns="0" rIns="0" bIns="0" anchor="t">
+            <a:normAutofit/>
+          </a:bodyPr>
+          <a:lstStyle/>
+          <a:p>
+            <a:pPr algn="l">
+              <a:lnSpc>
+                <a:spcPct val="90000"/>
+              </a:lnSpc>
+              <a:buNone/>
+            </a:pPr>
+            <a:r>
+              <a:rPr sz="875" b="0" i="0">
+                <a:solidFill>
+                  <a:srgbClr val="59636E"/>
+                </a:solidFill>
+                <a:latin typeface="Arial"/>
+                <a:ea typeface="Arial"/>
+                <a:cs typeface="Arial"/>
+              </a:rPr>
+              <a:t>Sockets y claves del Selector</a:t>
+            </a:r>
+          </a:p>
+        </p:txBody>
+      </p:sp>
+      <p:sp>
+        <p:nvSpPr>
+          <p:cNvPr id="260" name="txt260">
+            <a:extLst>
+              <a:ext uri="{FF2B5EF4-FFF2-40B4-BE49-F238E27FC236}">
+                <a16:creationId xmlns:a16="http://schemas.microsoft.com/office/drawing/2014/main" id="{E39ABBB5-3262-491E-82C5-4B08F7239E4A}"/>
+              </a:ext>
+            </a:extLst>
+          </p:cNvPr>
+          <p:cNvSpPr>
+            <a:spLocks noGrp="1"/>
+          </p:cNvSpPr>
+          <p:nvPr/>
+        </p:nvSpPr>
+        <p:spPr>
+          <a:xfrm>
+            <a:off x="539496" y="4169664"/>
+            <a:ext cx="6400800" cy="164592"/>
+          </a:xfrm>
+          <a:prstGeom prst="rect">
+            <a:avLst/>
+          </a:prstGeom>
+          <a:noFill/>
+          <a:ln w="0">
+            <a:noFill/>
+          </a:ln>
+        </p:spPr>
+        <p:txBody>
+          <a:bodyPr lIns="0" tIns="0" rIns="0" bIns="0" anchor="t">
+            <a:normAutofit/>
+          </a:bodyPr>
+          <a:lstStyle/>
+          <a:p>
+            <a:pPr algn="l">
+              <a:buNone/>
+            </a:pPr>
+            <a:r>
+              <a:rPr sz="800" b="1" i="0">
+                <a:solidFill>
+                  <a:srgbClr val="2E9D72"/>
+                </a:solidFill>
+                <a:latin typeface="Arial"/>
+                <a:ea typeface="Arial"/>
+                <a:cs typeface="Arial"/>
+              </a:rPr>
+              <a:t>▸ Las dos técnicas implementadas en la solución del laboratorio</a:t>
+            </a:r>
+          </a:p>
+        </p:txBody>
+      </p:sp>
+      <p:sp>
+        <p:nvSpPr>
+          <p:cNvPr id="261" name="box261">
+            <a:extLst>
+              <a:ext uri="{FF2B5EF4-FFF2-40B4-BE49-F238E27FC236}">
+                <a16:creationId xmlns:a16="http://schemas.microsoft.com/office/drawing/2014/main" id="{B228FC14-2082-4196-A141-1AD4E542E18F}"/>
+              </a:ext>
+            </a:extLst>
+          </p:cNvPr>
+          <p:cNvSpPr>
+            <a:spLocks noGrp="1"/>
+          </p:cNvSpPr>
+          <p:nvPr/>
+        </p:nvSpPr>
+        <p:spPr>
+          <a:xfrm>
+            <a:off x="393192" y="5660136"/>
+            <a:ext cx="11411712" cy="749808"/>
+          </a:xfrm>
+          <a:prstGeom prst="roundRect">
+            <a:avLst>
+              <a:gd name="adj" fmla="val 14000"/>
+            </a:avLst>
+          </a:prstGeom>
+          <a:solidFill>
+            <a:srgbClr val="16324F"/>
+          </a:solidFill>
+          <a:ln w="0">
+            <a:noFill/>
+          </a:ln>
+        </p:spPr>
+        <p:txBody>
+          <a:bodyPr/>
+          <a:lstStyle/>
+          <a:p>
+            <a:endParaRPr dirty="0">
+              <a:highlight>
+                <a:srgbClr val="FFFF00"/>
+              </a:highlight>
+            </a:endParaRPr>
+          </a:p>
+        </p:txBody>
+      </p:sp>
+      <p:sp>
+        <p:nvSpPr>
+          <p:cNvPr id="262" name="txt262">
+            <a:extLst>
+              <a:ext uri="{FF2B5EF4-FFF2-40B4-BE49-F238E27FC236}">
+                <a16:creationId xmlns:a16="http://schemas.microsoft.com/office/drawing/2014/main" id="{2B381E29-6A8B-4199-A850-E3682579E461}"/>
+              </a:ext>
+            </a:extLst>
+          </p:cNvPr>
+          <p:cNvSpPr>
+            <a:spLocks noGrp="1"/>
+          </p:cNvSpPr>
+          <p:nvPr/>
+        </p:nvSpPr>
+        <p:spPr>
+          <a:xfrm>
+            <a:off x="859536" y="5806440"/>
+            <a:ext cx="3145536" cy="201168"/>
+          </a:xfrm>
+          <a:prstGeom prst="rect">
+            <a:avLst/>
+          </a:prstGeom>
+          <a:noFill/>
+          <a:ln w="0">
+            <a:noFill/>
+          </a:ln>
+        </p:spPr>
+        <p:txBody>
+          <a:bodyPr lIns="0" tIns="0" rIns="0" bIns="0" anchor="t">
+            <a:normAutofit/>
+          </a:bodyPr>
+          <a:lstStyle/>
+          <a:p>
+            <a:pPr algn="l">
+              <a:buNone/>
+            </a:pPr>
+            <a:r>
+              <a:rPr sz="1050" b="1" i="0">
+                <a:solidFill>
+                  <a:srgbClr val="3D8DFF"/>
+                </a:solidFill>
+                <a:latin typeface="Arial"/>
+                <a:ea typeface="Arial"/>
+                <a:cs typeface="Arial"/>
+              </a:rPr>
+              <a:t>Bloqueante</a:t>
+            </a:r>
+          </a:p>
+        </p:txBody>
+      </p:sp>
+      <p:sp>
+        <p:nvSpPr>
+          <p:cNvPr id="263" name="txt263">
+            <a:extLst>
+              <a:ext uri="{FF2B5EF4-FFF2-40B4-BE49-F238E27FC236}">
+                <a16:creationId xmlns:a16="http://schemas.microsoft.com/office/drawing/2014/main" id="{444DB6AC-D3F8-4231-801E-8467CE94981A}"/>
+              </a:ext>
+            </a:extLst>
+          </p:cNvPr>
+          <p:cNvSpPr>
+            <a:spLocks noGrp="1"/>
+          </p:cNvSpPr>
+          <p:nvPr/>
+        </p:nvSpPr>
+        <p:spPr>
+          <a:xfrm>
+            <a:off x="859536" y="6044184"/>
+            <a:ext cx="3291840" cy="173736"/>
+          </a:xfrm>
+          <a:prstGeom prst="rect">
+            <a:avLst/>
+          </a:prstGeom>
+          <a:noFill/>
+          <a:ln w="0">
+            <a:noFill/>
+          </a:ln>
+        </p:spPr>
+        <p:txBody>
+          <a:bodyPr lIns="0" tIns="0" rIns="0" bIns="0" anchor="t">
+            <a:normAutofit/>
+          </a:bodyPr>
+          <a:lstStyle/>
+          <a:p>
+            <a:pPr algn="l">
+              <a:buNone/>
+            </a:pPr>
+            <a:r>
+              <a:rPr sz="900" b="0" i="0" dirty="0" err="1">
+                <a:solidFill>
+                  <a:srgbClr val="CBD1D8"/>
+                </a:solidFill>
+                <a:latin typeface="Arial"/>
+                <a:ea typeface="Arial"/>
+                <a:cs typeface="Arial"/>
+              </a:rPr>
+              <a:t>el</a:t>
+            </a:r>
+            <a:r>
+              <a:rPr sz="900" b="0" i="0" dirty="0">
+                <a:solidFill>
+                  <a:srgbClr val="CBD1D8"/>
+                </a:solidFill>
+                <a:latin typeface="Arial"/>
+                <a:ea typeface="Arial"/>
+                <a:cs typeface="Arial"/>
+              </a:rPr>
+              <a:t> </a:t>
+            </a:r>
+            <a:r>
+              <a:rPr sz="900" b="0" i="0" dirty="0" err="1">
+                <a:solidFill>
+                  <a:srgbClr val="CBD1D8"/>
+                </a:solidFill>
+                <a:latin typeface="Arial"/>
+                <a:ea typeface="Arial"/>
+                <a:cs typeface="Arial"/>
+              </a:rPr>
+              <a:t>hilo</a:t>
+            </a:r>
+            <a:r>
+              <a:rPr sz="900" b="0" i="0" dirty="0">
+                <a:solidFill>
+                  <a:srgbClr val="CBD1D8"/>
+                </a:solidFill>
+                <a:latin typeface="Arial"/>
+                <a:ea typeface="Arial"/>
+                <a:cs typeface="Arial"/>
+              </a:rPr>
+              <a:t> se </a:t>
+            </a:r>
+            <a:r>
+              <a:rPr sz="900" b="0" i="0" dirty="0" err="1">
+                <a:solidFill>
+                  <a:srgbClr val="CBD1D8"/>
+                </a:solidFill>
+                <a:latin typeface="Arial"/>
+                <a:ea typeface="Arial"/>
+                <a:cs typeface="Arial"/>
+              </a:rPr>
+              <a:t>suspende</a:t>
+            </a:r>
+            <a:r>
+              <a:rPr sz="900" b="0" i="0" dirty="0">
+                <a:solidFill>
+                  <a:srgbClr val="CBD1D8"/>
+                </a:solidFill>
+                <a:latin typeface="Arial"/>
+                <a:ea typeface="Arial"/>
+                <a:cs typeface="Arial"/>
+              </a:rPr>
+              <a:t> y no consume CPU</a:t>
+            </a:r>
+          </a:p>
+        </p:txBody>
+      </p:sp>
+      <p:sp>
+        <p:nvSpPr>
+          <p:cNvPr id="264" name="txt264">
+            <a:extLst>
+              <a:ext uri="{FF2B5EF4-FFF2-40B4-BE49-F238E27FC236}">
+                <a16:creationId xmlns:a16="http://schemas.microsoft.com/office/drawing/2014/main" id="{318B9BFD-652B-4669-911E-2DBB679F5F8E}"/>
+              </a:ext>
+            </a:extLst>
+          </p:cNvPr>
+          <p:cNvSpPr>
+            <a:spLocks noGrp="1"/>
+          </p:cNvSpPr>
+          <p:nvPr/>
+        </p:nvSpPr>
+        <p:spPr>
+          <a:xfrm>
+            <a:off x="4535424" y="5806440"/>
+            <a:ext cx="3145536" cy="201168"/>
+          </a:xfrm>
+          <a:prstGeom prst="rect">
+            <a:avLst/>
+          </a:prstGeom>
+          <a:noFill/>
+          <a:ln w="0">
+            <a:noFill/>
+          </a:ln>
+        </p:spPr>
+        <p:txBody>
+          <a:bodyPr lIns="0" tIns="0" rIns="0" bIns="0" anchor="t">
+            <a:normAutofit/>
+          </a:bodyPr>
+          <a:lstStyle/>
+          <a:p>
+            <a:pPr algn="l">
+              <a:buNone/>
+            </a:pPr>
+            <a:r>
+              <a:rPr sz="1050" b="1" i="0">
+                <a:solidFill>
+                  <a:srgbClr val="6DCBF4"/>
+                </a:solidFill>
+                <a:latin typeface="Arial"/>
+                <a:ea typeface="Arial"/>
+                <a:cs typeface="Arial"/>
+              </a:rPr>
+              <a:t>No bloqueante</a:t>
+            </a:r>
+          </a:p>
+        </p:txBody>
+      </p:sp>
+      <p:sp>
+        <p:nvSpPr>
+          <p:cNvPr id="265" name="txt265">
+            <a:extLst>
+              <a:ext uri="{FF2B5EF4-FFF2-40B4-BE49-F238E27FC236}">
+                <a16:creationId xmlns:a16="http://schemas.microsoft.com/office/drawing/2014/main" id="{8D2EC335-965A-4F7B-9044-6B8CA66CCF59}"/>
+              </a:ext>
+            </a:extLst>
+          </p:cNvPr>
+          <p:cNvSpPr>
+            <a:spLocks noGrp="1"/>
+          </p:cNvSpPr>
+          <p:nvPr/>
+        </p:nvSpPr>
+        <p:spPr>
+          <a:xfrm>
+            <a:off x="4535424" y="6044184"/>
+            <a:ext cx="3291840" cy="173736"/>
+          </a:xfrm>
+          <a:prstGeom prst="rect">
+            <a:avLst/>
+          </a:prstGeom>
+          <a:noFill/>
+          <a:ln w="0">
+            <a:noFill/>
+          </a:ln>
+        </p:spPr>
+        <p:txBody>
+          <a:bodyPr lIns="0" tIns="0" rIns="0" bIns="0" anchor="t">
+            <a:normAutofit/>
+          </a:bodyPr>
+          <a:lstStyle/>
+          <a:p>
+            <a:pPr algn="l">
+              <a:buNone/>
+            </a:pPr>
+            <a:r>
+              <a:rPr sz="900" b="0" i="0">
+                <a:solidFill>
+                  <a:srgbClr val="CBD1D8"/>
+                </a:solidFill>
+                <a:latin typeface="Arial"/>
+                <a:ea typeface="Arial"/>
+                <a:cs typeface="Arial"/>
+              </a:rPr>
+              <a:t>el hilo reintenta sin suspenderse jamás</a:t>
+            </a:r>
+          </a:p>
+        </p:txBody>
+      </p:sp>
+      <p:sp>
+        <p:nvSpPr>
+          <p:cNvPr id="266" name="txt266">
+            <a:extLst>
+              <a:ext uri="{FF2B5EF4-FFF2-40B4-BE49-F238E27FC236}">
+                <a16:creationId xmlns:a16="http://schemas.microsoft.com/office/drawing/2014/main" id="{A3AC17D5-30B0-4853-B2D9-FF4DA62FC51D}"/>
+              </a:ext>
+            </a:extLst>
+          </p:cNvPr>
+          <p:cNvSpPr>
+            <a:spLocks noGrp="1"/>
+          </p:cNvSpPr>
+          <p:nvPr/>
+        </p:nvSpPr>
+        <p:spPr>
+          <a:xfrm>
+            <a:off x="8211312" y="5806440"/>
+            <a:ext cx="3145536" cy="201168"/>
+          </a:xfrm>
+          <a:prstGeom prst="rect">
+            <a:avLst/>
+          </a:prstGeom>
+          <a:noFill/>
+          <a:ln w="0">
+            <a:noFill/>
+          </a:ln>
+        </p:spPr>
+        <p:txBody>
+          <a:bodyPr lIns="0" tIns="0" rIns="0" bIns="0" anchor="t">
+            <a:normAutofit/>
+          </a:bodyPr>
+          <a:lstStyle/>
+          <a:p>
+            <a:pPr algn="l">
+              <a:buNone/>
+            </a:pPr>
+            <a:r>
+              <a:rPr sz="1050" b="1" i="0">
+                <a:solidFill>
+                  <a:srgbClr val="F4B942"/>
+                </a:solidFill>
+                <a:latin typeface="Arial"/>
+                <a:ea typeface="Arial"/>
+                <a:cs typeface="Arial"/>
+              </a:rPr>
+              <a:t>En el laboratorio</a:t>
+            </a:r>
+          </a:p>
+        </p:txBody>
+      </p:sp>
+      <p:sp>
+        <p:nvSpPr>
+          <p:cNvPr id="267" name="txt267">
+            <a:extLst>
+              <a:ext uri="{FF2B5EF4-FFF2-40B4-BE49-F238E27FC236}">
+                <a16:creationId xmlns:a16="http://schemas.microsoft.com/office/drawing/2014/main" id="{A8F4BAB2-27F3-4CE4-8F42-2820B08DAE74}"/>
+              </a:ext>
+            </a:extLst>
+          </p:cNvPr>
+          <p:cNvSpPr>
+            <a:spLocks noGrp="1"/>
+          </p:cNvSpPr>
+          <p:nvPr/>
+        </p:nvSpPr>
+        <p:spPr>
+          <a:xfrm>
+            <a:off x="8211312" y="6044184"/>
+            <a:ext cx="3291840" cy="173736"/>
+          </a:xfrm>
+          <a:prstGeom prst="rect">
+            <a:avLst/>
+          </a:prstGeom>
+          <a:noFill/>
+          <a:ln w="0">
+            <a:noFill/>
+          </a:ln>
+        </p:spPr>
+        <p:txBody>
+          <a:bodyPr lIns="0" tIns="0" rIns="0" bIns="0" anchor="t">
+            <a:normAutofit/>
+          </a:bodyPr>
+          <a:lstStyle/>
+          <a:p>
+            <a:pPr algn="l">
+              <a:buNone/>
+            </a:pPr>
+            <a:r>
+              <a:rPr sz="900" b="0" i="0">
+                <a:solidFill>
+                  <a:srgbClr val="CBD1D8"/>
+                </a:solidFill>
+                <a:latin typeface="Arial"/>
+                <a:ea typeface="Arial"/>
+                <a:cs typeface="Arial"/>
+              </a:rPr>
+              <a:t>BlockingQueue coordina · CAS ordena</a:t>
+            </a:r>
+          </a:p>
+        </p:txBody>
+      </p:sp>
+      <p:sp>
+        <p:nvSpPr>
+          <p:cNvPr id="268" name="merged-page">
+            <a:extLst>
+              <a:ext uri="{FF2B5EF4-FFF2-40B4-BE49-F238E27FC236}">
+                <a16:creationId xmlns:a16="http://schemas.microsoft.com/office/drawing/2014/main" id="{8912BD7A-79E6-47FC-81A2-879EEC4CAB6C}"/>
+              </a:ext>
+            </a:extLst>
+          </p:cNvPr>
+          <p:cNvSpPr>
+            <a:spLocks noGrp="1"/>
+          </p:cNvSpPr>
+          <p:nvPr/>
+        </p:nvSpPr>
+        <p:spPr>
+          <a:xfrm>
+            <a:off x="10858500" y="6457950"/>
+            <a:ext cx="933450" cy="171450"/>
+          </a:xfrm>
+          <a:prstGeom prst="rect">
+            <a:avLst/>
+          </a:prstGeom>
+          <a:noFill/>
+          <a:ln w="0">
+            <a:noFill/>
+            <a:prstDash val="solid"/>
+          </a:ln>
+        </p:spPr>
+        <p:txBody>
+          <a:bodyPr lIns="0" tIns="0" rIns="0" bIns="0">
+            <a:normAutofit/>
+          </a:bodyPr>
+          <a:lstStyle/>
+          <a:p>
+            <a:pPr algn="r">
+              <a:defRPr sz="825">
+                <a:solidFill>
+                  <a:srgbClr val="59636E"/>
+                </a:solidFill>
+                <a:latin typeface="Arial"/>
+                <a:ea typeface="Arial"/>
+                <a:cs typeface="Arial"/>
+              </a:defRPr>
+            </a:pPr>
+            <a:r>
+              <a:rPr sz="825">
+                <a:solidFill>
+                  <a:srgbClr val="59636E"/>
+                </a:solidFill>
+                <a:latin typeface="Arial"/>
+                <a:ea typeface="Arial"/>
+                <a:cs typeface="Arial"/>
+              </a:rPr>
+              <a:t>03 / 03</a:t>
+            </a:r>
+          </a:p>
+        </p:txBody>
+      </p:sp>
+    </p:spTree>
+  </p:cSld>
+  <p:clrMapOvr>
+    <a:masterClrMapping/>
+  </p:clrMapOvr>
+</p:sld>
+</file>
+
+<file path=ppt/slides/slide4.xml><?xml version="1.0" encoding="utf-8"?>
+<p:sld xmlns:a="http://schemas.openxmlformats.org/drawingml/2006/main" xmlns:r="http://schemas.openxmlformats.org/officeDocument/2006/relationships" xmlns:p="http://schemas.openxmlformats.org/presentationml/2006/main">
+  <p:cSld>
+    <p:bg>
+      <p:bgPr>
+        <a:solidFill>
+          <a:srgbClr val="FFFFFF"/>
+        </a:solidFill>
+        <a:effectLst/>
+      </p:bgPr>
+    </p:bg>
+    <p:spTree>
+      <p:nvGrpSpPr>
+        <p:cNvPr id="1" name=""/>
+        <p:cNvGrpSpPr/>
+        <p:nvPr/>
+      </p:nvGrpSpPr>
+      <p:grpSpPr>
+        <a:xfrm>
+          <a:off x="0" y="0"/>
+          <a:ext cx="0" cy="0"/>
+          <a:chOff x="0" y="0"/>
+          <a:chExt cx="0" cy="0"/>
+        </a:xfrm>
+      </p:grpSpPr>
+      <p:sp>
+        <p:nvSpPr>
           <p:cNvPr id="74" name="one-kicker">
             <a:extLst>
               <a:ext uri="{FF2B5EF4-FFF2-40B4-BE49-F238E27FC236}">
@@ -8578,7 +10954,7 @@
 </p:sld>
 </file>
 
-<file path=ppt/slides/slide4.xml><?xml version="1.0" encoding="utf-8"?>
+<file path=ppt/slides/slide5.xml><?xml version="1.0" encoding="utf-8"?>
 <p:sld xmlns:a="http://schemas.openxmlformats.org/drawingml/2006/main" xmlns:r="http://schemas.openxmlformats.org/officeDocument/2006/relationships" xmlns:p="http://schemas.openxmlformats.org/presentationml/2006/main">
   <p:cSld>
     <p:bg>
